--- a/activities/Activity-03-Build-from-Microsoft-Infographic-Maker/A03-Build-from-Microsoft-Infographic-Maker-Sample.pptx
+++ b/activities/Activity-03-Build-from-Microsoft-Infographic-Maker/A03-Build-from-Microsoft-Infographic-Maker-Sample.pptx
@@ -10,6 +10,7 @@
     <p:sldId id="258" r:id="rId9"/>
     <p:sldId id="259" r:id="rId10"/>
     <p:sldId id="260" r:id="rId11"/>
+    <p:sldId id="261" r:id="rId12"/>
   </p:sldIdLst>
   <p:sldSz cx="12191695" cy="6858000" type="screen4x3"/>
   <p:notesSz cx="6858000" cy="9144000"/>
@@ -3442,7 +3443,7 @@
                 </a:solidFill>
                 <a:latin typeface="Arial"/>
               </a:rPr>
-              <a:t>Microsoft Infographic Maker + PowerPoint</a:t>
+              <a:t>Microsoft 365 Copilot infographic maker + PowerPoint</a:t>
             </a:r>
           </a:p>
         </p:txBody>
@@ -3525,6 +3526,246 @@
             <a:avLst/>
           </a:prstGeom>
           <a:solidFill>
+            <a:srgbClr val="7C3AED"/>
+          </a:solidFill>
+          <a:ln>
+            <a:solidFill>
+              <a:srgbClr val="7C3AED"/>
+            </a:solidFill>
+          </a:ln>
+        </p:spPr>
+        <p:style>
+          <a:lnRef idx="1">
+            <a:schemeClr val="accent1"/>
+          </a:lnRef>
+          <a:fillRef idx="3">
+            <a:schemeClr val="accent1"/>
+          </a:fillRef>
+          <a:effectRef idx="2">
+            <a:schemeClr val="accent1"/>
+          </a:effectRef>
+          <a:fontRef idx="minor">
+            <a:schemeClr val="lt1"/>
+          </a:fontRef>
+        </p:style>
+        <p:txBody>
+          <a:bodyPr rtlCol="0" anchor="ctr"/>
+          <a:lstStyle/>
+          <a:p>
+            <a:pPr algn="ctr"/>
+          </a:p>
+        </p:txBody>
+      </p:sp>
+      <p:sp>
+        <p:nvSpPr>
+          <p:cNvPr id="4" name="TextBox 3"/>
+          <p:cNvSpPr txBox="1"/>
+          <p:nvPr/>
+        </p:nvSpPr>
+        <p:spPr>
+          <a:xfrm>
+            <a:off x="658368" y="384048"/>
+            <a:ext cx="10789920" cy="320040"/>
+          </a:xfrm>
+          <a:prstGeom prst="rect">
+            <a:avLst/>
+          </a:prstGeom>
+          <a:noFill/>
+        </p:spPr>
+        <p:txBody>
+          <a:bodyPr wrap="square" anchor="t">
+            <a:spAutoFit/>
+          </a:bodyPr>
+          <a:lstStyle/>
+          <a:p>
+            <a:pPr algn="l"/>
+            <a:r>
+              <a:rPr sz="1100" b="1">
+                <a:solidFill>
+                  <a:srgbClr val="7C3AED"/>
+                </a:solidFill>
+                <a:latin typeface="Arial"/>
+              </a:rPr>
+              <a:t>ACTIVITY 03 · FULL COPY-READY TEXT IN PROMPTS.MD AND AI PROMPT LAB</a:t>
+            </a:r>
+          </a:p>
+        </p:txBody>
+      </p:sp>
+      <p:sp>
+        <p:nvSpPr>
+          <p:cNvPr id="5" name="TextBox 4"/>
+          <p:cNvSpPr txBox="1"/>
+          <p:nvPr/>
+        </p:nvSpPr>
+        <p:spPr>
+          <a:xfrm>
+            <a:off x="658368" y="749808"/>
+            <a:ext cx="10789920" cy="658368"/>
+          </a:xfrm>
+          <a:prstGeom prst="rect">
+            <a:avLst/>
+          </a:prstGeom>
+          <a:noFill/>
+        </p:spPr>
+        <p:txBody>
+          <a:bodyPr wrap="square" anchor="t">
+            <a:spAutoFit/>
+          </a:bodyPr>
+          <a:lstStyle/>
+          <a:p>
+            <a:pPr algn="l"/>
+            <a:r>
+              <a:rPr sz="2700" b="1">
+                <a:solidFill>
+                  <a:srgbClr val="161B26"/>
+                </a:solidFill>
+                <a:latin typeface="Arial"/>
+              </a:rPr>
+              <a:t>AI Prompt Starters</a:t>
+            </a:r>
+          </a:p>
+        </p:txBody>
+      </p:sp>
+      <p:sp>
+        <p:nvSpPr>
+          <p:cNvPr id="6" name="Rectangle 5"/>
+          <p:cNvSpPr/>
+          <p:nvPr/>
+        </p:nvSpPr>
+        <p:spPr>
+          <a:xfrm>
+            <a:off x="658368" y="1444752"/>
+            <a:ext cx="10881360" cy="18288"/>
+          </a:xfrm>
+          <a:prstGeom prst="rect">
+            <a:avLst/>
+          </a:prstGeom>
+          <a:solidFill>
+            <a:srgbClr val="E2E8F0"/>
+          </a:solidFill>
+          <a:ln>
+            <a:solidFill>
+              <a:srgbClr val="E2E8F0"/>
+            </a:solidFill>
+          </a:ln>
+        </p:spPr>
+        <p:style>
+          <a:lnRef idx="1">
+            <a:schemeClr val="accent1"/>
+          </a:lnRef>
+          <a:fillRef idx="3">
+            <a:schemeClr val="accent1"/>
+          </a:fillRef>
+          <a:effectRef idx="2">
+            <a:schemeClr val="accent1"/>
+          </a:effectRef>
+          <a:fontRef idx="minor">
+            <a:schemeClr val="lt1"/>
+          </a:fontRef>
+        </p:style>
+        <p:txBody>
+          <a:bodyPr rtlCol="0" anchor="ctr"/>
+          <a:lstStyle/>
+          <a:p>
+            <a:pPr algn="ctr"/>
+          </a:p>
+        </p:txBody>
+      </p:sp>
+      <p:sp>
+        <p:nvSpPr>
+          <p:cNvPr id="7" name="TextBox 6"/>
+          <p:cNvSpPr txBox="1"/>
+          <p:nvPr/>
+        </p:nvSpPr>
+        <p:spPr>
+          <a:xfrm>
+            <a:off x="658368" y="6473952"/>
+            <a:ext cx="9875520" cy="201168"/>
+          </a:xfrm>
+          <a:prstGeom prst="rect">
+            <a:avLst/>
+          </a:prstGeom>
+          <a:noFill/>
+        </p:spPr>
+        <p:txBody>
+          <a:bodyPr wrap="square" anchor="t">
+            <a:spAutoFit/>
+          </a:bodyPr>
+          <a:lstStyle/>
+          <a:p>
+            <a:pPr algn="l"/>
+            <a:r>
+              <a:rPr sz="800" b="0">
+                <a:solidFill>
+                  <a:srgbClr val="5B6372"/>
+                </a:solidFill>
+                <a:latin typeface="Arial"/>
+              </a:rPr>
+              <a:t>TGS-2026064178 · ACTIVITY PRACTICE · Tertiary Infotech Academy Pte Ltd</a:t>
+            </a:r>
+          </a:p>
+        </p:txBody>
+      </p:sp>
+      <p:sp>
+        <p:nvSpPr>
+          <p:cNvPr id="8" name="Rounded Rectangle 7"/>
+          <p:cNvSpPr/>
+          <p:nvPr/>
+        </p:nvSpPr>
+        <p:spPr>
+          <a:xfrm>
+            <a:off x="731520" y="1755648"/>
+            <a:ext cx="5166360" cy="1847088"/>
+          </a:xfrm>
+          <a:prstGeom prst="roundRect">
+            <a:avLst/>
+          </a:prstGeom>
+          <a:solidFill>
+            <a:srgbClr val="F5F8FC"/>
+          </a:solidFill>
+          <a:ln>
+            <a:solidFill>
+              <a:srgbClr val="E2E8F0"/>
+            </a:solidFill>
+          </a:ln>
+        </p:spPr>
+        <p:style>
+          <a:lnRef idx="1">
+            <a:schemeClr val="accent1"/>
+          </a:lnRef>
+          <a:fillRef idx="3">
+            <a:schemeClr val="accent1"/>
+          </a:fillRef>
+          <a:effectRef idx="2">
+            <a:schemeClr val="accent1"/>
+          </a:effectRef>
+          <a:fontRef idx="minor">
+            <a:schemeClr val="lt1"/>
+          </a:fontRef>
+        </p:style>
+        <p:txBody>
+          <a:bodyPr rtlCol="0" anchor="ctr"/>
+          <a:lstStyle/>
+          <a:p>
+            <a:pPr algn="ctr"/>
+          </a:p>
+        </p:txBody>
+      </p:sp>
+      <p:sp>
+        <p:nvSpPr>
+          <p:cNvPr id="9" name="Rectangle 8"/>
+          <p:cNvSpPr/>
+          <p:nvPr/>
+        </p:nvSpPr>
+        <p:spPr>
+          <a:xfrm>
+            <a:off x="731520" y="1755648"/>
+            <a:ext cx="73152" cy="1847088"/>
+          </a:xfrm>
+          <a:prstGeom prst="rect">
+            <a:avLst/>
+          </a:prstGeom>
+          <a:solidFill>
             <a:srgbClr val="1F6FEB"/>
           </a:solidFill>
           <a:ln>
@@ -3557,14 +3798,94 @@
       </p:sp>
       <p:sp>
         <p:nvSpPr>
-          <p:cNvPr id="4" name="TextBox 3"/>
+          <p:cNvPr id="10" name="Rounded Rectangle 9"/>
+          <p:cNvSpPr/>
+          <p:nvPr/>
+        </p:nvSpPr>
+        <p:spPr>
+          <a:xfrm>
+            <a:off x="932688" y="1975104"/>
+            <a:ext cx="438912" cy="438912"/>
+          </a:xfrm>
+          <a:prstGeom prst="roundRect">
+            <a:avLst/>
+          </a:prstGeom>
+          <a:solidFill>
+            <a:srgbClr val="1F6FEB"/>
+          </a:solidFill>
+          <a:ln>
+            <a:solidFill>
+              <a:srgbClr val="1F6FEB"/>
+            </a:solidFill>
+          </a:ln>
+        </p:spPr>
+        <p:style>
+          <a:lnRef idx="1">
+            <a:schemeClr val="accent1"/>
+          </a:lnRef>
+          <a:fillRef idx="3">
+            <a:schemeClr val="accent1"/>
+          </a:fillRef>
+          <a:effectRef idx="2">
+            <a:schemeClr val="accent1"/>
+          </a:effectRef>
+          <a:fontRef idx="minor">
+            <a:schemeClr val="lt1"/>
+          </a:fontRef>
+        </p:style>
+        <p:txBody>
+          <a:bodyPr rtlCol="0" anchor="ctr"/>
+          <a:lstStyle/>
+          <a:p>
+            <a:pPr algn="ctr"/>
+          </a:p>
+        </p:txBody>
+      </p:sp>
+      <p:sp>
+        <p:nvSpPr>
+          <p:cNvPr id="11" name="TextBox 10"/>
           <p:cNvSpPr txBox="1"/>
           <p:nvPr/>
         </p:nvSpPr>
         <p:spPr>
           <a:xfrm>
-            <a:off x="658368" y="384048"/>
-            <a:ext cx="10789920" cy="320040"/>
+            <a:off x="932688" y="1984248"/>
+            <a:ext cx="438912" cy="420624"/>
+          </a:xfrm>
+          <a:prstGeom prst="rect">
+            <a:avLst/>
+          </a:prstGeom>
+          <a:noFill/>
+        </p:spPr>
+        <p:txBody>
+          <a:bodyPr wrap="square" anchor="ctr">
+            <a:spAutoFit/>
+          </a:bodyPr>
+          <a:lstStyle/>
+          <a:p>
+            <a:pPr algn="ctr"/>
+            <a:r>
+              <a:rPr sz="1400" b="1">
+                <a:solidFill>
+                  <a:srgbClr val="FFFFFF"/>
+                </a:solidFill>
+                <a:latin typeface="Arial"/>
+              </a:rPr>
+              <a:t>1</a:t>
+            </a:r>
+          </a:p>
+        </p:txBody>
+      </p:sp>
+      <p:sp>
+        <p:nvSpPr>
+          <p:cNvPr id="12" name="TextBox 11"/>
+          <p:cNvSpPr txBox="1"/>
+          <p:nvPr/>
+        </p:nvSpPr>
+        <p:spPr>
+          <a:xfrm>
+            <a:off x="1536192" y="1938528"/>
+            <a:ext cx="4178808" cy="329184"/>
           </a:xfrm>
           <a:prstGeom prst="rect">
             <a:avLst/>
@@ -3579,27 +3900,27 @@
           <a:p>
             <a:pPr algn="l"/>
             <a:r>
-              <a:rPr sz="1100" b="1">
+              <a:rPr sz="1400" b="1">
                 <a:solidFill>
                   <a:srgbClr val="1F6FEB"/>
                 </a:solidFill>
                 <a:latin typeface="Arial"/>
               </a:rPr>
-              <a:t>ACTIVITY 03 · CONTEXT</a:t>
-            </a:r>
-          </a:p>
-        </p:txBody>
-      </p:sp>
-      <p:sp>
-        <p:nvSpPr>
-          <p:cNvPr id="5" name="TextBox 4"/>
+              <a:t>Data analyst</a:t>
+            </a:r>
+          </a:p>
+        </p:txBody>
+      </p:sp>
+      <p:sp>
+        <p:nvSpPr>
+          <p:cNvPr id="13" name="TextBox 12"/>
           <p:cNvSpPr txBox="1"/>
           <p:nvPr/>
         </p:nvSpPr>
         <p:spPr>
           <a:xfrm>
-            <a:off x="658368" y="749808"/>
-            <a:ext cx="10789920" cy="658368"/>
+            <a:off x="1536192" y="2322576"/>
+            <a:ext cx="4178808" cy="1133856"/>
           </a:xfrm>
           <a:prstGeom prst="rect">
             <a:avLst/>
@@ -3614,33 +3935,33 @@
           <a:p>
             <a:pPr algn="l"/>
             <a:r>
-              <a:rPr sz="2700" b="1">
+              <a:rPr sz="1150" b="0">
                 <a:solidFill>
                   <a:srgbClr val="161B26"/>
                 </a:solidFill>
                 <a:latin typeface="Arial"/>
               </a:rPr>
-              <a:t>The Scenario</a:t>
-            </a:r>
-          </a:p>
-        </p:txBody>
-      </p:sp>
-      <p:sp>
-        <p:nvSpPr>
-          <p:cNvPr id="6" name="Rectangle 5"/>
+              <a:t>Using only the attached approved sources, create a source register, identify duplicates or conflicting definitions, clean the table, show formulas or transformations, and return five candidate insights with citations, caveats and a con…</a:t>
+            </a:r>
+          </a:p>
+        </p:txBody>
+      </p:sp>
+      <p:sp>
+        <p:nvSpPr>
+          <p:cNvPr id="14" name="Rounded Rectangle 13"/>
           <p:cNvSpPr/>
           <p:nvPr/>
         </p:nvSpPr>
         <p:spPr>
           <a:xfrm>
-            <a:off x="658368" y="1444752"/>
-            <a:ext cx="10881360" cy="18288"/>
-          </a:xfrm>
-          <a:prstGeom prst="rect">
-            <a:avLst/>
-          </a:prstGeom>
-          <a:solidFill>
-            <a:srgbClr val="E2E8F0"/>
+            <a:off x="6144768" y="1755648"/>
+            <a:ext cx="5166360" cy="1847088"/>
+          </a:xfrm>
+          <a:prstGeom prst="roundRect">
+            <a:avLst/>
+          </a:prstGeom>
+          <a:solidFill>
+            <a:srgbClr val="F5F8FC"/>
           </a:solidFill>
           <a:ln>
             <a:solidFill>
@@ -3672,14 +3993,139 @@
       </p:sp>
       <p:sp>
         <p:nvSpPr>
-          <p:cNvPr id="7" name="TextBox 6"/>
+          <p:cNvPr id="15" name="Rectangle 14"/>
+          <p:cNvSpPr/>
+          <p:nvPr/>
+        </p:nvSpPr>
+        <p:spPr>
+          <a:xfrm>
+            <a:off x="6144768" y="1755648"/>
+            <a:ext cx="73152" cy="1847088"/>
+          </a:xfrm>
+          <a:prstGeom prst="rect">
+            <a:avLst/>
+          </a:prstGeom>
+          <a:solidFill>
+            <a:srgbClr val="10B981"/>
+          </a:solidFill>
+          <a:ln>
+            <a:solidFill>
+              <a:srgbClr val="10B981"/>
+            </a:solidFill>
+          </a:ln>
+        </p:spPr>
+        <p:style>
+          <a:lnRef idx="1">
+            <a:schemeClr val="accent1"/>
+          </a:lnRef>
+          <a:fillRef idx="3">
+            <a:schemeClr val="accent1"/>
+          </a:fillRef>
+          <a:effectRef idx="2">
+            <a:schemeClr val="accent1"/>
+          </a:effectRef>
+          <a:fontRef idx="minor">
+            <a:schemeClr val="lt1"/>
+          </a:fontRef>
+        </p:style>
+        <p:txBody>
+          <a:bodyPr rtlCol="0" anchor="ctr"/>
+          <a:lstStyle/>
+          <a:p>
+            <a:pPr algn="ctr"/>
+          </a:p>
+        </p:txBody>
+      </p:sp>
+      <p:sp>
+        <p:nvSpPr>
+          <p:cNvPr id="16" name="Rounded Rectangle 15"/>
+          <p:cNvSpPr/>
+          <p:nvPr/>
+        </p:nvSpPr>
+        <p:spPr>
+          <a:xfrm>
+            <a:off x="6345936" y="1975104"/>
+            <a:ext cx="438912" cy="438912"/>
+          </a:xfrm>
+          <a:prstGeom prst="roundRect">
+            <a:avLst/>
+          </a:prstGeom>
+          <a:solidFill>
+            <a:srgbClr val="10B981"/>
+          </a:solidFill>
+          <a:ln>
+            <a:solidFill>
+              <a:srgbClr val="10B981"/>
+            </a:solidFill>
+          </a:ln>
+        </p:spPr>
+        <p:style>
+          <a:lnRef idx="1">
+            <a:schemeClr val="accent1"/>
+          </a:lnRef>
+          <a:fillRef idx="3">
+            <a:schemeClr val="accent1"/>
+          </a:fillRef>
+          <a:effectRef idx="2">
+            <a:schemeClr val="accent1"/>
+          </a:effectRef>
+          <a:fontRef idx="minor">
+            <a:schemeClr val="lt1"/>
+          </a:fontRef>
+        </p:style>
+        <p:txBody>
+          <a:bodyPr rtlCol="0" anchor="ctr"/>
+          <a:lstStyle/>
+          <a:p>
+            <a:pPr algn="ctr"/>
+          </a:p>
+        </p:txBody>
+      </p:sp>
+      <p:sp>
+        <p:nvSpPr>
+          <p:cNvPr id="17" name="TextBox 16"/>
           <p:cNvSpPr txBox="1"/>
           <p:nvPr/>
         </p:nvSpPr>
         <p:spPr>
           <a:xfrm>
-            <a:off x="658368" y="6473952"/>
-            <a:ext cx="9875520" cy="201168"/>
+            <a:off x="6345936" y="1984248"/>
+            <a:ext cx="438912" cy="420624"/>
+          </a:xfrm>
+          <a:prstGeom prst="rect">
+            <a:avLst/>
+          </a:prstGeom>
+          <a:noFill/>
+        </p:spPr>
+        <p:txBody>
+          <a:bodyPr wrap="square" anchor="ctr">
+            <a:spAutoFit/>
+          </a:bodyPr>
+          <a:lstStyle/>
+          <a:p>
+            <a:pPr algn="ctr"/>
+            <a:r>
+              <a:rPr sz="1400" b="1">
+                <a:solidFill>
+                  <a:srgbClr val="FFFFFF"/>
+                </a:solidFill>
+                <a:latin typeface="Arial"/>
+              </a:rPr>
+              <a:t>2</a:t>
+            </a:r>
+          </a:p>
+        </p:txBody>
+      </p:sp>
+      <p:sp>
+        <p:nvSpPr>
+          <p:cNvPr id="18" name="TextBox 17"/>
+          <p:cNvSpPr txBox="1"/>
+          <p:nvPr/>
+        </p:nvSpPr>
+        <p:spPr>
+          <a:xfrm>
+            <a:off x="6949440" y="1938528"/>
+            <a:ext cx="4178808" cy="329184"/>
           </a:xfrm>
           <a:prstGeom prst="rect">
             <a:avLst/>
@@ -3694,27 +4140,62 @@
           <a:p>
             <a:pPr algn="l"/>
             <a:r>
-              <a:rPr sz="800" b="0">
-                <a:solidFill>
-                  <a:srgbClr val="5B6372"/>
+              <a:rPr sz="1400" b="1">
+                <a:solidFill>
+                  <a:srgbClr val="10B981"/>
                 </a:solidFill>
                 <a:latin typeface="Arial"/>
               </a:rPr>
-              <a:t>TGS-2024048310 · ACTIVITY PRACTICE · Tertiary Infotech Academy Pte Ltd</a:t>
-            </a:r>
-          </a:p>
-        </p:txBody>
-      </p:sp>
-      <p:sp>
-        <p:nvSpPr>
-          <p:cNvPr id="8" name="Rounded Rectangle 7"/>
+              <a:t>Infographic</a:t>
+            </a:r>
+          </a:p>
+        </p:txBody>
+      </p:sp>
+      <p:sp>
+        <p:nvSpPr>
+          <p:cNvPr id="19" name="TextBox 18"/>
+          <p:cNvSpPr txBox="1"/>
+          <p:nvPr/>
+        </p:nvSpPr>
+        <p:spPr>
+          <a:xfrm>
+            <a:off x="6949440" y="2322576"/>
+            <a:ext cx="4178808" cy="1133856"/>
+          </a:xfrm>
+          <a:prstGeom prst="rect">
+            <a:avLst/>
+          </a:prstGeom>
+          <a:noFill/>
+        </p:spPr>
+        <p:txBody>
+          <a:bodyPr wrap="square" anchor="t">
+            <a:spAutoFit/>
+          </a:bodyPr>
+          <a:lstStyle/>
+          <a:p>
+            <a:pPr algn="l"/>
+            <a:r>
+              <a:rPr sz="1150" b="0">
+                <a:solidFill>
+                  <a:srgbClr val="161B26"/>
+                </a:solidFill>
+                <a:latin typeface="Arial"/>
+              </a:rPr>
+              <a:t>Create a one-page executive infographic for Singapore retail managers. Lead with one decision insight, show three supporting metrics, include a five-stage flow and a source footer. Use a clean professional style, strong hierarchy and n…</a:t>
+            </a:r>
+          </a:p>
+        </p:txBody>
+      </p:sp>
+      <p:sp>
+        <p:nvSpPr>
+          <p:cNvPr id="20" name="Rounded Rectangle 19"/>
           <p:cNvSpPr/>
           <p:nvPr/>
         </p:nvSpPr>
         <p:spPr>
           <a:xfrm>
-            <a:off x="731520" y="1783080"/>
-            <a:ext cx="10698480" cy="1691640"/>
+            <a:off x="731520" y="3877056"/>
+            <a:ext cx="5166360" cy="1847088"/>
           </a:xfrm>
           <a:prstGeom prst="roundRect">
             <a:avLst/>
@@ -3752,24 +4233,24 @@
       </p:sp>
       <p:sp>
         <p:nvSpPr>
-          <p:cNvPr id="9" name="Rectangle 8"/>
+          <p:cNvPr id="21" name="Rectangle 20"/>
           <p:cNvSpPr/>
           <p:nvPr/>
         </p:nvSpPr>
         <p:spPr>
           <a:xfrm>
-            <a:off x="731520" y="1783080"/>
-            <a:ext cx="73152" cy="1691640"/>
-          </a:xfrm>
-          <a:prstGeom prst="rect">
-            <a:avLst/>
-          </a:prstGeom>
-          <a:solidFill>
-            <a:srgbClr val="1F6FEB"/>
+            <a:off x="731520" y="3877056"/>
+            <a:ext cx="73152" cy="1847088"/>
+          </a:xfrm>
+          <a:prstGeom prst="rect">
+            <a:avLst/>
+          </a:prstGeom>
+          <a:solidFill>
+            <a:srgbClr val="7C3AED"/>
           </a:solidFill>
           <a:ln>
             <a:solidFill>
-              <a:srgbClr val="1F6FEB"/>
+              <a:srgbClr val="7C3AED"/>
             </a:solidFill>
           </a:ln>
         </p:spPr>
@@ -3797,24 +4278,24 @@
       </p:sp>
       <p:sp>
         <p:nvSpPr>
-          <p:cNvPr id="10" name="Rounded Rectangle 9"/>
+          <p:cNvPr id="22" name="Rounded Rectangle 21"/>
           <p:cNvSpPr/>
           <p:nvPr/>
         </p:nvSpPr>
         <p:spPr>
           <a:xfrm>
-            <a:off x="932688" y="2002536"/>
+            <a:off x="932688" y="4096512"/>
             <a:ext cx="438912" cy="438912"/>
           </a:xfrm>
           <a:prstGeom prst="roundRect">
             <a:avLst/>
           </a:prstGeom>
           <a:solidFill>
-            <a:srgbClr val="1F6FEB"/>
+            <a:srgbClr val="7C3AED"/>
           </a:solidFill>
           <a:ln>
             <a:solidFill>
-              <a:srgbClr val="1F6FEB"/>
+              <a:srgbClr val="7C3AED"/>
             </a:solidFill>
           </a:ln>
         </p:spPr>
@@ -3842,13 +4323,13 @@
       </p:sp>
       <p:sp>
         <p:nvSpPr>
-          <p:cNvPr id="11" name="TextBox 10"/>
+          <p:cNvPr id="23" name="TextBox 22"/>
           <p:cNvSpPr txBox="1"/>
           <p:nvPr/>
         </p:nvSpPr>
         <p:spPr>
           <a:xfrm>
-            <a:off x="932688" y="2011680"/>
+            <a:off x="932688" y="4105656"/>
             <a:ext cx="438912" cy="420624"/>
           </a:xfrm>
           <a:prstGeom prst="rect">
@@ -3870,21 +4351,21 @@
                 </a:solidFill>
                 <a:latin typeface="Arial"/>
               </a:rPr>
-              <a:t>1</a:t>
-            </a:r>
-          </a:p>
-        </p:txBody>
-      </p:sp>
-      <p:sp>
-        <p:nvSpPr>
-          <p:cNvPr id="12" name="TextBox 11"/>
+              <a:t>3</a:t>
+            </a:r>
+          </a:p>
+        </p:txBody>
+      </p:sp>
+      <p:sp>
+        <p:nvSpPr>
+          <p:cNvPr id="24" name="TextBox 23"/>
           <p:cNvSpPr txBox="1"/>
           <p:nvPr/>
         </p:nvSpPr>
         <p:spPr>
           <a:xfrm>
-            <a:off x="1536192" y="1965960"/>
-            <a:ext cx="9710928" cy="329184"/>
+            <a:off x="1536192" y="4059936"/>
+            <a:ext cx="4178808" cy="329184"/>
           </a:xfrm>
           <a:prstGeom prst="rect">
             <a:avLst/>
@@ -3901,25 +4382,25 @@
             <a:r>
               <a:rPr sz="1400" b="1">
                 <a:solidFill>
-                  <a:srgbClr val="1F6FEB"/>
+                  <a:srgbClr val="7C3AED"/>
                 </a:solidFill>
                 <a:latin typeface="Arial"/>
               </a:rPr>
-              <a:t>Context</a:t>
-            </a:r>
-          </a:p>
-        </p:txBody>
-      </p:sp>
-      <p:sp>
-        <p:nvSpPr>
-          <p:cNvPr id="13" name="TextBox 12"/>
+              <a:t>Text to image</a:t>
+            </a:r>
+          </a:p>
+        </p:txBody>
+      </p:sp>
+      <p:sp>
+        <p:nvSpPr>
+          <p:cNvPr id="25" name="TextBox 24"/>
           <p:cNvSpPr txBox="1"/>
           <p:nvPr/>
         </p:nvSpPr>
         <p:spPr>
           <a:xfrm>
-            <a:off x="1536192" y="2350008"/>
-            <a:ext cx="9710928" cy="978408"/>
+            <a:off x="1536192" y="4443984"/>
+            <a:ext cx="4178808" cy="1133856"/>
           </a:xfrm>
           <a:prstGeom prst="rect">
             <a:avLst/>
@@ -3940,21 +4421,21 @@
                 </a:solidFill>
                 <a:latin typeface="Arial"/>
               </a:rPr>
-              <a:t>Northstar wants a vertical five-stage sustainable-delivery journey for an employee town hall and social post.</a:t>
-            </a:r>
-          </a:p>
-        </p:txBody>
-      </p:sp>
-      <p:sp>
-        <p:nvSpPr>
-          <p:cNvPr id="14" name="Rounded Rectangle 13"/>
+              <a:t>Create a clean vector-like sustainability delivery illustration for a PowerPoint infographic: one electric van, one reusable parcel, a simple route and a feedback symbol. Transparent background, consistent blue/teal/violet/amber palett…</a:t>
+            </a:r>
+          </a:p>
+        </p:txBody>
+      </p:sp>
+      <p:sp>
+        <p:nvSpPr>
+          <p:cNvPr id="26" name="Rounded Rectangle 25"/>
           <p:cNvSpPr/>
           <p:nvPr/>
         </p:nvSpPr>
         <p:spPr>
           <a:xfrm>
-            <a:off x="731520" y="3776472"/>
-            <a:ext cx="10698480" cy="1691640"/>
+            <a:off x="6144768" y="3877056"/>
+            <a:ext cx="5166360" cy="1847088"/>
           </a:xfrm>
           <a:prstGeom prst="roundRect">
             <a:avLst/>
@@ -3992,24 +4473,24 @@
       </p:sp>
       <p:sp>
         <p:nvSpPr>
-          <p:cNvPr id="15" name="Rectangle 14"/>
+          <p:cNvPr id="27" name="Rectangle 26"/>
           <p:cNvSpPr/>
           <p:nvPr/>
         </p:nvSpPr>
         <p:spPr>
           <a:xfrm>
-            <a:off x="731520" y="3776472"/>
-            <a:ext cx="73152" cy="1691640"/>
-          </a:xfrm>
-          <a:prstGeom prst="rect">
-            <a:avLst/>
-          </a:prstGeom>
-          <a:solidFill>
-            <a:srgbClr val="10B981"/>
+            <a:off x="6144768" y="3877056"/>
+            <a:ext cx="73152" cy="1847088"/>
+          </a:xfrm>
+          <a:prstGeom prst="rect">
+            <a:avLst/>
+          </a:prstGeom>
+          <a:solidFill>
+            <a:srgbClr val="F59E0B"/>
           </a:solidFill>
           <a:ln>
             <a:solidFill>
-              <a:srgbClr val="10B981"/>
+              <a:srgbClr val="F59E0B"/>
             </a:solidFill>
           </a:ln>
         </p:spPr>
@@ -4037,24 +4518,24 @@
       </p:sp>
       <p:sp>
         <p:nvSpPr>
-          <p:cNvPr id="16" name="Rounded Rectangle 15"/>
+          <p:cNvPr id="28" name="Rounded Rectangle 27"/>
           <p:cNvSpPr/>
           <p:nvPr/>
         </p:nvSpPr>
         <p:spPr>
           <a:xfrm>
-            <a:off x="932688" y="3995928"/>
+            <a:off x="6345936" y="4096512"/>
             <a:ext cx="438912" cy="438912"/>
           </a:xfrm>
           <a:prstGeom prst="roundRect">
             <a:avLst/>
           </a:prstGeom>
           <a:solidFill>
-            <a:srgbClr val="10B981"/>
+            <a:srgbClr val="F59E0B"/>
           </a:solidFill>
           <a:ln>
             <a:solidFill>
-              <a:srgbClr val="10B981"/>
+              <a:srgbClr val="F59E0B"/>
             </a:solidFill>
           </a:ln>
         </p:spPr>
@@ -4082,13 +4563,13 @@
       </p:sp>
       <p:sp>
         <p:nvSpPr>
-          <p:cNvPr id="17" name="TextBox 16"/>
+          <p:cNvPr id="29" name="TextBox 28"/>
           <p:cNvSpPr txBox="1"/>
           <p:nvPr/>
         </p:nvSpPr>
         <p:spPr>
           <a:xfrm>
-            <a:off x="932688" y="4005072"/>
+            <a:off x="6345936" y="4105656"/>
             <a:ext cx="438912" cy="420624"/>
           </a:xfrm>
           <a:prstGeom prst="rect">
@@ -4110,21 +4591,21 @@
                 </a:solidFill>
                 <a:latin typeface="Arial"/>
               </a:rPr>
-              <a:t>2</a:t>
-            </a:r>
-          </a:p>
-        </p:txBody>
-      </p:sp>
-      <p:sp>
-        <p:nvSpPr>
-          <p:cNvPr id="18" name="TextBox 17"/>
+              <a:t>4</a:t>
+            </a:r>
+          </a:p>
+        </p:txBody>
+      </p:sp>
+      <p:sp>
+        <p:nvSpPr>
+          <p:cNvPr id="30" name="TextBox 29"/>
           <p:cNvSpPr txBox="1"/>
           <p:nvPr/>
         </p:nvSpPr>
         <p:spPr>
           <a:xfrm>
-            <a:off x="1536192" y="3959352"/>
-            <a:ext cx="9710928" cy="329184"/>
+            <a:off x="6949440" y="4059936"/>
+            <a:ext cx="4178808" cy="329184"/>
           </a:xfrm>
           <a:prstGeom prst="rect">
             <a:avLst/>
@@ -4141,25 +4622,25 @@
             <a:r>
               <a:rPr sz="1400" b="1">
                 <a:solidFill>
-                  <a:srgbClr val="10B981"/>
+                  <a:srgbClr val="F59E0B"/>
                 </a:solidFill>
                 <a:latin typeface="Arial"/>
               </a:rPr>
-              <a:t>Decision pressure</a:t>
-            </a:r>
-          </a:p>
-        </p:txBody>
-      </p:sp>
-      <p:sp>
-        <p:nvSpPr>
-          <p:cNvPr id="19" name="TextBox 18"/>
+              <a:t>Gemini Notebook deck</a:t>
+            </a:r>
+          </a:p>
+        </p:txBody>
+      </p:sp>
+      <p:sp>
+        <p:nvSpPr>
+          <p:cNvPr id="31" name="TextBox 30"/>
           <p:cNvSpPr txBox="1"/>
           <p:nvPr/>
         </p:nvSpPr>
         <p:spPr>
           <a:xfrm>
-            <a:off x="1536192" y="4343400"/>
-            <a:ext cx="9710928" cy="978408"/>
+            <a:off x="6949440" y="4443984"/>
+            <a:ext cx="4178808" cy="1133856"/>
           </a:xfrm>
           <a:prstGeom prst="rect">
             <a:avLst/>
@@ -4180,7 +4661,7 @@
                 </a:solidFill>
                 <a:latin typeface="Arial"/>
               </a:rPr>
-              <a:t>Start from a Microsoft infographic-maker template or the supplied editable sample. Adapt it to the approved wireframe; do not let inherited placeholders define the story.</a:t>
+              <a:t>Create Presenter Slides for business stakeholders. Focus on the verified decision insight, use a concise professional style, include source-grounded comparisons and a final recommendation. Avoid claims not supported by selected sources…</a:t>
             </a:r>
           </a:p>
         </p:txBody>
@@ -4263,6 +4744,486 @@
             <a:avLst/>
           </a:prstGeom>
           <a:solidFill>
+            <a:srgbClr val="1F6FEB"/>
+          </a:solidFill>
+          <a:ln>
+            <a:solidFill>
+              <a:srgbClr val="1F6FEB"/>
+            </a:solidFill>
+          </a:ln>
+        </p:spPr>
+        <p:style>
+          <a:lnRef idx="1">
+            <a:schemeClr val="accent1"/>
+          </a:lnRef>
+          <a:fillRef idx="3">
+            <a:schemeClr val="accent1"/>
+          </a:fillRef>
+          <a:effectRef idx="2">
+            <a:schemeClr val="accent1"/>
+          </a:effectRef>
+          <a:fontRef idx="minor">
+            <a:schemeClr val="lt1"/>
+          </a:fontRef>
+        </p:style>
+        <p:txBody>
+          <a:bodyPr rtlCol="0" anchor="ctr"/>
+          <a:lstStyle/>
+          <a:p>
+            <a:pPr algn="ctr"/>
+          </a:p>
+        </p:txBody>
+      </p:sp>
+      <p:sp>
+        <p:nvSpPr>
+          <p:cNvPr id="4" name="TextBox 3"/>
+          <p:cNvSpPr txBox="1"/>
+          <p:nvPr/>
+        </p:nvSpPr>
+        <p:spPr>
+          <a:xfrm>
+            <a:off x="658368" y="384048"/>
+            <a:ext cx="10789920" cy="320040"/>
+          </a:xfrm>
+          <a:prstGeom prst="rect">
+            <a:avLst/>
+          </a:prstGeom>
+          <a:noFill/>
+        </p:spPr>
+        <p:txBody>
+          <a:bodyPr wrap="square" anchor="t">
+            <a:spAutoFit/>
+          </a:bodyPr>
+          <a:lstStyle/>
+          <a:p>
+            <a:pPr algn="l"/>
+            <a:r>
+              <a:rPr sz="1100" b="1">
+                <a:solidFill>
+                  <a:srgbClr val="1F6FEB"/>
+                </a:solidFill>
+                <a:latin typeface="Arial"/>
+              </a:rPr>
+              <a:t>ACTIVITY 03 · CONTEXT</a:t>
+            </a:r>
+          </a:p>
+        </p:txBody>
+      </p:sp>
+      <p:sp>
+        <p:nvSpPr>
+          <p:cNvPr id="5" name="TextBox 4"/>
+          <p:cNvSpPr txBox="1"/>
+          <p:nvPr/>
+        </p:nvSpPr>
+        <p:spPr>
+          <a:xfrm>
+            <a:off x="658368" y="749808"/>
+            <a:ext cx="10789920" cy="658368"/>
+          </a:xfrm>
+          <a:prstGeom prst="rect">
+            <a:avLst/>
+          </a:prstGeom>
+          <a:noFill/>
+        </p:spPr>
+        <p:txBody>
+          <a:bodyPr wrap="square" anchor="t">
+            <a:spAutoFit/>
+          </a:bodyPr>
+          <a:lstStyle/>
+          <a:p>
+            <a:pPr algn="l"/>
+            <a:r>
+              <a:rPr sz="2700" b="1">
+                <a:solidFill>
+                  <a:srgbClr val="161B26"/>
+                </a:solidFill>
+                <a:latin typeface="Arial"/>
+              </a:rPr>
+              <a:t>The Scenario</a:t>
+            </a:r>
+          </a:p>
+        </p:txBody>
+      </p:sp>
+      <p:sp>
+        <p:nvSpPr>
+          <p:cNvPr id="6" name="Rectangle 5"/>
+          <p:cNvSpPr/>
+          <p:nvPr/>
+        </p:nvSpPr>
+        <p:spPr>
+          <a:xfrm>
+            <a:off x="658368" y="1444752"/>
+            <a:ext cx="10881360" cy="18288"/>
+          </a:xfrm>
+          <a:prstGeom prst="rect">
+            <a:avLst/>
+          </a:prstGeom>
+          <a:solidFill>
+            <a:srgbClr val="E2E8F0"/>
+          </a:solidFill>
+          <a:ln>
+            <a:solidFill>
+              <a:srgbClr val="E2E8F0"/>
+            </a:solidFill>
+          </a:ln>
+        </p:spPr>
+        <p:style>
+          <a:lnRef idx="1">
+            <a:schemeClr val="accent1"/>
+          </a:lnRef>
+          <a:fillRef idx="3">
+            <a:schemeClr val="accent1"/>
+          </a:fillRef>
+          <a:effectRef idx="2">
+            <a:schemeClr val="accent1"/>
+          </a:effectRef>
+          <a:fontRef idx="minor">
+            <a:schemeClr val="lt1"/>
+          </a:fontRef>
+        </p:style>
+        <p:txBody>
+          <a:bodyPr rtlCol="0" anchor="ctr"/>
+          <a:lstStyle/>
+          <a:p>
+            <a:pPr algn="ctr"/>
+          </a:p>
+        </p:txBody>
+      </p:sp>
+      <p:sp>
+        <p:nvSpPr>
+          <p:cNvPr id="7" name="TextBox 6"/>
+          <p:cNvSpPr txBox="1"/>
+          <p:nvPr/>
+        </p:nvSpPr>
+        <p:spPr>
+          <a:xfrm>
+            <a:off x="658368" y="6473952"/>
+            <a:ext cx="9875520" cy="201168"/>
+          </a:xfrm>
+          <a:prstGeom prst="rect">
+            <a:avLst/>
+          </a:prstGeom>
+          <a:noFill/>
+        </p:spPr>
+        <p:txBody>
+          <a:bodyPr wrap="square" anchor="t">
+            <a:spAutoFit/>
+          </a:bodyPr>
+          <a:lstStyle/>
+          <a:p>
+            <a:pPr algn="l"/>
+            <a:r>
+              <a:rPr sz="800" b="0">
+                <a:solidFill>
+                  <a:srgbClr val="5B6372"/>
+                </a:solidFill>
+                <a:latin typeface="Arial"/>
+              </a:rPr>
+              <a:t>TGS-2026064178 · ACTIVITY PRACTICE · Tertiary Infotech Academy Pte Ltd</a:t>
+            </a:r>
+          </a:p>
+        </p:txBody>
+      </p:sp>
+      <p:sp>
+        <p:nvSpPr>
+          <p:cNvPr id="8" name="Rounded Rectangle 7"/>
+          <p:cNvSpPr/>
+          <p:nvPr/>
+        </p:nvSpPr>
+        <p:spPr>
+          <a:xfrm>
+            <a:off x="731520" y="1783080"/>
+            <a:ext cx="10698480" cy="1691640"/>
+          </a:xfrm>
+          <a:prstGeom prst="roundRect">
+            <a:avLst/>
+          </a:prstGeom>
+          <a:solidFill>
+            <a:srgbClr val="F5F8FC"/>
+          </a:solidFill>
+          <a:ln>
+            <a:solidFill>
+              <a:srgbClr val="E2E8F0"/>
+            </a:solidFill>
+          </a:ln>
+        </p:spPr>
+        <p:style>
+          <a:lnRef idx="1">
+            <a:schemeClr val="accent1"/>
+          </a:lnRef>
+          <a:fillRef idx="3">
+            <a:schemeClr val="accent1"/>
+          </a:fillRef>
+          <a:effectRef idx="2">
+            <a:schemeClr val="accent1"/>
+          </a:effectRef>
+          <a:fontRef idx="minor">
+            <a:schemeClr val="lt1"/>
+          </a:fontRef>
+        </p:style>
+        <p:txBody>
+          <a:bodyPr rtlCol="0" anchor="ctr"/>
+          <a:lstStyle/>
+          <a:p>
+            <a:pPr algn="ctr"/>
+          </a:p>
+        </p:txBody>
+      </p:sp>
+      <p:sp>
+        <p:nvSpPr>
+          <p:cNvPr id="9" name="Rectangle 8"/>
+          <p:cNvSpPr/>
+          <p:nvPr/>
+        </p:nvSpPr>
+        <p:spPr>
+          <a:xfrm>
+            <a:off x="731520" y="1783080"/>
+            <a:ext cx="73152" cy="1691640"/>
+          </a:xfrm>
+          <a:prstGeom prst="rect">
+            <a:avLst/>
+          </a:prstGeom>
+          <a:solidFill>
+            <a:srgbClr val="1F6FEB"/>
+          </a:solidFill>
+          <a:ln>
+            <a:solidFill>
+              <a:srgbClr val="1F6FEB"/>
+            </a:solidFill>
+          </a:ln>
+        </p:spPr>
+        <p:style>
+          <a:lnRef idx="1">
+            <a:schemeClr val="accent1"/>
+          </a:lnRef>
+          <a:fillRef idx="3">
+            <a:schemeClr val="accent1"/>
+          </a:fillRef>
+          <a:effectRef idx="2">
+            <a:schemeClr val="accent1"/>
+          </a:effectRef>
+          <a:fontRef idx="minor">
+            <a:schemeClr val="lt1"/>
+          </a:fontRef>
+        </p:style>
+        <p:txBody>
+          <a:bodyPr rtlCol="0" anchor="ctr"/>
+          <a:lstStyle/>
+          <a:p>
+            <a:pPr algn="ctr"/>
+          </a:p>
+        </p:txBody>
+      </p:sp>
+      <p:sp>
+        <p:nvSpPr>
+          <p:cNvPr id="10" name="Rounded Rectangle 9"/>
+          <p:cNvSpPr/>
+          <p:nvPr/>
+        </p:nvSpPr>
+        <p:spPr>
+          <a:xfrm>
+            <a:off x="932688" y="2002536"/>
+            <a:ext cx="438912" cy="438912"/>
+          </a:xfrm>
+          <a:prstGeom prst="roundRect">
+            <a:avLst/>
+          </a:prstGeom>
+          <a:solidFill>
+            <a:srgbClr val="1F6FEB"/>
+          </a:solidFill>
+          <a:ln>
+            <a:solidFill>
+              <a:srgbClr val="1F6FEB"/>
+            </a:solidFill>
+          </a:ln>
+        </p:spPr>
+        <p:style>
+          <a:lnRef idx="1">
+            <a:schemeClr val="accent1"/>
+          </a:lnRef>
+          <a:fillRef idx="3">
+            <a:schemeClr val="accent1"/>
+          </a:fillRef>
+          <a:effectRef idx="2">
+            <a:schemeClr val="accent1"/>
+          </a:effectRef>
+          <a:fontRef idx="minor">
+            <a:schemeClr val="lt1"/>
+          </a:fontRef>
+        </p:style>
+        <p:txBody>
+          <a:bodyPr rtlCol="0" anchor="ctr"/>
+          <a:lstStyle/>
+          <a:p>
+            <a:pPr algn="ctr"/>
+          </a:p>
+        </p:txBody>
+      </p:sp>
+      <p:sp>
+        <p:nvSpPr>
+          <p:cNvPr id="11" name="TextBox 10"/>
+          <p:cNvSpPr txBox="1"/>
+          <p:nvPr/>
+        </p:nvSpPr>
+        <p:spPr>
+          <a:xfrm>
+            <a:off x="932688" y="2011680"/>
+            <a:ext cx="438912" cy="420624"/>
+          </a:xfrm>
+          <a:prstGeom prst="rect">
+            <a:avLst/>
+          </a:prstGeom>
+          <a:noFill/>
+        </p:spPr>
+        <p:txBody>
+          <a:bodyPr wrap="square" anchor="ctr">
+            <a:spAutoFit/>
+          </a:bodyPr>
+          <a:lstStyle/>
+          <a:p>
+            <a:pPr algn="ctr"/>
+            <a:r>
+              <a:rPr sz="1400" b="1">
+                <a:solidFill>
+                  <a:srgbClr val="FFFFFF"/>
+                </a:solidFill>
+                <a:latin typeface="Arial"/>
+              </a:rPr>
+              <a:t>1</a:t>
+            </a:r>
+          </a:p>
+        </p:txBody>
+      </p:sp>
+      <p:sp>
+        <p:nvSpPr>
+          <p:cNvPr id="12" name="TextBox 11"/>
+          <p:cNvSpPr txBox="1"/>
+          <p:nvPr/>
+        </p:nvSpPr>
+        <p:spPr>
+          <a:xfrm>
+            <a:off x="1536192" y="1965960"/>
+            <a:ext cx="9710928" cy="329184"/>
+          </a:xfrm>
+          <a:prstGeom prst="rect">
+            <a:avLst/>
+          </a:prstGeom>
+          <a:noFill/>
+        </p:spPr>
+        <p:txBody>
+          <a:bodyPr wrap="square" anchor="t">
+            <a:spAutoFit/>
+          </a:bodyPr>
+          <a:lstStyle/>
+          <a:p>
+            <a:pPr algn="l"/>
+            <a:r>
+              <a:rPr sz="1400" b="1">
+                <a:solidFill>
+                  <a:srgbClr val="1F6FEB"/>
+                </a:solidFill>
+                <a:latin typeface="Arial"/>
+              </a:rPr>
+              <a:t>Context</a:t>
+            </a:r>
+          </a:p>
+        </p:txBody>
+      </p:sp>
+      <p:sp>
+        <p:nvSpPr>
+          <p:cNvPr id="13" name="TextBox 12"/>
+          <p:cNvSpPr txBox="1"/>
+          <p:nvPr/>
+        </p:nvSpPr>
+        <p:spPr>
+          <a:xfrm>
+            <a:off x="1536192" y="2350008"/>
+            <a:ext cx="9710928" cy="978408"/>
+          </a:xfrm>
+          <a:prstGeom prst="rect">
+            <a:avLst/>
+          </a:prstGeom>
+          <a:noFill/>
+        </p:spPr>
+        <p:txBody>
+          <a:bodyPr wrap="square" anchor="t">
+            <a:spAutoFit/>
+          </a:bodyPr>
+          <a:lstStyle/>
+          <a:p>
+            <a:pPr algn="l"/>
+            <a:r>
+              <a:rPr sz="1150" b="0">
+                <a:solidFill>
+                  <a:srgbClr val="161B26"/>
+                </a:solidFill>
+                <a:latin typeface="Arial"/>
+              </a:rPr>
+              <a:t>Northstar wants a vertical five-stage sustainable-delivery journey for an employee town hall and social post.</a:t>
+            </a:r>
+          </a:p>
+        </p:txBody>
+      </p:sp>
+      <p:sp>
+        <p:nvSpPr>
+          <p:cNvPr id="14" name="Rounded Rectangle 13"/>
+          <p:cNvSpPr/>
+          <p:nvPr/>
+        </p:nvSpPr>
+        <p:spPr>
+          <a:xfrm>
+            <a:off x="731520" y="3776472"/>
+            <a:ext cx="10698480" cy="1691640"/>
+          </a:xfrm>
+          <a:prstGeom prst="roundRect">
+            <a:avLst/>
+          </a:prstGeom>
+          <a:solidFill>
+            <a:srgbClr val="F5F8FC"/>
+          </a:solidFill>
+          <a:ln>
+            <a:solidFill>
+              <a:srgbClr val="E2E8F0"/>
+            </a:solidFill>
+          </a:ln>
+        </p:spPr>
+        <p:style>
+          <a:lnRef idx="1">
+            <a:schemeClr val="accent1"/>
+          </a:lnRef>
+          <a:fillRef idx="3">
+            <a:schemeClr val="accent1"/>
+          </a:fillRef>
+          <a:effectRef idx="2">
+            <a:schemeClr val="accent1"/>
+          </a:effectRef>
+          <a:fontRef idx="minor">
+            <a:schemeClr val="lt1"/>
+          </a:fontRef>
+        </p:style>
+        <p:txBody>
+          <a:bodyPr rtlCol="0" anchor="ctr"/>
+          <a:lstStyle/>
+          <a:p>
+            <a:pPr algn="ctr"/>
+          </a:p>
+        </p:txBody>
+      </p:sp>
+      <p:sp>
+        <p:nvSpPr>
+          <p:cNvPr id="15" name="Rectangle 14"/>
+          <p:cNvSpPr/>
+          <p:nvPr/>
+        </p:nvSpPr>
+        <p:spPr>
+          <a:xfrm>
+            <a:off x="731520" y="3776472"/>
+            <a:ext cx="73152" cy="1691640"/>
+          </a:xfrm>
+          <a:prstGeom prst="rect">
+            <a:avLst/>
+          </a:prstGeom>
+          <a:solidFill>
             <a:srgbClr val="10B981"/>
           </a:solidFill>
           <a:ln>
@@ -4295,94 +5256,24 @@
       </p:sp>
       <p:sp>
         <p:nvSpPr>
-          <p:cNvPr id="4" name="TextBox 3"/>
-          <p:cNvSpPr txBox="1"/>
-          <p:nvPr/>
-        </p:nvSpPr>
-        <p:spPr>
-          <a:xfrm>
-            <a:off x="658368" y="384048"/>
-            <a:ext cx="10789920" cy="320040"/>
-          </a:xfrm>
-          <a:prstGeom prst="rect">
-            <a:avLst/>
-          </a:prstGeom>
-          <a:noFill/>
-        </p:spPr>
-        <p:txBody>
-          <a:bodyPr wrap="square" anchor="t">
-            <a:spAutoFit/>
-          </a:bodyPr>
-          <a:lstStyle/>
-          <a:p>
-            <a:pPr algn="l"/>
-            <a:r>
-              <a:rPr sz="1100" b="1">
-                <a:solidFill>
-                  <a:srgbClr val="10B981"/>
-                </a:solidFill>
-                <a:latin typeface="Arial"/>
-              </a:rPr>
-              <a:t>ACTIVITY 03 · FRAMEWORK</a:t>
-            </a:r>
-          </a:p>
-        </p:txBody>
-      </p:sp>
-      <p:sp>
-        <p:nvSpPr>
-          <p:cNvPr id="5" name="TextBox 4"/>
-          <p:cNvSpPr txBox="1"/>
-          <p:nvPr/>
-        </p:nvSpPr>
-        <p:spPr>
-          <a:xfrm>
-            <a:off x="658368" y="749808"/>
-            <a:ext cx="10789920" cy="658368"/>
-          </a:xfrm>
-          <a:prstGeom prst="rect">
-            <a:avLst/>
-          </a:prstGeom>
-          <a:noFill/>
-        </p:spPr>
-        <p:txBody>
-          <a:bodyPr wrap="square" anchor="t">
-            <a:spAutoFit/>
-          </a:bodyPr>
-          <a:lstStyle/>
-          <a:p>
-            <a:pPr algn="l"/>
-            <a:r>
-              <a:rPr sz="2700" b="1">
-                <a:solidFill>
-                  <a:srgbClr val="161B26"/>
-                </a:solidFill>
-                <a:latin typeface="Arial"/>
-              </a:rPr>
-              <a:t>Template-to-Infographic Workflow</a:t>
-            </a:r>
-          </a:p>
-        </p:txBody>
-      </p:sp>
-      <p:sp>
-        <p:nvSpPr>
-          <p:cNvPr id="6" name="Rectangle 5"/>
+          <p:cNvPr id="16" name="Rounded Rectangle 15"/>
           <p:cNvSpPr/>
           <p:nvPr/>
         </p:nvSpPr>
         <p:spPr>
           <a:xfrm>
-            <a:off x="658368" y="1444752"/>
-            <a:ext cx="10881360" cy="18288"/>
-          </a:xfrm>
-          <a:prstGeom prst="rect">
-            <a:avLst/>
-          </a:prstGeom>
-          <a:solidFill>
-            <a:srgbClr val="E2E8F0"/>
+            <a:off x="932688" y="3995928"/>
+            <a:ext cx="438912" cy="438912"/>
+          </a:xfrm>
+          <a:prstGeom prst="roundRect">
+            <a:avLst/>
+          </a:prstGeom>
+          <a:solidFill>
+            <a:srgbClr val="10B981"/>
           </a:solidFill>
           <a:ln>
             <a:solidFill>
-              <a:srgbClr val="E2E8F0"/>
+              <a:srgbClr val="10B981"/>
             </a:solidFill>
           </a:ln>
         </p:spPr>
@@ -4410,14 +5301,49 @@
       </p:sp>
       <p:sp>
         <p:nvSpPr>
-          <p:cNvPr id="7" name="TextBox 6"/>
+          <p:cNvPr id="17" name="TextBox 16"/>
           <p:cNvSpPr txBox="1"/>
           <p:nvPr/>
         </p:nvSpPr>
         <p:spPr>
           <a:xfrm>
-            <a:off x="658368" y="6473952"/>
-            <a:ext cx="9875520" cy="201168"/>
+            <a:off x="932688" y="4005072"/>
+            <a:ext cx="438912" cy="420624"/>
+          </a:xfrm>
+          <a:prstGeom prst="rect">
+            <a:avLst/>
+          </a:prstGeom>
+          <a:noFill/>
+        </p:spPr>
+        <p:txBody>
+          <a:bodyPr wrap="square" anchor="ctr">
+            <a:spAutoFit/>
+          </a:bodyPr>
+          <a:lstStyle/>
+          <a:p>
+            <a:pPr algn="ctr"/>
+            <a:r>
+              <a:rPr sz="1400" b="1">
+                <a:solidFill>
+                  <a:srgbClr val="FFFFFF"/>
+                </a:solidFill>
+                <a:latin typeface="Arial"/>
+              </a:rPr>
+              <a:t>2</a:t>
+            </a:r>
+          </a:p>
+        </p:txBody>
+      </p:sp>
+      <p:sp>
+        <p:nvSpPr>
+          <p:cNvPr id="18" name="TextBox 17"/>
+          <p:cNvSpPr txBox="1"/>
+          <p:nvPr/>
+        </p:nvSpPr>
+        <p:spPr>
+          <a:xfrm>
+            <a:off x="1536192" y="3959352"/>
+            <a:ext cx="9710928" cy="329184"/>
           </a:xfrm>
           <a:prstGeom prst="rect">
             <a:avLst/>
@@ -4432,197 +5358,27 @@
           <a:p>
             <a:pPr algn="l"/>
             <a:r>
-              <a:rPr sz="800" b="0">
-                <a:solidFill>
-                  <a:srgbClr val="5B6372"/>
+              <a:rPr sz="1400" b="1">
+                <a:solidFill>
+                  <a:srgbClr val="10B981"/>
                 </a:solidFill>
                 <a:latin typeface="Arial"/>
               </a:rPr>
-              <a:t>TGS-2024048310 · ACTIVITY PRACTICE · Tertiary Infotech Academy Pte Ltd</a:t>
-            </a:r>
-          </a:p>
-        </p:txBody>
-      </p:sp>
-      <p:sp>
-        <p:nvSpPr>
-          <p:cNvPr id="8" name="Rounded Rectangle 7"/>
-          <p:cNvSpPr/>
-          <p:nvPr/>
-        </p:nvSpPr>
-        <p:spPr>
-          <a:xfrm>
-            <a:off x="685800" y="1920240"/>
-            <a:ext cx="1997049" cy="3566160"/>
-          </a:xfrm>
-          <a:prstGeom prst="roundRect">
-            <a:avLst/>
-          </a:prstGeom>
-          <a:solidFill>
-            <a:srgbClr val="F5F8FC"/>
-          </a:solidFill>
-          <a:ln>
-            <a:solidFill>
-              <a:srgbClr val="E2E8F0"/>
-            </a:solidFill>
-          </a:ln>
-        </p:spPr>
-        <p:style>
-          <a:lnRef idx="1">
-            <a:schemeClr val="accent1"/>
-          </a:lnRef>
-          <a:fillRef idx="3">
-            <a:schemeClr val="accent1"/>
-          </a:fillRef>
-          <a:effectRef idx="2">
-            <a:schemeClr val="accent1"/>
-          </a:effectRef>
-          <a:fontRef idx="minor">
-            <a:schemeClr val="lt1"/>
-          </a:fontRef>
-        </p:style>
-        <p:txBody>
-          <a:bodyPr rtlCol="0" anchor="ctr"/>
-          <a:lstStyle/>
-          <a:p>
-            <a:pPr algn="ctr"/>
-          </a:p>
-        </p:txBody>
-      </p:sp>
-      <p:sp>
-        <p:nvSpPr>
-          <p:cNvPr id="9" name="Rectangle 8"/>
-          <p:cNvSpPr/>
-          <p:nvPr/>
-        </p:nvSpPr>
-        <p:spPr>
-          <a:xfrm>
-            <a:off x="685800" y="1920240"/>
-            <a:ext cx="73152" cy="3566160"/>
-          </a:xfrm>
-          <a:prstGeom prst="rect">
-            <a:avLst/>
-          </a:prstGeom>
-          <a:solidFill>
-            <a:srgbClr val="1F6FEB"/>
-          </a:solidFill>
-          <a:ln>
-            <a:solidFill>
-              <a:srgbClr val="1F6FEB"/>
-            </a:solidFill>
-          </a:ln>
-        </p:spPr>
-        <p:style>
-          <a:lnRef idx="1">
-            <a:schemeClr val="accent1"/>
-          </a:lnRef>
-          <a:fillRef idx="3">
-            <a:schemeClr val="accent1"/>
-          </a:fillRef>
-          <a:effectRef idx="2">
-            <a:schemeClr val="accent1"/>
-          </a:effectRef>
-          <a:fontRef idx="minor">
-            <a:schemeClr val="lt1"/>
-          </a:fontRef>
-        </p:style>
-        <p:txBody>
-          <a:bodyPr rtlCol="0" anchor="ctr"/>
-          <a:lstStyle/>
-          <a:p>
-            <a:pPr algn="ctr"/>
-          </a:p>
-        </p:txBody>
-      </p:sp>
-      <p:sp>
-        <p:nvSpPr>
-          <p:cNvPr id="10" name="Rounded Rectangle 9"/>
-          <p:cNvSpPr/>
-          <p:nvPr/>
-        </p:nvSpPr>
-        <p:spPr>
-          <a:xfrm>
-            <a:off x="886968" y="2139696"/>
-            <a:ext cx="438912" cy="438912"/>
-          </a:xfrm>
-          <a:prstGeom prst="roundRect">
-            <a:avLst/>
-          </a:prstGeom>
-          <a:solidFill>
-            <a:srgbClr val="1F6FEB"/>
-          </a:solidFill>
-          <a:ln>
-            <a:solidFill>
-              <a:srgbClr val="1F6FEB"/>
-            </a:solidFill>
-          </a:ln>
-        </p:spPr>
-        <p:style>
-          <a:lnRef idx="1">
-            <a:schemeClr val="accent1"/>
-          </a:lnRef>
-          <a:fillRef idx="3">
-            <a:schemeClr val="accent1"/>
-          </a:fillRef>
-          <a:effectRef idx="2">
-            <a:schemeClr val="accent1"/>
-          </a:effectRef>
-          <a:fontRef idx="minor">
-            <a:schemeClr val="lt1"/>
-          </a:fontRef>
-        </p:style>
-        <p:txBody>
-          <a:bodyPr rtlCol="0" anchor="ctr"/>
-          <a:lstStyle/>
-          <a:p>
-            <a:pPr algn="ctr"/>
-          </a:p>
-        </p:txBody>
-      </p:sp>
-      <p:sp>
-        <p:nvSpPr>
-          <p:cNvPr id="11" name="TextBox 10"/>
+              <a:t>Decision pressure</a:t>
+            </a:r>
+          </a:p>
+        </p:txBody>
+      </p:sp>
+      <p:sp>
+        <p:nvSpPr>
+          <p:cNvPr id="19" name="TextBox 18"/>
           <p:cNvSpPr txBox="1"/>
           <p:nvPr/>
         </p:nvSpPr>
         <p:spPr>
           <a:xfrm>
-            <a:off x="886968" y="2148840"/>
-            <a:ext cx="438912" cy="420624"/>
-          </a:xfrm>
-          <a:prstGeom prst="rect">
-            <a:avLst/>
-          </a:prstGeom>
-          <a:noFill/>
-        </p:spPr>
-        <p:txBody>
-          <a:bodyPr wrap="square" anchor="ctr">
-            <a:spAutoFit/>
-          </a:bodyPr>
-          <a:lstStyle/>
-          <a:p>
-            <a:pPr algn="ctr"/>
-            <a:r>
-              <a:rPr sz="1400" b="1">
-                <a:solidFill>
-                  <a:srgbClr val="FFFFFF"/>
-                </a:solidFill>
-                <a:latin typeface="Arial"/>
-              </a:rPr>
-              <a:t>1</a:t>
-            </a:r>
-          </a:p>
-        </p:txBody>
-      </p:sp>
-      <p:sp>
-        <p:nvSpPr>
-          <p:cNvPr id="12" name="TextBox 11"/>
-          <p:cNvSpPr txBox="1"/>
-          <p:nvPr/>
-        </p:nvSpPr>
-        <p:spPr>
-          <a:xfrm>
-            <a:off x="1490472" y="2103120"/>
-            <a:ext cx="1009497" cy="329184"/>
+            <a:off x="1536192" y="4343400"/>
+            <a:ext cx="9710928" cy="978408"/>
           </a:xfrm>
           <a:prstGeom prst="rect">
             <a:avLst/>
@@ -4637,1008 +5393,13 @@
           <a:p>
             <a:pPr algn="l"/>
             <a:r>
-              <a:rPr sz="1400" b="1">
-                <a:solidFill>
-                  <a:srgbClr val="1F6FEB"/>
+              <a:rPr sz="1150" b="0">
+                <a:solidFill>
+                  <a:srgbClr val="161B26"/>
                 </a:solidFill>
                 <a:latin typeface="Arial"/>
               </a:rPr>
-              <a:t>Select</a:t>
-            </a:r>
-          </a:p>
-        </p:txBody>
-      </p:sp>
-      <p:sp>
-        <p:nvSpPr>
-          <p:cNvPr id="13" name="TextBox 12"/>
-          <p:cNvSpPr txBox="1"/>
-          <p:nvPr/>
-        </p:nvSpPr>
-        <p:spPr>
-          <a:xfrm>
-            <a:off x="1490472" y="2487168"/>
-            <a:ext cx="1009497" cy="2852928"/>
-          </a:xfrm>
-          <a:prstGeom prst="rect">
-            <a:avLst/>
-          </a:prstGeom>
-          <a:noFill/>
-        </p:spPr>
-        <p:txBody>
-          <a:bodyPr wrap="square" anchor="t">
-            <a:spAutoFit/>
-          </a:bodyPr>
-          <a:lstStyle/>
-          <a:p>
-            <a:pPr algn="l"/>
-            <a:r>
-              <a:rPr sz="1150" b="0">
-                <a:solidFill>
-                  <a:srgbClr val="161B26"/>
-                </a:solidFill>
-                <a:latin typeface="Arial"/>
-              </a:rPr>
-              <a:t>Choose a template by relationship and output format.</a:t>
-            </a:r>
-          </a:p>
-        </p:txBody>
-      </p:sp>
-      <p:sp>
-        <p:nvSpPr>
-          <p:cNvPr id="14" name="Rounded Rectangle 13"/>
-          <p:cNvSpPr/>
-          <p:nvPr/>
-        </p:nvSpPr>
-        <p:spPr>
-          <a:xfrm>
-            <a:off x="2884017" y="1920240"/>
-            <a:ext cx="1997049" cy="3566160"/>
-          </a:xfrm>
-          <a:prstGeom prst="roundRect">
-            <a:avLst/>
-          </a:prstGeom>
-          <a:solidFill>
-            <a:srgbClr val="F5F8FC"/>
-          </a:solidFill>
-          <a:ln>
-            <a:solidFill>
-              <a:srgbClr val="E2E8F0"/>
-            </a:solidFill>
-          </a:ln>
-        </p:spPr>
-        <p:style>
-          <a:lnRef idx="1">
-            <a:schemeClr val="accent1"/>
-          </a:lnRef>
-          <a:fillRef idx="3">
-            <a:schemeClr val="accent1"/>
-          </a:fillRef>
-          <a:effectRef idx="2">
-            <a:schemeClr val="accent1"/>
-          </a:effectRef>
-          <a:fontRef idx="minor">
-            <a:schemeClr val="lt1"/>
-          </a:fontRef>
-        </p:style>
-        <p:txBody>
-          <a:bodyPr rtlCol="0" anchor="ctr"/>
-          <a:lstStyle/>
-          <a:p>
-            <a:pPr algn="ctr"/>
-          </a:p>
-        </p:txBody>
-      </p:sp>
-      <p:sp>
-        <p:nvSpPr>
-          <p:cNvPr id="15" name="Rectangle 14"/>
-          <p:cNvSpPr/>
-          <p:nvPr/>
-        </p:nvSpPr>
-        <p:spPr>
-          <a:xfrm>
-            <a:off x="2884017" y="1920240"/>
-            <a:ext cx="73152" cy="3566160"/>
-          </a:xfrm>
-          <a:prstGeom prst="rect">
-            <a:avLst/>
-          </a:prstGeom>
-          <a:solidFill>
-            <a:srgbClr val="10B981"/>
-          </a:solidFill>
-          <a:ln>
-            <a:solidFill>
-              <a:srgbClr val="10B981"/>
-            </a:solidFill>
-          </a:ln>
-        </p:spPr>
-        <p:style>
-          <a:lnRef idx="1">
-            <a:schemeClr val="accent1"/>
-          </a:lnRef>
-          <a:fillRef idx="3">
-            <a:schemeClr val="accent1"/>
-          </a:fillRef>
-          <a:effectRef idx="2">
-            <a:schemeClr val="accent1"/>
-          </a:effectRef>
-          <a:fontRef idx="minor">
-            <a:schemeClr val="lt1"/>
-          </a:fontRef>
-        </p:style>
-        <p:txBody>
-          <a:bodyPr rtlCol="0" anchor="ctr"/>
-          <a:lstStyle/>
-          <a:p>
-            <a:pPr algn="ctr"/>
-          </a:p>
-        </p:txBody>
-      </p:sp>
-      <p:sp>
-        <p:nvSpPr>
-          <p:cNvPr id="16" name="Rounded Rectangle 15"/>
-          <p:cNvSpPr/>
-          <p:nvPr/>
-        </p:nvSpPr>
-        <p:spPr>
-          <a:xfrm>
-            <a:off x="3085185" y="2139696"/>
-            <a:ext cx="438912" cy="438912"/>
-          </a:xfrm>
-          <a:prstGeom prst="roundRect">
-            <a:avLst/>
-          </a:prstGeom>
-          <a:solidFill>
-            <a:srgbClr val="10B981"/>
-          </a:solidFill>
-          <a:ln>
-            <a:solidFill>
-              <a:srgbClr val="10B981"/>
-            </a:solidFill>
-          </a:ln>
-        </p:spPr>
-        <p:style>
-          <a:lnRef idx="1">
-            <a:schemeClr val="accent1"/>
-          </a:lnRef>
-          <a:fillRef idx="3">
-            <a:schemeClr val="accent1"/>
-          </a:fillRef>
-          <a:effectRef idx="2">
-            <a:schemeClr val="accent1"/>
-          </a:effectRef>
-          <a:fontRef idx="minor">
-            <a:schemeClr val="lt1"/>
-          </a:fontRef>
-        </p:style>
-        <p:txBody>
-          <a:bodyPr rtlCol="0" anchor="ctr"/>
-          <a:lstStyle/>
-          <a:p>
-            <a:pPr algn="ctr"/>
-          </a:p>
-        </p:txBody>
-      </p:sp>
-      <p:sp>
-        <p:nvSpPr>
-          <p:cNvPr id="17" name="TextBox 16"/>
-          <p:cNvSpPr txBox="1"/>
-          <p:nvPr/>
-        </p:nvSpPr>
-        <p:spPr>
-          <a:xfrm>
-            <a:off x="3085185" y="2148840"/>
-            <a:ext cx="438912" cy="420624"/>
-          </a:xfrm>
-          <a:prstGeom prst="rect">
-            <a:avLst/>
-          </a:prstGeom>
-          <a:noFill/>
-        </p:spPr>
-        <p:txBody>
-          <a:bodyPr wrap="square" anchor="ctr">
-            <a:spAutoFit/>
-          </a:bodyPr>
-          <a:lstStyle/>
-          <a:p>
-            <a:pPr algn="ctr"/>
-            <a:r>
-              <a:rPr sz="1400" b="1">
-                <a:solidFill>
-                  <a:srgbClr val="FFFFFF"/>
-                </a:solidFill>
-                <a:latin typeface="Arial"/>
-              </a:rPr>
-              <a:t>2</a:t>
-            </a:r>
-          </a:p>
-        </p:txBody>
-      </p:sp>
-      <p:sp>
-        <p:nvSpPr>
-          <p:cNvPr id="18" name="TextBox 17"/>
-          <p:cNvSpPr txBox="1"/>
-          <p:nvPr/>
-        </p:nvSpPr>
-        <p:spPr>
-          <a:xfrm>
-            <a:off x="3688689" y="2103120"/>
-            <a:ext cx="1009497" cy="329184"/>
-          </a:xfrm>
-          <a:prstGeom prst="rect">
-            <a:avLst/>
-          </a:prstGeom>
-          <a:noFill/>
-        </p:spPr>
-        <p:txBody>
-          <a:bodyPr wrap="square" anchor="t">
-            <a:spAutoFit/>
-          </a:bodyPr>
-          <a:lstStyle/>
-          <a:p>
-            <a:pPr algn="l"/>
-            <a:r>
-              <a:rPr sz="1400" b="1">
-                <a:solidFill>
-                  <a:srgbClr val="10B981"/>
-                </a:solidFill>
-                <a:latin typeface="Arial"/>
-              </a:rPr>
-              <a:t>Audit</a:t>
-            </a:r>
-          </a:p>
-        </p:txBody>
-      </p:sp>
-      <p:sp>
-        <p:nvSpPr>
-          <p:cNvPr id="19" name="TextBox 18"/>
-          <p:cNvSpPr txBox="1"/>
-          <p:nvPr/>
-        </p:nvSpPr>
-        <p:spPr>
-          <a:xfrm>
-            <a:off x="3688689" y="2487168"/>
-            <a:ext cx="1009497" cy="2852928"/>
-          </a:xfrm>
-          <a:prstGeom prst="rect">
-            <a:avLst/>
-          </a:prstGeom>
-          <a:noFill/>
-        </p:spPr>
-        <p:txBody>
-          <a:bodyPr wrap="square" anchor="t">
-            <a:spAutoFit/>
-          </a:bodyPr>
-          <a:lstStyle/>
-          <a:p>
-            <a:pPr algn="l"/>
-            <a:r>
-              <a:rPr sz="1150" b="0">
-                <a:solidFill>
-                  <a:srgbClr val="161B26"/>
-                </a:solidFill>
-                <a:latin typeface="Arial"/>
-              </a:rPr>
-              <a:t>Identify all placeholders and inherited decorative elements.</a:t>
-            </a:r>
-          </a:p>
-        </p:txBody>
-      </p:sp>
-      <p:sp>
-        <p:nvSpPr>
-          <p:cNvPr id="20" name="Rounded Rectangle 19"/>
-          <p:cNvSpPr/>
-          <p:nvPr/>
-        </p:nvSpPr>
-        <p:spPr>
-          <a:xfrm>
-            <a:off x="5082235" y="1920240"/>
-            <a:ext cx="1997049" cy="3566160"/>
-          </a:xfrm>
-          <a:prstGeom prst="roundRect">
-            <a:avLst/>
-          </a:prstGeom>
-          <a:solidFill>
-            <a:srgbClr val="F5F8FC"/>
-          </a:solidFill>
-          <a:ln>
-            <a:solidFill>
-              <a:srgbClr val="E2E8F0"/>
-            </a:solidFill>
-          </a:ln>
-        </p:spPr>
-        <p:style>
-          <a:lnRef idx="1">
-            <a:schemeClr val="accent1"/>
-          </a:lnRef>
-          <a:fillRef idx="3">
-            <a:schemeClr val="accent1"/>
-          </a:fillRef>
-          <a:effectRef idx="2">
-            <a:schemeClr val="accent1"/>
-          </a:effectRef>
-          <a:fontRef idx="minor">
-            <a:schemeClr val="lt1"/>
-          </a:fontRef>
-        </p:style>
-        <p:txBody>
-          <a:bodyPr rtlCol="0" anchor="ctr"/>
-          <a:lstStyle/>
-          <a:p>
-            <a:pPr algn="ctr"/>
-          </a:p>
-        </p:txBody>
-      </p:sp>
-      <p:sp>
-        <p:nvSpPr>
-          <p:cNvPr id="21" name="Rectangle 20"/>
-          <p:cNvSpPr/>
-          <p:nvPr/>
-        </p:nvSpPr>
-        <p:spPr>
-          <a:xfrm>
-            <a:off x="5082235" y="1920240"/>
-            <a:ext cx="73152" cy="3566160"/>
-          </a:xfrm>
-          <a:prstGeom prst="rect">
-            <a:avLst/>
-          </a:prstGeom>
-          <a:solidFill>
-            <a:srgbClr val="7C3AED"/>
-          </a:solidFill>
-          <a:ln>
-            <a:solidFill>
-              <a:srgbClr val="7C3AED"/>
-            </a:solidFill>
-          </a:ln>
-        </p:spPr>
-        <p:style>
-          <a:lnRef idx="1">
-            <a:schemeClr val="accent1"/>
-          </a:lnRef>
-          <a:fillRef idx="3">
-            <a:schemeClr val="accent1"/>
-          </a:fillRef>
-          <a:effectRef idx="2">
-            <a:schemeClr val="accent1"/>
-          </a:effectRef>
-          <a:fontRef idx="minor">
-            <a:schemeClr val="lt1"/>
-          </a:fontRef>
-        </p:style>
-        <p:txBody>
-          <a:bodyPr rtlCol="0" anchor="ctr"/>
-          <a:lstStyle/>
-          <a:p>
-            <a:pPr algn="ctr"/>
-          </a:p>
-        </p:txBody>
-      </p:sp>
-      <p:sp>
-        <p:nvSpPr>
-          <p:cNvPr id="22" name="Rounded Rectangle 21"/>
-          <p:cNvSpPr/>
-          <p:nvPr/>
-        </p:nvSpPr>
-        <p:spPr>
-          <a:xfrm>
-            <a:off x="5283403" y="2139696"/>
-            <a:ext cx="438912" cy="438912"/>
-          </a:xfrm>
-          <a:prstGeom prst="roundRect">
-            <a:avLst/>
-          </a:prstGeom>
-          <a:solidFill>
-            <a:srgbClr val="7C3AED"/>
-          </a:solidFill>
-          <a:ln>
-            <a:solidFill>
-              <a:srgbClr val="7C3AED"/>
-            </a:solidFill>
-          </a:ln>
-        </p:spPr>
-        <p:style>
-          <a:lnRef idx="1">
-            <a:schemeClr val="accent1"/>
-          </a:lnRef>
-          <a:fillRef idx="3">
-            <a:schemeClr val="accent1"/>
-          </a:fillRef>
-          <a:effectRef idx="2">
-            <a:schemeClr val="accent1"/>
-          </a:effectRef>
-          <a:fontRef idx="minor">
-            <a:schemeClr val="lt1"/>
-          </a:fontRef>
-        </p:style>
-        <p:txBody>
-          <a:bodyPr rtlCol="0" anchor="ctr"/>
-          <a:lstStyle/>
-          <a:p>
-            <a:pPr algn="ctr"/>
-          </a:p>
-        </p:txBody>
-      </p:sp>
-      <p:sp>
-        <p:nvSpPr>
-          <p:cNvPr id="23" name="TextBox 22"/>
-          <p:cNvSpPr txBox="1"/>
-          <p:nvPr/>
-        </p:nvSpPr>
-        <p:spPr>
-          <a:xfrm>
-            <a:off x="5283403" y="2148840"/>
-            <a:ext cx="438912" cy="420624"/>
-          </a:xfrm>
-          <a:prstGeom prst="rect">
-            <a:avLst/>
-          </a:prstGeom>
-          <a:noFill/>
-        </p:spPr>
-        <p:txBody>
-          <a:bodyPr wrap="square" anchor="ctr">
-            <a:spAutoFit/>
-          </a:bodyPr>
-          <a:lstStyle/>
-          <a:p>
-            <a:pPr algn="ctr"/>
-            <a:r>
-              <a:rPr sz="1400" b="1">
-                <a:solidFill>
-                  <a:srgbClr val="FFFFFF"/>
-                </a:solidFill>
-                <a:latin typeface="Arial"/>
-              </a:rPr>
-              <a:t>3</a:t>
-            </a:r>
-          </a:p>
-        </p:txBody>
-      </p:sp>
-      <p:sp>
-        <p:nvSpPr>
-          <p:cNvPr id="24" name="TextBox 23"/>
-          <p:cNvSpPr txBox="1"/>
-          <p:nvPr/>
-        </p:nvSpPr>
-        <p:spPr>
-          <a:xfrm>
-            <a:off x="5886907" y="2103120"/>
-            <a:ext cx="1009497" cy="329184"/>
-          </a:xfrm>
-          <a:prstGeom prst="rect">
-            <a:avLst/>
-          </a:prstGeom>
-          <a:noFill/>
-        </p:spPr>
-        <p:txBody>
-          <a:bodyPr wrap="square" anchor="t">
-            <a:spAutoFit/>
-          </a:bodyPr>
-          <a:lstStyle/>
-          <a:p>
-            <a:pPr algn="l"/>
-            <a:r>
-              <a:rPr sz="1400" b="1">
-                <a:solidFill>
-                  <a:srgbClr val="7C3AED"/>
-                </a:solidFill>
-                <a:latin typeface="Arial"/>
-              </a:rPr>
-              <a:t>Replace</a:t>
-            </a:r>
-          </a:p>
-        </p:txBody>
-      </p:sp>
-      <p:sp>
-        <p:nvSpPr>
-          <p:cNvPr id="25" name="TextBox 24"/>
-          <p:cNvSpPr txBox="1"/>
-          <p:nvPr/>
-        </p:nvSpPr>
-        <p:spPr>
-          <a:xfrm>
-            <a:off x="5886907" y="2487168"/>
-            <a:ext cx="1009497" cy="2852928"/>
-          </a:xfrm>
-          <a:prstGeom prst="rect">
-            <a:avLst/>
-          </a:prstGeom>
-          <a:noFill/>
-        </p:spPr>
-        <p:txBody>
-          <a:bodyPr wrap="square" anchor="t">
-            <a:spAutoFit/>
-          </a:bodyPr>
-          <a:lstStyle/>
-          <a:p>
-            <a:pPr algn="l"/>
-            <a:r>
-              <a:rPr sz="1150" b="0">
-                <a:solidFill>
-                  <a:srgbClr val="161B26"/>
-                </a:solidFill>
-                <a:latin typeface="Arial"/>
-              </a:rPr>
-              <a:t>Insert the approved message, data and visuals.</a:t>
-            </a:r>
-          </a:p>
-        </p:txBody>
-      </p:sp>
-      <p:sp>
-        <p:nvSpPr>
-          <p:cNvPr id="26" name="Rounded Rectangle 25"/>
-          <p:cNvSpPr/>
-          <p:nvPr/>
-        </p:nvSpPr>
-        <p:spPr>
-          <a:xfrm>
-            <a:off x="7280452" y="1920240"/>
-            <a:ext cx="1997049" cy="3566160"/>
-          </a:xfrm>
-          <a:prstGeom prst="roundRect">
-            <a:avLst/>
-          </a:prstGeom>
-          <a:solidFill>
-            <a:srgbClr val="F5F8FC"/>
-          </a:solidFill>
-          <a:ln>
-            <a:solidFill>
-              <a:srgbClr val="E2E8F0"/>
-            </a:solidFill>
-          </a:ln>
-        </p:spPr>
-        <p:style>
-          <a:lnRef idx="1">
-            <a:schemeClr val="accent1"/>
-          </a:lnRef>
-          <a:fillRef idx="3">
-            <a:schemeClr val="accent1"/>
-          </a:fillRef>
-          <a:effectRef idx="2">
-            <a:schemeClr val="accent1"/>
-          </a:effectRef>
-          <a:fontRef idx="minor">
-            <a:schemeClr val="lt1"/>
-          </a:fontRef>
-        </p:style>
-        <p:txBody>
-          <a:bodyPr rtlCol="0" anchor="ctr"/>
-          <a:lstStyle/>
-          <a:p>
-            <a:pPr algn="ctr"/>
-          </a:p>
-        </p:txBody>
-      </p:sp>
-      <p:sp>
-        <p:nvSpPr>
-          <p:cNvPr id="27" name="Rectangle 26"/>
-          <p:cNvSpPr/>
-          <p:nvPr/>
-        </p:nvSpPr>
-        <p:spPr>
-          <a:xfrm>
-            <a:off x="7280452" y="1920240"/>
-            <a:ext cx="73152" cy="3566160"/>
-          </a:xfrm>
-          <a:prstGeom prst="rect">
-            <a:avLst/>
-          </a:prstGeom>
-          <a:solidFill>
-            <a:srgbClr val="F59E0B"/>
-          </a:solidFill>
-          <a:ln>
-            <a:solidFill>
-              <a:srgbClr val="F59E0B"/>
-            </a:solidFill>
-          </a:ln>
-        </p:spPr>
-        <p:style>
-          <a:lnRef idx="1">
-            <a:schemeClr val="accent1"/>
-          </a:lnRef>
-          <a:fillRef idx="3">
-            <a:schemeClr val="accent1"/>
-          </a:fillRef>
-          <a:effectRef idx="2">
-            <a:schemeClr val="accent1"/>
-          </a:effectRef>
-          <a:fontRef idx="minor">
-            <a:schemeClr val="lt1"/>
-          </a:fontRef>
-        </p:style>
-        <p:txBody>
-          <a:bodyPr rtlCol="0" anchor="ctr"/>
-          <a:lstStyle/>
-          <a:p>
-            <a:pPr algn="ctr"/>
-          </a:p>
-        </p:txBody>
-      </p:sp>
-      <p:sp>
-        <p:nvSpPr>
-          <p:cNvPr id="28" name="Rounded Rectangle 27"/>
-          <p:cNvSpPr/>
-          <p:nvPr/>
-        </p:nvSpPr>
-        <p:spPr>
-          <a:xfrm>
-            <a:off x="7481620" y="2139696"/>
-            <a:ext cx="438912" cy="438912"/>
-          </a:xfrm>
-          <a:prstGeom prst="roundRect">
-            <a:avLst/>
-          </a:prstGeom>
-          <a:solidFill>
-            <a:srgbClr val="F59E0B"/>
-          </a:solidFill>
-          <a:ln>
-            <a:solidFill>
-              <a:srgbClr val="F59E0B"/>
-            </a:solidFill>
-          </a:ln>
-        </p:spPr>
-        <p:style>
-          <a:lnRef idx="1">
-            <a:schemeClr val="accent1"/>
-          </a:lnRef>
-          <a:fillRef idx="3">
-            <a:schemeClr val="accent1"/>
-          </a:fillRef>
-          <a:effectRef idx="2">
-            <a:schemeClr val="accent1"/>
-          </a:effectRef>
-          <a:fontRef idx="minor">
-            <a:schemeClr val="lt1"/>
-          </a:fontRef>
-        </p:style>
-        <p:txBody>
-          <a:bodyPr rtlCol="0" anchor="ctr"/>
-          <a:lstStyle/>
-          <a:p>
-            <a:pPr algn="ctr"/>
-          </a:p>
-        </p:txBody>
-      </p:sp>
-      <p:sp>
-        <p:nvSpPr>
-          <p:cNvPr id="29" name="TextBox 28"/>
-          <p:cNvSpPr txBox="1"/>
-          <p:nvPr/>
-        </p:nvSpPr>
-        <p:spPr>
-          <a:xfrm>
-            <a:off x="7481620" y="2148840"/>
-            <a:ext cx="438912" cy="420624"/>
-          </a:xfrm>
-          <a:prstGeom prst="rect">
-            <a:avLst/>
-          </a:prstGeom>
-          <a:noFill/>
-        </p:spPr>
-        <p:txBody>
-          <a:bodyPr wrap="square" anchor="ctr">
-            <a:spAutoFit/>
-          </a:bodyPr>
-          <a:lstStyle/>
-          <a:p>
-            <a:pPr algn="ctr"/>
-            <a:r>
-              <a:rPr sz="1400" b="1">
-                <a:solidFill>
-                  <a:srgbClr val="FFFFFF"/>
-                </a:solidFill>
-                <a:latin typeface="Arial"/>
-              </a:rPr>
-              <a:t>4</a:t>
-            </a:r>
-          </a:p>
-        </p:txBody>
-      </p:sp>
-      <p:sp>
-        <p:nvSpPr>
-          <p:cNvPr id="30" name="TextBox 29"/>
-          <p:cNvSpPr txBox="1"/>
-          <p:nvPr/>
-        </p:nvSpPr>
-        <p:spPr>
-          <a:xfrm>
-            <a:off x="8085124" y="2103120"/>
-            <a:ext cx="1009497" cy="329184"/>
-          </a:xfrm>
-          <a:prstGeom prst="rect">
-            <a:avLst/>
-          </a:prstGeom>
-          <a:noFill/>
-        </p:spPr>
-        <p:txBody>
-          <a:bodyPr wrap="square" anchor="t">
-            <a:spAutoFit/>
-          </a:bodyPr>
-          <a:lstStyle/>
-          <a:p>
-            <a:pPr algn="l"/>
-            <a:r>
-              <a:rPr sz="1400" b="1">
-                <a:solidFill>
-                  <a:srgbClr val="F59E0B"/>
-                </a:solidFill>
-                <a:latin typeface="Arial"/>
-              </a:rPr>
-              <a:t>Align</a:t>
-            </a:r>
-          </a:p>
-        </p:txBody>
-      </p:sp>
-      <p:sp>
-        <p:nvSpPr>
-          <p:cNvPr id="31" name="TextBox 30"/>
-          <p:cNvSpPr txBox="1"/>
-          <p:nvPr/>
-        </p:nvSpPr>
-        <p:spPr>
-          <a:xfrm>
-            <a:off x="8085124" y="2487168"/>
-            <a:ext cx="1009497" cy="2852928"/>
-          </a:xfrm>
-          <a:prstGeom prst="rect">
-            <a:avLst/>
-          </a:prstGeom>
-          <a:noFill/>
-        </p:spPr>
-        <p:txBody>
-          <a:bodyPr wrap="square" anchor="t">
-            <a:spAutoFit/>
-          </a:bodyPr>
-          <a:lstStyle/>
-          <a:p>
-            <a:pPr algn="l"/>
-            <a:r>
-              <a:rPr sz="1150" b="0">
-                <a:solidFill>
-                  <a:srgbClr val="161B26"/>
-                </a:solidFill>
-                <a:latin typeface="Arial"/>
-              </a:rPr>
-              <a:t>Apply brand, grid, hierarchy and accessibility.</a:t>
-            </a:r>
-          </a:p>
-        </p:txBody>
-      </p:sp>
-      <p:sp>
-        <p:nvSpPr>
-          <p:cNvPr id="32" name="Rounded Rectangle 31"/>
-          <p:cNvSpPr/>
-          <p:nvPr/>
-        </p:nvSpPr>
-        <p:spPr>
-          <a:xfrm>
-            <a:off x="9478670" y="1920240"/>
-            <a:ext cx="1997049" cy="3566160"/>
-          </a:xfrm>
-          <a:prstGeom prst="roundRect">
-            <a:avLst/>
-          </a:prstGeom>
-          <a:solidFill>
-            <a:srgbClr val="F5F8FC"/>
-          </a:solidFill>
-          <a:ln>
-            <a:solidFill>
-              <a:srgbClr val="E2E8F0"/>
-            </a:solidFill>
-          </a:ln>
-        </p:spPr>
-        <p:style>
-          <a:lnRef idx="1">
-            <a:schemeClr val="accent1"/>
-          </a:lnRef>
-          <a:fillRef idx="3">
-            <a:schemeClr val="accent1"/>
-          </a:fillRef>
-          <a:effectRef idx="2">
-            <a:schemeClr val="accent1"/>
-          </a:effectRef>
-          <a:fontRef idx="minor">
-            <a:schemeClr val="lt1"/>
-          </a:fontRef>
-        </p:style>
-        <p:txBody>
-          <a:bodyPr rtlCol="0" anchor="ctr"/>
-          <a:lstStyle/>
-          <a:p>
-            <a:pPr algn="ctr"/>
-          </a:p>
-        </p:txBody>
-      </p:sp>
-      <p:sp>
-        <p:nvSpPr>
-          <p:cNvPr id="33" name="Rectangle 32"/>
-          <p:cNvSpPr/>
-          <p:nvPr/>
-        </p:nvSpPr>
-        <p:spPr>
-          <a:xfrm>
-            <a:off x="9478670" y="1920240"/>
-            <a:ext cx="73152" cy="3566160"/>
-          </a:xfrm>
-          <a:prstGeom prst="rect">
-            <a:avLst/>
-          </a:prstGeom>
-          <a:solidFill>
-            <a:srgbClr val="1F6FEB"/>
-          </a:solidFill>
-          <a:ln>
-            <a:solidFill>
-              <a:srgbClr val="1F6FEB"/>
-            </a:solidFill>
-          </a:ln>
-        </p:spPr>
-        <p:style>
-          <a:lnRef idx="1">
-            <a:schemeClr val="accent1"/>
-          </a:lnRef>
-          <a:fillRef idx="3">
-            <a:schemeClr val="accent1"/>
-          </a:fillRef>
-          <a:effectRef idx="2">
-            <a:schemeClr val="accent1"/>
-          </a:effectRef>
-          <a:fontRef idx="minor">
-            <a:schemeClr val="lt1"/>
-          </a:fontRef>
-        </p:style>
-        <p:txBody>
-          <a:bodyPr rtlCol="0" anchor="ctr"/>
-          <a:lstStyle/>
-          <a:p>
-            <a:pPr algn="ctr"/>
-          </a:p>
-        </p:txBody>
-      </p:sp>
-      <p:sp>
-        <p:nvSpPr>
-          <p:cNvPr id="34" name="Rounded Rectangle 33"/>
-          <p:cNvSpPr/>
-          <p:nvPr/>
-        </p:nvSpPr>
-        <p:spPr>
-          <a:xfrm>
-            <a:off x="9679838" y="2139696"/>
-            <a:ext cx="438912" cy="438912"/>
-          </a:xfrm>
-          <a:prstGeom prst="roundRect">
-            <a:avLst/>
-          </a:prstGeom>
-          <a:solidFill>
-            <a:srgbClr val="1F6FEB"/>
-          </a:solidFill>
-          <a:ln>
-            <a:solidFill>
-              <a:srgbClr val="1F6FEB"/>
-            </a:solidFill>
-          </a:ln>
-        </p:spPr>
-        <p:style>
-          <a:lnRef idx="1">
-            <a:schemeClr val="accent1"/>
-          </a:lnRef>
-          <a:fillRef idx="3">
-            <a:schemeClr val="accent1"/>
-          </a:fillRef>
-          <a:effectRef idx="2">
-            <a:schemeClr val="accent1"/>
-          </a:effectRef>
-          <a:fontRef idx="minor">
-            <a:schemeClr val="lt1"/>
-          </a:fontRef>
-        </p:style>
-        <p:txBody>
-          <a:bodyPr rtlCol="0" anchor="ctr"/>
-          <a:lstStyle/>
-          <a:p>
-            <a:pPr algn="ctr"/>
-          </a:p>
-        </p:txBody>
-      </p:sp>
-      <p:sp>
-        <p:nvSpPr>
-          <p:cNvPr id="35" name="TextBox 34"/>
-          <p:cNvSpPr txBox="1"/>
-          <p:nvPr/>
-        </p:nvSpPr>
-        <p:spPr>
-          <a:xfrm>
-            <a:off x="9679838" y="2148840"/>
-            <a:ext cx="438912" cy="420624"/>
-          </a:xfrm>
-          <a:prstGeom prst="rect">
-            <a:avLst/>
-          </a:prstGeom>
-          <a:noFill/>
-        </p:spPr>
-        <p:txBody>
-          <a:bodyPr wrap="square" anchor="ctr">
-            <a:spAutoFit/>
-          </a:bodyPr>
-          <a:lstStyle/>
-          <a:p>
-            <a:pPr algn="ctr"/>
-            <a:r>
-              <a:rPr sz="1400" b="1">
-                <a:solidFill>
-                  <a:srgbClr val="FFFFFF"/>
-                </a:solidFill>
-                <a:latin typeface="Arial"/>
-              </a:rPr>
-              <a:t>5</a:t>
-            </a:r>
-          </a:p>
-        </p:txBody>
-      </p:sp>
-      <p:sp>
-        <p:nvSpPr>
-          <p:cNvPr id="36" name="TextBox 35"/>
-          <p:cNvSpPr txBox="1"/>
-          <p:nvPr/>
-        </p:nvSpPr>
-        <p:spPr>
-          <a:xfrm>
-            <a:off x="10283342" y="2103120"/>
-            <a:ext cx="1009497" cy="329184"/>
-          </a:xfrm>
-          <a:prstGeom prst="rect">
-            <a:avLst/>
-          </a:prstGeom>
-          <a:noFill/>
-        </p:spPr>
-        <p:txBody>
-          <a:bodyPr wrap="square" anchor="t">
-            <a:spAutoFit/>
-          </a:bodyPr>
-          <a:lstStyle/>
-          <a:p>
-            <a:pPr algn="l"/>
-            <a:r>
-              <a:rPr sz="1400" b="1">
-                <a:solidFill>
-                  <a:srgbClr val="1F6FEB"/>
-                </a:solidFill>
-                <a:latin typeface="Arial"/>
-              </a:rPr>
-              <a:t>Export</a:t>
-            </a:r>
-          </a:p>
-        </p:txBody>
-      </p:sp>
-      <p:sp>
-        <p:nvSpPr>
-          <p:cNvPr id="37" name="TextBox 36"/>
-          <p:cNvSpPr txBox="1"/>
-          <p:nvPr/>
-        </p:nvSpPr>
-        <p:spPr>
-          <a:xfrm>
-            <a:off x="10283342" y="2487168"/>
-            <a:ext cx="1009497" cy="2852928"/>
-          </a:xfrm>
-          <a:prstGeom prst="rect">
-            <a:avLst/>
-          </a:prstGeom>
-          <a:noFill/>
-        </p:spPr>
-        <p:txBody>
-          <a:bodyPr wrap="square" anchor="t">
-            <a:spAutoFit/>
-          </a:bodyPr>
-          <a:lstStyle/>
-          <a:p>
-            <a:pPr algn="l"/>
-            <a:r>
-              <a:rPr sz="1150" b="0">
-                <a:solidFill>
-                  <a:srgbClr val="161B26"/>
-                </a:solidFill>
-                <a:latin typeface="Arial"/>
-              </a:rPr>
-              <a:t>Test PPTX, PDF and image output.</a:t>
+              <a:t>Start from a Microsoft infographic-maker template or the supplied editable sample. Adapt it to the approved wireframe; do not let inherited placeholders define the story.</a:t>
             </a:r>
           </a:p>
         </p:txBody>
@@ -5721,6 +5482,726 @@
             <a:avLst/>
           </a:prstGeom>
           <a:solidFill>
+            <a:srgbClr val="10B981"/>
+          </a:solidFill>
+          <a:ln>
+            <a:solidFill>
+              <a:srgbClr val="10B981"/>
+            </a:solidFill>
+          </a:ln>
+        </p:spPr>
+        <p:style>
+          <a:lnRef idx="1">
+            <a:schemeClr val="accent1"/>
+          </a:lnRef>
+          <a:fillRef idx="3">
+            <a:schemeClr val="accent1"/>
+          </a:fillRef>
+          <a:effectRef idx="2">
+            <a:schemeClr val="accent1"/>
+          </a:effectRef>
+          <a:fontRef idx="minor">
+            <a:schemeClr val="lt1"/>
+          </a:fontRef>
+        </p:style>
+        <p:txBody>
+          <a:bodyPr rtlCol="0" anchor="ctr"/>
+          <a:lstStyle/>
+          <a:p>
+            <a:pPr algn="ctr"/>
+          </a:p>
+        </p:txBody>
+      </p:sp>
+      <p:sp>
+        <p:nvSpPr>
+          <p:cNvPr id="4" name="TextBox 3"/>
+          <p:cNvSpPr txBox="1"/>
+          <p:nvPr/>
+        </p:nvSpPr>
+        <p:spPr>
+          <a:xfrm>
+            <a:off x="658368" y="384048"/>
+            <a:ext cx="10789920" cy="320040"/>
+          </a:xfrm>
+          <a:prstGeom prst="rect">
+            <a:avLst/>
+          </a:prstGeom>
+          <a:noFill/>
+        </p:spPr>
+        <p:txBody>
+          <a:bodyPr wrap="square" anchor="t">
+            <a:spAutoFit/>
+          </a:bodyPr>
+          <a:lstStyle/>
+          <a:p>
+            <a:pPr algn="l"/>
+            <a:r>
+              <a:rPr sz="1100" b="1">
+                <a:solidFill>
+                  <a:srgbClr val="10B981"/>
+                </a:solidFill>
+                <a:latin typeface="Arial"/>
+              </a:rPr>
+              <a:t>ACTIVITY 03 · FRAMEWORK</a:t>
+            </a:r>
+          </a:p>
+        </p:txBody>
+      </p:sp>
+      <p:sp>
+        <p:nvSpPr>
+          <p:cNvPr id="5" name="TextBox 4"/>
+          <p:cNvSpPr txBox="1"/>
+          <p:nvPr/>
+        </p:nvSpPr>
+        <p:spPr>
+          <a:xfrm>
+            <a:off x="658368" y="749808"/>
+            <a:ext cx="10789920" cy="658368"/>
+          </a:xfrm>
+          <a:prstGeom prst="rect">
+            <a:avLst/>
+          </a:prstGeom>
+          <a:noFill/>
+        </p:spPr>
+        <p:txBody>
+          <a:bodyPr wrap="square" anchor="t">
+            <a:spAutoFit/>
+          </a:bodyPr>
+          <a:lstStyle/>
+          <a:p>
+            <a:pPr algn="l"/>
+            <a:r>
+              <a:rPr sz="2700" b="1">
+                <a:solidFill>
+                  <a:srgbClr val="161B26"/>
+                </a:solidFill>
+                <a:latin typeface="Arial"/>
+              </a:rPr>
+              <a:t>Template-to-Infographic Workflow</a:t>
+            </a:r>
+          </a:p>
+        </p:txBody>
+      </p:sp>
+      <p:sp>
+        <p:nvSpPr>
+          <p:cNvPr id="6" name="Rectangle 5"/>
+          <p:cNvSpPr/>
+          <p:nvPr/>
+        </p:nvSpPr>
+        <p:spPr>
+          <a:xfrm>
+            <a:off x="658368" y="1444752"/>
+            <a:ext cx="10881360" cy="18288"/>
+          </a:xfrm>
+          <a:prstGeom prst="rect">
+            <a:avLst/>
+          </a:prstGeom>
+          <a:solidFill>
+            <a:srgbClr val="E2E8F0"/>
+          </a:solidFill>
+          <a:ln>
+            <a:solidFill>
+              <a:srgbClr val="E2E8F0"/>
+            </a:solidFill>
+          </a:ln>
+        </p:spPr>
+        <p:style>
+          <a:lnRef idx="1">
+            <a:schemeClr val="accent1"/>
+          </a:lnRef>
+          <a:fillRef idx="3">
+            <a:schemeClr val="accent1"/>
+          </a:fillRef>
+          <a:effectRef idx="2">
+            <a:schemeClr val="accent1"/>
+          </a:effectRef>
+          <a:fontRef idx="minor">
+            <a:schemeClr val="lt1"/>
+          </a:fontRef>
+        </p:style>
+        <p:txBody>
+          <a:bodyPr rtlCol="0" anchor="ctr"/>
+          <a:lstStyle/>
+          <a:p>
+            <a:pPr algn="ctr"/>
+          </a:p>
+        </p:txBody>
+      </p:sp>
+      <p:sp>
+        <p:nvSpPr>
+          <p:cNvPr id="7" name="TextBox 6"/>
+          <p:cNvSpPr txBox="1"/>
+          <p:nvPr/>
+        </p:nvSpPr>
+        <p:spPr>
+          <a:xfrm>
+            <a:off x="658368" y="6473952"/>
+            <a:ext cx="9875520" cy="201168"/>
+          </a:xfrm>
+          <a:prstGeom prst="rect">
+            <a:avLst/>
+          </a:prstGeom>
+          <a:noFill/>
+        </p:spPr>
+        <p:txBody>
+          <a:bodyPr wrap="square" anchor="t">
+            <a:spAutoFit/>
+          </a:bodyPr>
+          <a:lstStyle/>
+          <a:p>
+            <a:pPr algn="l"/>
+            <a:r>
+              <a:rPr sz="800" b="0">
+                <a:solidFill>
+                  <a:srgbClr val="5B6372"/>
+                </a:solidFill>
+                <a:latin typeface="Arial"/>
+              </a:rPr>
+              <a:t>TGS-2026064178 · ACTIVITY PRACTICE · Tertiary Infotech Academy Pte Ltd</a:t>
+            </a:r>
+          </a:p>
+        </p:txBody>
+      </p:sp>
+      <p:sp>
+        <p:nvSpPr>
+          <p:cNvPr id="8" name="Rounded Rectangle 7"/>
+          <p:cNvSpPr/>
+          <p:nvPr/>
+        </p:nvSpPr>
+        <p:spPr>
+          <a:xfrm>
+            <a:off x="685800" y="1920240"/>
+            <a:ext cx="1997049" cy="3566160"/>
+          </a:xfrm>
+          <a:prstGeom prst="roundRect">
+            <a:avLst/>
+          </a:prstGeom>
+          <a:solidFill>
+            <a:srgbClr val="F5F8FC"/>
+          </a:solidFill>
+          <a:ln>
+            <a:solidFill>
+              <a:srgbClr val="E2E8F0"/>
+            </a:solidFill>
+          </a:ln>
+        </p:spPr>
+        <p:style>
+          <a:lnRef idx="1">
+            <a:schemeClr val="accent1"/>
+          </a:lnRef>
+          <a:fillRef idx="3">
+            <a:schemeClr val="accent1"/>
+          </a:fillRef>
+          <a:effectRef idx="2">
+            <a:schemeClr val="accent1"/>
+          </a:effectRef>
+          <a:fontRef idx="minor">
+            <a:schemeClr val="lt1"/>
+          </a:fontRef>
+        </p:style>
+        <p:txBody>
+          <a:bodyPr rtlCol="0" anchor="ctr"/>
+          <a:lstStyle/>
+          <a:p>
+            <a:pPr algn="ctr"/>
+          </a:p>
+        </p:txBody>
+      </p:sp>
+      <p:sp>
+        <p:nvSpPr>
+          <p:cNvPr id="9" name="Rectangle 8"/>
+          <p:cNvSpPr/>
+          <p:nvPr/>
+        </p:nvSpPr>
+        <p:spPr>
+          <a:xfrm>
+            <a:off x="685800" y="1920240"/>
+            <a:ext cx="73152" cy="3566160"/>
+          </a:xfrm>
+          <a:prstGeom prst="rect">
+            <a:avLst/>
+          </a:prstGeom>
+          <a:solidFill>
+            <a:srgbClr val="1F6FEB"/>
+          </a:solidFill>
+          <a:ln>
+            <a:solidFill>
+              <a:srgbClr val="1F6FEB"/>
+            </a:solidFill>
+          </a:ln>
+        </p:spPr>
+        <p:style>
+          <a:lnRef idx="1">
+            <a:schemeClr val="accent1"/>
+          </a:lnRef>
+          <a:fillRef idx="3">
+            <a:schemeClr val="accent1"/>
+          </a:fillRef>
+          <a:effectRef idx="2">
+            <a:schemeClr val="accent1"/>
+          </a:effectRef>
+          <a:fontRef idx="minor">
+            <a:schemeClr val="lt1"/>
+          </a:fontRef>
+        </p:style>
+        <p:txBody>
+          <a:bodyPr rtlCol="0" anchor="ctr"/>
+          <a:lstStyle/>
+          <a:p>
+            <a:pPr algn="ctr"/>
+          </a:p>
+        </p:txBody>
+      </p:sp>
+      <p:sp>
+        <p:nvSpPr>
+          <p:cNvPr id="10" name="Rounded Rectangle 9"/>
+          <p:cNvSpPr/>
+          <p:nvPr/>
+        </p:nvSpPr>
+        <p:spPr>
+          <a:xfrm>
+            <a:off x="886968" y="2139696"/>
+            <a:ext cx="438912" cy="438912"/>
+          </a:xfrm>
+          <a:prstGeom prst="roundRect">
+            <a:avLst/>
+          </a:prstGeom>
+          <a:solidFill>
+            <a:srgbClr val="1F6FEB"/>
+          </a:solidFill>
+          <a:ln>
+            <a:solidFill>
+              <a:srgbClr val="1F6FEB"/>
+            </a:solidFill>
+          </a:ln>
+        </p:spPr>
+        <p:style>
+          <a:lnRef idx="1">
+            <a:schemeClr val="accent1"/>
+          </a:lnRef>
+          <a:fillRef idx="3">
+            <a:schemeClr val="accent1"/>
+          </a:fillRef>
+          <a:effectRef idx="2">
+            <a:schemeClr val="accent1"/>
+          </a:effectRef>
+          <a:fontRef idx="minor">
+            <a:schemeClr val="lt1"/>
+          </a:fontRef>
+        </p:style>
+        <p:txBody>
+          <a:bodyPr rtlCol="0" anchor="ctr"/>
+          <a:lstStyle/>
+          <a:p>
+            <a:pPr algn="ctr"/>
+          </a:p>
+        </p:txBody>
+      </p:sp>
+      <p:sp>
+        <p:nvSpPr>
+          <p:cNvPr id="11" name="TextBox 10"/>
+          <p:cNvSpPr txBox="1"/>
+          <p:nvPr/>
+        </p:nvSpPr>
+        <p:spPr>
+          <a:xfrm>
+            <a:off x="886968" y="2148840"/>
+            <a:ext cx="438912" cy="420624"/>
+          </a:xfrm>
+          <a:prstGeom prst="rect">
+            <a:avLst/>
+          </a:prstGeom>
+          <a:noFill/>
+        </p:spPr>
+        <p:txBody>
+          <a:bodyPr wrap="square" anchor="ctr">
+            <a:spAutoFit/>
+          </a:bodyPr>
+          <a:lstStyle/>
+          <a:p>
+            <a:pPr algn="ctr"/>
+            <a:r>
+              <a:rPr sz="1400" b="1">
+                <a:solidFill>
+                  <a:srgbClr val="FFFFFF"/>
+                </a:solidFill>
+                <a:latin typeface="Arial"/>
+              </a:rPr>
+              <a:t>1</a:t>
+            </a:r>
+          </a:p>
+        </p:txBody>
+      </p:sp>
+      <p:sp>
+        <p:nvSpPr>
+          <p:cNvPr id="12" name="TextBox 11"/>
+          <p:cNvSpPr txBox="1"/>
+          <p:nvPr/>
+        </p:nvSpPr>
+        <p:spPr>
+          <a:xfrm>
+            <a:off x="1490472" y="2103120"/>
+            <a:ext cx="1009497" cy="329184"/>
+          </a:xfrm>
+          <a:prstGeom prst="rect">
+            <a:avLst/>
+          </a:prstGeom>
+          <a:noFill/>
+        </p:spPr>
+        <p:txBody>
+          <a:bodyPr wrap="square" anchor="t">
+            <a:spAutoFit/>
+          </a:bodyPr>
+          <a:lstStyle/>
+          <a:p>
+            <a:pPr algn="l"/>
+            <a:r>
+              <a:rPr sz="1400" b="1">
+                <a:solidFill>
+                  <a:srgbClr val="1F6FEB"/>
+                </a:solidFill>
+                <a:latin typeface="Arial"/>
+              </a:rPr>
+              <a:t>Select</a:t>
+            </a:r>
+          </a:p>
+        </p:txBody>
+      </p:sp>
+      <p:sp>
+        <p:nvSpPr>
+          <p:cNvPr id="13" name="TextBox 12"/>
+          <p:cNvSpPr txBox="1"/>
+          <p:nvPr/>
+        </p:nvSpPr>
+        <p:spPr>
+          <a:xfrm>
+            <a:off x="1490472" y="2487168"/>
+            <a:ext cx="1009497" cy="2852928"/>
+          </a:xfrm>
+          <a:prstGeom prst="rect">
+            <a:avLst/>
+          </a:prstGeom>
+          <a:noFill/>
+        </p:spPr>
+        <p:txBody>
+          <a:bodyPr wrap="square" anchor="t">
+            <a:spAutoFit/>
+          </a:bodyPr>
+          <a:lstStyle/>
+          <a:p>
+            <a:pPr algn="l"/>
+            <a:r>
+              <a:rPr sz="1150" b="0">
+                <a:solidFill>
+                  <a:srgbClr val="161B26"/>
+                </a:solidFill>
+                <a:latin typeface="Arial"/>
+              </a:rPr>
+              <a:t>Choose a template by relationship and output format.</a:t>
+            </a:r>
+          </a:p>
+        </p:txBody>
+      </p:sp>
+      <p:sp>
+        <p:nvSpPr>
+          <p:cNvPr id="14" name="Rounded Rectangle 13"/>
+          <p:cNvSpPr/>
+          <p:nvPr/>
+        </p:nvSpPr>
+        <p:spPr>
+          <a:xfrm>
+            <a:off x="2884017" y="1920240"/>
+            <a:ext cx="1997049" cy="3566160"/>
+          </a:xfrm>
+          <a:prstGeom prst="roundRect">
+            <a:avLst/>
+          </a:prstGeom>
+          <a:solidFill>
+            <a:srgbClr val="F5F8FC"/>
+          </a:solidFill>
+          <a:ln>
+            <a:solidFill>
+              <a:srgbClr val="E2E8F0"/>
+            </a:solidFill>
+          </a:ln>
+        </p:spPr>
+        <p:style>
+          <a:lnRef idx="1">
+            <a:schemeClr val="accent1"/>
+          </a:lnRef>
+          <a:fillRef idx="3">
+            <a:schemeClr val="accent1"/>
+          </a:fillRef>
+          <a:effectRef idx="2">
+            <a:schemeClr val="accent1"/>
+          </a:effectRef>
+          <a:fontRef idx="minor">
+            <a:schemeClr val="lt1"/>
+          </a:fontRef>
+        </p:style>
+        <p:txBody>
+          <a:bodyPr rtlCol="0" anchor="ctr"/>
+          <a:lstStyle/>
+          <a:p>
+            <a:pPr algn="ctr"/>
+          </a:p>
+        </p:txBody>
+      </p:sp>
+      <p:sp>
+        <p:nvSpPr>
+          <p:cNvPr id="15" name="Rectangle 14"/>
+          <p:cNvSpPr/>
+          <p:nvPr/>
+        </p:nvSpPr>
+        <p:spPr>
+          <a:xfrm>
+            <a:off x="2884017" y="1920240"/>
+            <a:ext cx="73152" cy="3566160"/>
+          </a:xfrm>
+          <a:prstGeom prst="rect">
+            <a:avLst/>
+          </a:prstGeom>
+          <a:solidFill>
+            <a:srgbClr val="10B981"/>
+          </a:solidFill>
+          <a:ln>
+            <a:solidFill>
+              <a:srgbClr val="10B981"/>
+            </a:solidFill>
+          </a:ln>
+        </p:spPr>
+        <p:style>
+          <a:lnRef idx="1">
+            <a:schemeClr val="accent1"/>
+          </a:lnRef>
+          <a:fillRef idx="3">
+            <a:schemeClr val="accent1"/>
+          </a:fillRef>
+          <a:effectRef idx="2">
+            <a:schemeClr val="accent1"/>
+          </a:effectRef>
+          <a:fontRef idx="minor">
+            <a:schemeClr val="lt1"/>
+          </a:fontRef>
+        </p:style>
+        <p:txBody>
+          <a:bodyPr rtlCol="0" anchor="ctr"/>
+          <a:lstStyle/>
+          <a:p>
+            <a:pPr algn="ctr"/>
+          </a:p>
+        </p:txBody>
+      </p:sp>
+      <p:sp>
+        <p:nvSpPr>
+          <p:cNvPr id="16" name="Rounded Rectangle 15"/>
+          <p:cNvSpPr/>
+          <p:nvPr/>
+        </p:nvSpPr>
+        <p:spPr>
+          <a:xfrm>
+            <a:off x="3085185" y="2139696"/>
+            <a:ext cx="438912" cy="438912"/>
+          </a:xfrm>
+          <a:prstGeom prst="roundRect">
+            <a:avLst/>
+          </a:prstGeom>
+          <a:solidFill>
+            <a:srgbClr val="10B981"/>
+          </a:solidFill>
+          <a:ln>
+            <a:solidFill>
+              <a:srgbClr val="10B981"/>
+            </a:solidFill>
+          </a:ln>
+        </p:spPr>
+        <p:style>
+          <a:lnRef idx="1">
+            <a:schemeClr val="accent1"/>
+          </a:lnRef>
+          <a:fillRef idx="3">
+            <a:schemeClr val="accent1"/>
+          </a:fillRef>
+          <a:effectRef idx="2">
+            <a:schemeClr val="accent1"/>
+          </a:effectRef>
+          <a:fontRef idx="minor">
+            <a:schemeClr val="lt1"/>
+          </a:fontRef>
+        </p:style>
+        <p:txBody>
+          <a:bodyPr rtlCol="0" anchor="ctr"/>
+          <a:lstStyle/>
+          <a:p>
+            <a:pPr algn="ctr"/>
+          </a:p>
+        </p:txBody>
+      </p:sp>
+      <p:sp>
+        <p:nvSpPr>
+          <p:cNvPr id="17" name="TextBox 16"/>
+          <p:cNvSpPr txBox="1"/>
+          <p:nvPr/>
+        </p:nvSpPr>
+        <p:spPr>
+          <a:xfrm>
+            <a:off x="3085185" y="2148840"/>
+            <a:ext cx="438912" cy="420624"/>
+          </a:xfrm>
+          <a:prstGeom prst="rect">
+            <a:avLst/>
+          </a:prstGeom>
+          <a:noFill/>
+        </p:spPr>
+        <p:txBody>
+          <a:bodyPr wrap="square" anchor="ctr">
+            <a:spAutoFit/>
+          </a:bodyPr>
+          <a:lstStyle/>
+          <a:p>
+            <a:pPr algn="ctr"/>
+            <a:r>
+              <a:rPr sz="1400" b="1">
+                <a:solidFill>
+                  <a:srgbClr val="FFFFFF"/>
+                </a:solidFill>
+                <a:latin typeface="Arial"/>
+              </a:rPr>
+              <a:t>2</a:t>
+            </a:r>
+          </a:p>
+        </p:txBody>
+      </p:sp>
+      <p:sp>
+        <p:nvSpPr>
+          <p:cNvPr id="18" name="TextBox 17"/>
+          <p:cNvSpPr txBox="1"/>
+          <p:nvPr/>
+        </p:nvSpPr>
+        <p:spPr>
+          <a:xfrm>
+            <a:off x="3688689" y="2103120"/>
+            <a:ext cx="1009497" cy="329184"/>
+          </a:xfrm>
+          <a:prstGeom prst="rect">
+            <a:avLst/>
+          </a:prstGeom>
+          <a:noFill/>
+        </p:spPr>
+        <p:txBody>
+          <a:bodyPr wrap="square" anchor="t">
+            <a:spAutoFit/>
+          </a:bodyPr>
+          <a:lstStyle/>
+          <a:p>
+            <a:pPr algn="l"/>
+            <a:r>
+              <a:rPr sz="1400" b="1">
+                <a:solidFill>
+                  <a:srgbClr val="10B981"/>
+                </a:solidFill>
+                <a:latin typeface="Arial"/>
+              </a:rPr>
+              <a:t>Audit</a:t>
+            </a:r>
+          </a:p>
+        </p:txBody>
+      </p:sp>
+      <p:sp>
+        <p:nvSpPr>
+          <p:cNvPr id="19" name="TextBox 18"/>
+          <p:cNvSpPr txBox="1"/>
+          <p:nvPr/>
+        </p:nvSpPr>
+        <p:spPr>
+          <a:xfrm>
+            <a:off x="3688689" y="2487168"/>
+            <a:ext cx="1009497" cy="2852928"/>
+          </a:xfrm>
+          <a:prstGeom prst="rect">
+            <a:avLst/>
+          </a:prstGeom>
+          <a:noFill/>
+        </p:spPr>
+        <p:txBody>
+          <a:bodyPr wrap="square" anchor="t">
+            <a:spAutoFit/>
+          </a:bodyPr>
+          <a:lstStyle/>
+          <a:p>
+            <a:pPr algn="l"/>
+            <a:r>
+              <a:rPr sz="1150" b="0">
+                <a:solidFill>
+                  <a:srgbClr val="161B26"/>
+                </a:solidFill>
+                <a:latin typeface="Arial"/>
+              </a:rPr>
+              <a:t>Identify all placeholders and inherited decorative elements.</a:t>
+            </a:r>
+          </a:p>
+        </p:txBody>
+      </p:sp>
+      <p:sp>
+        <p:nvSpPr>
+          <p:cNvPr id="20" name="Rounded Rectangle 19"/>
+          <p:cNvSpPr/>
+          <p:nvPr/>
+        </p:nvSpPr>
+        <p:spPr>
+          <a:xfrm>
+            <a:off x="5082235" y="1920240"/>
+            <a:ext cx="1997049" cy="3566160"/>
+          </a:xfrm>
+          <a:prstGeom prst="roundRect">
+            <a:avLst/>
+          </a:prstGeom>
+          <a:solidFill>
+            <a:srgbClr val="F5F8FC"/>
+          </a:solidFill>
+          <a:ln>
+            <a:solidFill>
+              <a:srgbClr val="E2E8F0"/>
+            </a:solidFill>
+          </a:ln>
+        </p:spPr>
+        <p:style>
+          <a:lnRef idx="1">
+            <a:schemeClr val="accent1"/>
+          </a:lnRef>
+          <a:fillRef idx="3">
+            <a:schemeClr val="accent1"/>
+          </a:fillRef>
+          <a:effectRef idx="2">
+            <a:schemeClr val="accent1"/>
+          </a:effectRef>
+          <a:fontRef idx="minor">
+            <a:schemeClr val="lt1"/>
+          </a:fontRef>
+        </p:style>
+        <p:txBody>
+          <a:bodyPr rtlCol="0" anchor="ctr"/>
+          <a:lstStyle/>
+          <a:p>
+            <a:pPr algn="ctr"/>
+          </a:p>
+        </p:txBody>
+      </p:sp>
+      <p:sp>
+        <p:nvSpPr>
+          <p:cNvPr id="21" name="Rectangle 20"/>
+          <p:cNvSpPr/>
+          <p:nvPr/>
+        </p:nvSpPr>
+        <p:spPr>
+          <a:xfrm>
+            <a:off x="5082235" y="1920240"/>
+            <a:ext cx="73152" cy="3566160"/>
+          </a:xfrm>
+          <a:prstGeom prst="rect">
+            <a:avLst/>
+          </a:prstGeom>
+          <a:solidFill>
             <a:srgbClr val="7C3AED"/>
           </a:solidFill>
           <a:ln>
@@ -5753,14 +6234,94 @@
       </p:sp>
       <p:sp>
         <p:nvSpPr>
-          <p:cNvPr id="4" name="TextBox 3"/>
+          <p:cNvPr id="22" name="Rounded Rectangle 21"/>
+          <p:cNvSpPr/>
+          <p:nvPr/>
+        </p:nvSpPr>
+        <p:spPr>
+          <a:xfrm>
+            <a:off x="5283403" y="2139696"/>
+            <a:ext cx="438912" cy="438912"/>
+          </a:xfrm>
+          <a:prstGeom prst="roundRect">
+            <a:avLst/>
+          </a:prstGeom>
+          <a:solidFill>
+            <a:srgbClr val="7C3AED"/>
+          </a:solidFill>
+          <a:ln>
+            <a:solidFill>
+              <a:srgbClr val="7C3AED"/>
+            </a:solidFill>
+          </a:ln>
+        </p:spPr>
+        <p:style>
+          <a:lnRef idx="1">
+            <a:schemeClr val="accent1"/>
+          </a:lnRef>
+          <a:fillRef idx="3">
+            <a:schemeClr val="accent1"/>
+          </a:fillRef>
+          <a:effectRef idx="2">
+            <a:schemeClr val="accent1"/>
+          </a:effectRef>
+          <a:fontRef idx="minor">
+            <a:schemeClr val="lt1"/>
+          </a:fontRef>
+        </p:style>
+        <p:txBody>
+          <a:bodyPr rtlCol="0" anchor="ctr"/>
+          <a:lstStyle/>
+          <a:p>
+            <a:pPr algn="ctr"/>
+          </a:p>
+        </p:txBody>
+      </p:sp>
+      <p:sp>
+        <p:nvSpPr>
+          <p:cNvPr id="23" name="TextBox 22"/>
           <p:cNvSpPr txBox="1"/>
           <p:nvPr/>
         </p:nvSpPr>
         <p:spPr>
           <a:xfrm>
-            <a:off x="658368" y="384048"/>
-            <a:ext cx="10789920" cy="320040"/>
+            <a:off x="5283403" y="2148840"/>
+            <a:ext cx="438912" cy="420624"/>
+          </a:xfrm>
+          <a:prstGeom prst="rect">
+            <a:avLst/>
+          </a:prstGeom>
+          <a:noFill/>
+        </p:spPr>
+        <p:txBody>
+          <a:bodyPr wrap="square" anchor="ctr">
+            <a:spAutoFit/>
+          </a:bodyPr>
+          <a:lstStyle/>
+          <a:p>
+            <a:pPr algn="ctr"/>
+            <a:r>
+              <a:rPr sz="1400" b="1">
+                <a:solidFill>
+                  <a:srgbClr val="FFFFFF"/>
+                </a:solidFill>
+                <a:latin typeface="Arial"/>
+              </a:rPr>
+              <a:t>3</a:t>
+            </a:r>
+          </a:p>
+        </p:txBody>
+      </p:sp>
+      <p:sp>
+        <p:nvSpPr>
+          <p:cNvPr id="24" name="TextBox 23"/>
+          <p:cNvSpPr txBox="1"/>
+          <p:nvPr/>
+        </p:nvSpPr>
+        <p:spPr>
+          <a:xfrm>
+            <a:off x="5886907" y="2103120"/>
+            <a:ext cx="1009497" cy="329184"/>
           </a:xfrm>
           <a:prstGeom prst="rect">
             <a:avLst/>
@@ -5775,27 +6336,27 @@
           <a:p>
             <a:pPr algn="l"/>
             <a:r>
-              <a:rPr sz="1100" b="1">
+              <a:rPr sz="1400" b="1">
                 <a:solidFill>
                   <a:srgbClr val="7C3AED"/>
                 </a:solidFill>
                 <a:latin typeface="Arial"/>
               </a:rPr>
-              <a:t>ACTIVITY 03 · EXAMPLE</a:t>
-            </a:r>
-          </a:p>
-        </p:txBody>
-      </p:sp>
-      <p:sp>
-        <p:nvSpPr>
-          <p:cNvPr id="5" name="TextBox 4"/>
+              <a:t>Replace</a:t>
+            </a:r>
+          </a:p>
+        </p:txBody>
+      </p:sp>
+      <p:sp>
+        <p:nvSpPr>
+          <p:cNvPr id="25" name="TextBox 24"/>
           <p:cNvSpPr txBox="1"/>
           <p:nvPr/>
         </p:nvSpPr>
         <p:spPr>
           <a:xfrm>
-            <a:off x="658368" y="749808"/>
-            <a:ext cx="10789920" cy="658368"/>
+            <a:off x="5886907" y="2487168"/>
+            <a:ext cx="1009497" cy="2852928"/>
           </a:xfrm>
           <a:prstGeom prst="rect">
             <a:avLst/>
@@ -5810,33 +6371,33 @@
           <a:p>
             <a:pPr algn="l"/>
             <a:r>
-              <a:rPr sz="2700" b="1">
+              <a:rPr sz="1150" b="0">
                 <a:solidFill>
                   <a:srgbClr val="161B26"/>
                 </a:solidFill>
                 <a:latin typeface="Arial"/>
               </a:rPr>
-              <a:t>Worked Output</a:t>
-            </a:r>
-          </a:p>
-        </p:txBody>
-      </p:sp>
-      <p:sp>
-        <p:nvSpPr>
-          <p:cNvPr id="6" name="Rectangle 5"/>
+              <a:t>Insert the approved message, data and visuals.</a:t>
+            </a:r>
+          </a:p>
+        </p:txBody>
+      </p:sp>
+      <p:sp>
+        <p:nvSpPr>
+          <p:cNvPr id="26" name="Rounded Rectangle 25"/>
           <p:cNvSpPr/>
           <p:nvPr/>
         </p:nvSpPr>
         <p:spPr>
           <a:xfrm>
-            <a:off x="658368" y="1444752"/>
-            <a:ext cx="10881360" cy="18288"/>
-          </a:xfrm>
-          <a:prstGeom prst="rect">
-            <a:avLst/>
-          </a:prstGeom>
-          <a:solidFill>
-            <a:srgbClr val="E2E8F0"/>
+            <a:off x="7280452" y="1920240"/>
+            <a:ext cx="1997049" cy="3566160"/>
+          </a:xfrm>
+          <a:prstGeom prst="roundRect">
+            <a:avLst/>
+          </a:prstGeom>
+          <a:solidFill>
+            <a:srgbClr val="F5F8FC"/>
           </a:solidFill>
           <a:ln>
             <a:solidFill>
@@ -5868,14 +6429,139 @@
       </p:sp>
       <p:sp>
         <p:nvSpPr>
-          <p:cNvPr id="7" name="TextBox 6"/>
+          <p:cNvPr id="27" name="Rectangle 26"/>
+          <p:cNvSpPr/>
+          <p:nvPr/>
+        </p:nvSpPr>
+        <p:spPr>
+          <a:xfrm>
+            <a:off x="7280452" y="1920240"/>
+            <a:ext cx="73152" cy="3566160"/>
+          </a:xfrm>
+          <a:prstGeom prst="rect">
+            <a:avLst/>
+          </a:prstGeom>
+          <a:solidFill>
+            <a:srgbClr val="F59E0B"/>
+          </a:solidFill>
+          <a:ln>
+            <a:solidFill>
+              <a:srgbClr val="F59E0B"/>
+            </a:solidFill>
+          </a:ln>
+        </p:spPr>
+        <p:style>
+          <a:lnRef idx="1">
+            <a:schemeClr val="accent1"/>
+          </a:lnRef>
+          <a:fillRef idx="3">
+            <a:schemeClr val="accent1"/>
+          </a:fillRef>
+          <a:effectRef idx="2">
+            <a:schemeClr val="accent1"/>
+          </a:effectRef>
+          <a:fontRef idx="minor">
+            <a:schemeClr val="lt1"/>
+          </a:fontRef>
+        </p:style>
+        <p:txBody>
+          <a:bodyPr rtlCol="0" anchor="ctr"/>
+          <a:lstStyle/>
+          <a:p>
+            <a:pPr algn="ctr"/>
+          </a:p>
+        </p:txBody>
+      </p:sp>
+      <p:sp>
+        <p:nvSpPr>
+          <p:cNvPr id="28" name="Rounded Rectangle 27"/>
+          <p:cNvSpPr/>
+          <p:nvPr/>
+        </p:nvSpPr>
+        <p:spPr>
+          <a:xfrm>
+            <a:off x="7481620" y="2139696"/>
+            <a:ext cx="438912" cy="438912"/>
+          </a:xfrm>
+          <a:prstGeom prst="roundRect">
+            <a:avLst/>
+          </a:prstGeom>
+          <a:solidFill>
+            <a:srgbClr val="F59E0B"/>
+          </a:solidFill>
+          <a:ln>
+            <a:solidFill>
+              <a:srgbClr val="F59E0B"/>
+            </a:solidFill>
+          </a:ln>
+        </p:spPr>
+        <p:style>
+          <a:lnRef idx="1">
+            <a:schemeClr val="accent1"/>
+          </a:lnRef>
+          <a:fillRef idx="3">
+            <a:schemeClr val="accent1"/>
+          </a:fillRef>
+          <a:effectRef idx="2">
+            <a:schemeClr val="accent1"/>
+          </a:effectRef>
+          <a:fontRef idx="minor">
+            <a:schemeClr val="lt1"/>
+          </a:fontRef>
+        </p:style>
+        <p:txBody>
+          <a:bodyPr rtlCol="0" anchor="ctr"/>
+          <a:lstStyle/>
+          <a:p>
+            <a:pPr algn="ctr"/>
+          </a:p>
+        </p:txBody>
+      </p:sp>
+      <p:sp>
+        <p:nvSpPr>
+          <p:cNvPr id="29" name="TextBox 28"/>
           <p:cNvSpPr txBox="1"/>
           <p:nvPr/>
         </p:nvSpPr>
         <p:spPr>
           <a:xfrm>
-            <a:off x="658368" y="6473952"/>
-            <a:ext cx="9875520" cy="201168"/>
+            <a:off x="7481620" y="2148840"/>
+            <a:ext cx="438912" cy="420624"/>
+          </a:xfrm>
+          <a:prstGeom prst="rect">
+            <a:avLst/>
+          </a:prstGeom>
+          <a:noFill/>
+        </p:spPr>
+        <p:txBody>
+          <a:bodyPr wrap="square" anchor="ctr">
+            <a:spAutoFit/>
+          </a:bodyPr>
+          <a:lstStyle/>
+          <a:p>
+            <a:pPr algn="ctr"/>
+            <a:r>
+              <a:rPr sz="1400" b="1">
+                <a:solidFill>
+                  <a:srgbClr val="FFFFFF"/>
+                </a:solidFill>
+                <a:latin typeface="Arial"/>
+              </a:rPr>
+              <a:t>4</a:t>
+            </a:r>
+          </a:p>
+        </p:txBody>
+      </p:sp>
+      <p:sp>
+        <p:nvSpPr>
+          <p:cNvPr id="30" name="TextBox 29"/>
+          <p:cNvSpPr txBox="1"/>
+          <p:nvPr/>
+        </p:nvSpPr>
+        <p:spPr>
+          <a:xfrm>
+            <a:off x="8085124" y="2103120"/>
+            <a:ext cx="1009497" cy="329184"/>
           </a:xfrm>
           <a:prstGeom prst="rect">
             <a:avLst/>
@@ -5890,27 +6576,62 @@
           <a:p>
             <a:pPr algn="l"/>
             <a:r>
-              <a:rPr sz="800" b="0">
-                <a:solidFill>
-                  <a:srgbClr val="5B6372"/>
+              <a:rPr sz="1400" b="1">
+                <a:solidFill>
+                  <a:srgbClr val="F59E0B"/>
                 </a:solidFill>
                 <a:latin typeface="Arial"/>
               </a:rPr>
-              <a:t>TGS-2024048310 · ACTIVITY PRACTICE · Tertiary Infotech Academy Pte Ltd</a:t>
-            </a:r>
-          </a:p>
-        </p:txBody>
-      </p:sp>
-      <p:sp>
-        <p:nvSpPr>
-          <p:cNvPr id="8" name="Rounded Rectangle 7"/>
+              <a:t>Align</a:t>
+            </a:r>
+          </a:p>
+        </p:txBody>
+      </p:sp>
+      <p:sp>
+        <p:nvSpPr>
+          <p:cNvPr id="31" name="TextBox 30"/>
+          <p:cNvSpPr txBox="1"/>
+          <p:nvPr/>
+        </p:nvSpPr>
+        <p:spPr>
+          <a:xfrm>
+            <a:off x="8085124" y="2487168"/>
+            <a:ext cx="1009497" cy="2852928"/>
+          </a:xfrm>
+          <a:prstGeom prst="rect">
+            <a:avLst/>
+          </a:prstGeom>
+          <a:noFill/>
+        </p:spPr>
+        <p:txBody>
+          <a:bodyPr wrap="square" anchor="t">
+            <a:spAutoFit/>
+          </a:bodyPr>
+          <a:lstStyle/>
+          <a:p>
+            <a:pPr algn="l"/>
+            <a:r>
+              <a:rPr sz="1150" b="0">
+                <a:solidFill>
+                  <a:srgbClr val="161B26"/>
+                </a:solidFill>
+                <a:latin typeface="Arial"/>
+              </a:rPr>
+              <a:t>Apply brand, grid, hierarchy and accessibility.</a:t>
+            </a:r>
+          </a:p>
+        </p:txBody>
+      </p:sp>
+      <p:sp>
+        <p:nvSpPr>
+          <p:cNvPr id="32" name="Rounded Rectangle 31"/>
           <p:cNvSpPr/>
           <p:nvPr/>
         </p:nvSpPr>
         <p:spPr>
           <a:xfrm>
-            <a:off x="731520" y="1783080"/>
-            <a:ext cx="3401568" cy="1719072"/>
+            <a:off x="9478670" y="1920240"/>
+            <a:ext cx="1997049" cy="3566160"/>
           </a:xfrm>
           <a:prstGeom prst="roundRect">
             <a:avLst/>
@@ -5948,14 +6669,14 @@
       </p:sp>
       <p:sp>
         <p:nvSpPr>
-          <p:cNvPr id="9" name="Rectangle 8"/>
+          <p:cNvPr id="33" name="Rectangle 32"/>
           <p:cNvSpPr/>
           <p:nvPr/>
         </p:nvSpPr>
         <p:spPr>
           <a:xfrm>
-            <a:off x="731520" y="1783080"/>
-            <a:ext cx="73152" cy="1719072"/>
+            <a:off x="9478670" y="1920240"/>
+            <a:ext cx="73152" cy="3566160"/>
           </a:xfrm>
           <a:prstGeom prst="rect">
             <a:avLst/>
@@ -5993,13 +6714,13 @@
       </p:sp>
       <p:sp>
         <p:nvSpPr>
-          <p:cNvPr id="10" name="Rounded Rectangle 9"/>
+          <p:cNvPr id="34" name="Rounded Rectangle 33"/>
           <p:cNvSpPr/>
           <p:nvPr/>
         </p:nvSpPr>
         <p:spPr>
           <a:xfrm>
-            <a:off x="932688" y="2002536"/>
+            <a:off x="9679838" y="2139696"/>
             <a:ext cx="438912" cy="438912"/>
           </a:xfrm>
           <a:prstGeom prst="roundRect">
@@ -6038,13 +6759,13 @@
       </p:sp>
       <p:sp>
         <p:nvSpPr>
-          <p:cNvPr id="11" name="TextBox 10"/>
+          <p:cNvPr id="35" name="TextBox 34"/>
           <p:cNvSpPr txBox="1"/>
           <p:nvPr/>
         </p:nvSpPr>
         <p:spPr>
           <a:xfrm>
-            <a:off x="932688" y="2011680"/>
+            <a:off x="9679838" y="2148840"/>
             <a:ext cx="438912" cy="420624"/>
           </a:xfrm>
           <a:prstGeom prst="rect">
@@ -6066,21 +6787,21 @@
                 </a:solidFill>
                 <a:latin typeface="Arial"/>
               </a:rPr>
-              <a:t>1</a:t>
-            </a:r>
-          </a:p>
-        </p:txBody>
-      </p:sp>
-      <p:sp>
-        <p:nvSpPr>
-          <p:cNvPr id="12" name="TextBox 11"/>
+              <a:t>5</a:t>
+            </a:r>
+          </a:p>
+        </p:txBody>
+      </p:sp>
+      <p:sp>
+        <p:nvSpPr>
+          <p:cNvPr id="36" name="TextBox 35"/>
           <p:cNvSpPr txBox="1"/>
           <p:nvPr/>
         </p:nvSpPr>
         <p:spPr>
           <a:xfrm>
-            <a:off x="1536192" y="1965960"/>
-            <a:ext cx="2414016" cy="329184"/>
+            <a:off x="10283342" y="2103120"/>
+            <a:ext cx="1009497" cy="329184"/>
           </a:xfrm>
           <a:prstGeom prst="rect">
             <a:avLst/>
@@ -6101,21 +6822,21 @@
                 </a:solidFill>
                 <a:latin typeface="Arial"/>
               </a:rPr>
-              <a:t>Purpose</a:t>
-            </a:r>
-          </a:p>
-        </p:txBody>
-      </p:sp>
-      <p:sp>
-        <p:nvSpPr>
-          <p:cNvPr id="13" name="TextBox 12"/>
+              <a:t>Export</a:t>
+            </a:r>
+          </a:p>
+        </p:txBody>
+      </p:sp>
+      <p:sp>
+        <p:nvSpPr>
+          <p:cNvPr id="37" name="TextBox 36"/>
           <p:cNvSpPr txBox="1"/>
           <p:nvPr/>
         </p:nvSpPr>
         <p:spPr>
           <a:xfrm>
-            <a:off x="1536192" y="2350008"/>
-            <a:ext cx="2414016" cy="1005839"/>
+            <a:off x="10283342" y="2487168"/>
+            <a:ext cx="1009497" cy="2852928"/>
           </a:xfrm>
           <a:prstGeom prst="rect">
             <a:avLst/>
@@ -6136,1207 +6857,7 @@
                 </a:solidFill>
                 <a:latin typeface="Arial"/>
               </a:rPr>
-              <a:t>Does the layout answer the audience question?</a:t>
-            </a:r>
-          </a:p>
-        </p:txBody>
-      </p:sp>
-      <p:sp>
-        <p:nvSpPr>
-          <p:cNvPr id="14" name="Rounded Rectangle 13"/>
-          <p:cNvSpPr/>
-          <p:nvPr/>
-        </p:nvSpPr>
-        <p:spPr>
-          <a:xfrm>
-            <a:off x="4315968" y="1783080"/>
-            <a:ext cx="3401568" cy="1719072"/>
-          </a:xfrm>
-          <a:prstGeom prst="roundRect">
-            <a:avLst/>
-          </a:prstGeom>
-          <a:solidFill>
-            <a:srgbClr val="F5F8FC"/>
-          </a:solidFill>
-          <a:ln>
-            <a:solidFill>
-              <a:srgbClr val="E2E8F0"/>
-            </a:solidFill>
-          </a:ln>
-        </p:spPr>
-        <p:style>
-          <a:lnRef idx="1">
-            <a:schemeClr val="accent1"/>
-          </a:lnRef>
-          <a:fillRef idx="3">
-            <a:schemeClr val="accent1"/>
-          </a:fillRef>
-          <a:effectRef idx="2">
-            <a:schemeClr val="accent1"/>
-          </a:effectRef>
-          <a:fontRef idx="minor">
-            <a:schemeClr val="lt1"/>
-          </a:fontRef>
-        </p:style>
-        <p:txBody>
-          <a:bodyPr rtlCol="0" anchor="ctr"/>
-          <a:lstStyle/>
-          <a:p>
-            <a:pPr algn="ctr"/>
-          </a:p>
-        </p:txBody>
-      </p:sp>
-      <p:sp>
-        <p:nvSpPr>
-          <p:cNvPr id="15" name="Rectangle 14"/>
-          <p:cNvSpPr/>
-          <p:nvPr/>
-        </p:nvSpPr>
-        <p:spPr>
-          <a:xfrm>
-            <a:off x="4315968" y="1783080"/>
-            <a:ext cx="73152" cy="1719072"/>
-          </a:xfrm>
-          <a:prstGeom prst="rect">
-            <a:avLst/>
-          </a:prstGeom>
-          <a:solidFill>
-            <a:srgbClr val="10B981"/>
-          </a:solidFill>
-          <a:ln>
-            <a:solidFill>
-              <a:srgbClr val="10B981"/>
-            </a:solidFill>
-          </a:ln>
-        </p:spPr>
-        <p:style>
-          <a:lnRef idx="1">
-            <a:schemeClr val="accent1"/>
-          </a:lnRef>
-          <a:fillRef idx="3">
-            <a:schemeClr val="accent1"/>
-          </a:fillRef>
-          <a:effectRef idx="2">
-            <a:schemeClr val="accent1"/>
-          </a:effectRef>
-          <a:fontRef idx="minor">
-            <a:schemeClr val="lt1"/>
-          </a:fontRef>
-        </p:style>
-        <p:txBody>
-          <a:bodyPr rtlCol="0" anchor="ctr"/>
-          <a:lstStyle/>
-          <a:p>
-            <a:pPr algn="ctr"/>
-          </a:p>
-        </p:txBody>
-      </p:sp>
-      <p:sp>
-        <p:nvSpPr>
-          <p:cNvPr id="16" name="Rounded Rectangle 15"/>
-          <p:cNvSpPr/>
-          <p:nvPr/>
-        </p:nvSpPr>
-        <p:spPr>
-          <a:xfrm>
-            <a:off x="4517136" y="2002536"/>
-            <a:ext cx="438912" cy="438912"/>
-          </a:xfrm>
-          <a:prstGeom prst="roundRect">
-            <a:avLst/>
-          </a:prstGeom>
-          <a:solidFill>
-            <a:srgbClr val="10B981"/>
-          </a:solidFill>
-          <a:ln>
-            <a:solidFill>
-              <a:srgbClr val="10B981"/>
-            </a:solidFill>
-          </a:ln>
-        </p:spPr>
-        <p:style>
-          <a:lnRef idx="1">
-            <a:schemeClr val="accent1"/>
-          </a:lnRef>
-          <a:fillRef idx="3">
-            <a:schemeClr val="accent1"/>
-          </a:fillRef>
-          <a:effectRef idx="2">
-            <a:schemeClr val="accent1"/>
-          </a:effectRef>
-          <a:fontRef idx="minor">
-            <a:schemeClr val="lt1"/>
-          </a:fontRef>
-        </p:style>
-        <p:txBody>
-          <a:bodyPr rtlCol="0" anchor="ctr"/>
-          <a:lstStyle/>
-          <a:p>
-            <a:pPr algn="ctr"/>
-          </a:p>
-        </p:txBody>
-      </p:sp>
-      <p:sp>
-        <p:nvSpPr>
-          <p:cNvPr id="17" name="TextBox 16"/>
-          <p:cNvSpPr txBox="1"/>
-          <p:nvPr/>
-        </p:nvSpPr>
-        <p:spPr>
-          <a:xfrm>
-            <a:off x="4517136" y="2011680"/>
-            <a:ext cx="438912" cy="420624"/>
-          </a:xfrm>
-          <a:prstGeom prst="rect">
-            <a:avLst/>
-          </a:prstGeom>
-          <a:noFill/>
-        </p:spPr>
-        <p:txBody>
-          <a:bodyPr wrap="square" anchor="ctr">
-            <a:spAutoFit/>
-          </a:bodyPr>
-          <a:lstStyle/>
-          <a:p>
-            <a:pPr algn="ctr"/>
-            <a:r>
-              <a:rPr sz="1400" b="1">
-                <a:solidFill>
-                  <a:srgbClr val="FFFFFF"/>
-                </a:solidFill>
-                <a:latin typeface="Arial"/>
-              </a:rPr>
-              <a:t>2</a:t>
-            </a:r>
-          </a:p>
-        </p:txBody>
-      </p:sp>
-      <p:sp>
-        <p:nvSpPr>
-          <p:cNvPr id="18" name="TextBox 17"/>
-          <p:cNvSpPr txBox="1"/>
-          <p:nvPr/>
-        </p:nvSpPr>
-        <p:spPr>
-          <a:xfrm>
-            <a:off x="5120640" y="1965960"/>
-            <a:ext cx="2414016" cy="329184"/>
-          </a:xfrm>
-          <a:prstGeom prst="rect">
-            <a:avLst/>
-          </a:prstGeom>
-          <a:noFill/>
-        </p:spPr>
-        <p:txBody>
-          <a:bodyPr wrap="square" anchor="t">
-            <a:spAutoFit/>
-          </a:bodyPr>
-          <a:lstStyle/>
-          <a:p>
-            <a:pPr algn="l"/>
-            <a:r>
-              <a:rPr sz="1400" b="1">
-                <a:solidFill>
-                  <a:srgbClr val="10B981"/>
-                </a:solidFill>
-                <a:latin typeface="Arial"/>
-              </a:rPr>
-              <a:t>Content</a:t>
-            </a:r>
-          </a:p>
-        </p:txBody>
-      </p:sp>
-      <p:sp>
-        <p:nvSpPr>
-          <p:cNvPr id="19" name="TextBox 18"/>
-          <p:cNvSpPr txBox="1"/>
-          <p:nvPr/>
-        </p:nvSpPr>
-        <p:spPr>
-          <a:xfrm>
-            <a:off x="5120640" y="2350008"/>
-            <a:ext cx="2414016" cy="1005839"/>
-          </a:xfrm>
-          <a:prstGeom prst="rect">
-            <a:avLst/>
-          </a:prstGeom>
-          <a:noFill/>
-        </p:spPr>
-        <p:txBody>
-          <a:bodyPr wrap="square" anchor="t">
-            <a:spAutoFit/>
-          </a:bodyPr>
-          <a:lstStyle/>
-          <a:p>
-            <a:pPr algn="l"/>
-            <a:r>
-              <a:rPr sz="1150" b="0">
-                <a:solidFill>
-                  <a:srgbClr val="161B26"/>
-                </a:solidFill>
-                <a:latin typeface="Arial"/>
-              </a:rPr>
-              <a:t>Are all placeholders replaced and all claims verified?</a:t>
-            </a:r>
-          </a:p>
-        </p:txBody>
-      </p:sp>
-      <p:sp>
-        <p:nvSpPr>
-          <p:cNvPr id="20" name="Rounded Rectangle 19"/>
-          <p:cNvSpPr/>
-          <p:nvPr/>
-        </p:nvSpPr>
-        <p:spPr>
-          <a:xfrm>
-            <a:off x="7900416" y="1783080"/>
-            <a:ext cx="3401568" cy="1719072"/>
-          </a:xfrm>
-          <a:prstGeom prst="roundRect">
-            <a:avLst/>
-          </a:prstGeom>
-          <a:solidFill>
-            <a:srgbClr val="F5F8FC"/>
-          </a:solidFill>
-          <a:ln>
-            <a:solidFill>
-              <a:srgbClr val="E2E8F0"/>
-            </a:solidFill>
-          </a:ln>
-        </p:spPr>
-        <p:style>
-          <a:lnRef idx="1">
-            <a:schemeClr val="accent1"/>
-          </a:lnRef>
-          <a:fillRef idx="3">
-            <a:schemeClr val="accent1"/>
-          </a:fillRef>
-          <a:effectRef idx="2">
-            <a:schemeClr val="accent1"/>
-          </a:effectRef>
-          <a:fontRef idx="minor">
-            <a:schemeClr val="lt1"/>
-          </a:fontRef>
-        </p:style>
-        <p:txBody>
-          <a:bodyPr rtlCol="0" anchor="ctr"/>
-          <a:lstStyle/>
-          <a:p>
-            <a:pPr algn="ctr"/>
-          </a:p>
-        </p:txBody>
-      </p:sp>
-      <p:sp>
-        <p:nvSpPr>
-          <p:cNvPr id="21" name="Rectangle 20"/>
-          <p:cNvSpPr/>
-          <p:nvPr/>
-        </p:nvSpPr>
-        <p:spPr>
-          <a:xfrm>
-            <a:off x="7900416" y="1783080"/>
-            <a:ext cx="73152" cy="1719072"/>
-          </a:xfrm>
-          <a:prstGeom prst="rect">
-            <a:avLst/>
-          </a:prstGeom>
-          <a:solidFill>
-            <a:srgbClr val="7C3AED"/>
-          </a:solidFill>
-          <a:ln>
-            <a:solidFill>
-              <a:srgbClr val="7C3AED"/>
-            </a:solidFill>
-          </a:ln>
-        </p:spPr>
-        <p:style>
-          <a:lnRef idx="1">
-            <a:schemeClr val="accent1"/>
-          </a:lnRef>
-          <a:fillRef idx="3">
-            <a:schemeClr val="accent1"/>
-          </a:fillRef>
-          <a:effectRef idx="2">
-            <a:schemeClr val="accent1"/>
-          </a:effectRef>
-          <a:fontRef idx="minor">
-            <a:schemeClr val="lt1"/>
-          </a:fontRef>
-        </p:style>
-        <p:txBody>
-          <a:bodyPr rtlCol="0" anchor="ctr"/>
-          <a:lstStyle/>
-          <a:p>
-            <a:pPr algn="ctr"/>
-          </a:p>
-        </p:txBody>
-      </p:sp>
-      <p:sp>
-        <p:nvSpPr>
-          <p:cNvPr id="22" name="Rounded Rectangle 21"/>
-          <p:cNvSpPr/>
-          <p:nvPr/>
-        </p:nvSpPr>
-        <p:spPr>
-          <a:xfrm>
-            <a:off x="8101584" y="2002536"/>
-            <a:ext cx="438912" cy="438912"/>
-          </a:xfrm>
-          <a:prstGeom prst="roundRect">
-            <a:avLst/>
-          </a:prstGeom>
-          <a:solidFill>
-            <a:srgbClr val="7C3AED"/>
-          </a:solidFill>
-          <a:ln>
-            <a:solidFill>
-              <a:srgbClr val="7C3AED"/>
-            </a:solidFill>
-          </a:ln>
-        </p:spPr>
-        <p:style>
-          <a:lnRef idx="1">
-            <a:schemeClr val="accent1"/>
-          </a:lnRef>
-          <a:fillRef idx="3">
-            <a:schemeClr val="accent1"/>
-          </a:fillRef>
-          <a:effectRef idx="2">
-            <a:schemeClr val="accent1"/>
-          </a:effectRef>
-          <a:fontRef idx="minor">
-            <a:schemeClr val="lt1"/>
-          </a:fontRef>
-        </p:style>
-        <p:txBody>
-          <a:bodyPr rtlCol="0" anchor="ctr"/>
-          <a:lstStyle/>
-          <a:p>
-            <a:pPr algn="ctr"/>
-          </a:p>
-        </p:txBody>
-      </p:sp>
-      <p:sp>
-        <p:nvSpPr>
-          <p:cNvPr id="23" name="TextBox 22"/>
-          <p:cNvSpPr txBox="1"/>
-          <p:nvPr/>
-        </p:nvSpPr>
-        <p:spPr>
-          <a:xfrm>
-            <a:off x="8101584" y="2011680"/>
-            <a:ext cx="438912" cy="420624"/>
-          </a:xfrm>
-          <a:prstGeom prst="rect">
-            <a:avLst/>
-          </a:prstGeom>
-          <a:noFill/>
-        </p:spPr>
-        <p:txBody>
-          <a:bodyPr wrap="square" anchor="ctr">
-            <a:spAutoFit/>
-          </a:bodyPr>
-          <a:lstStyle/>
-          <a:p>
-            <a:pPr algn="ctr"/>
-            <a:r>
-              <a:rPr sz="1400" b="1">
-                <a:solidFill>
-                  <a:srgbClr val="FFFFFF"/>
-                </a:solidFill>
-                <a:latin typeface="Arial"/>
-              </a:rPr>
-              <a:t>3</a:t>
-            </a:r>
-          </a:p>
-        </p:txBody>
-      </p:sp>
-      <p:sp>
-        <p:nvSpPr>
-          <p:cNvPr id="24" name="TextBox 23"/>
-          <p:cNvSpPr txBox="1"/>
-          <p:nvPr/>
-        </p:nvSpPr>
-        <p:spPr>
-          <a:xfrm>
-            <a:off x="8705088" y="1965960"/>
-            <a:ext cx="2414016" cy="329184"/>
-          </a:xfrm>
-          <a:prstGeom prst="rect">
-            <a:avLst/>
-          </a:prstGeom>
-          <a:noFill/>
-        </p:spPr>
-        <p:txBody>
-          <a:bodyPr wrap="square" anchor="t">
-            <a:spAutoFit/>
-          </a:bodyPr>
-          <a:lstStyle/>
-          <a:p>
-            <a:pPr algn="l"/>
-            <a:r>
-              <a:rPr sz="1400" b="1">
-                <a:solidFill>
-                  <a:srgbClr val="7C3AED"/>
-                </a:solidFill>
-                <a:latin typeface="Arial"/>
-              </a:rPr>
-              <a:t>Hierarchy</a:t>
-            </a:r>
-          </a:p>
-        </p:txBody>
-      </p:sp>
-      <p:sp>
-        <p:nvSpPr>
-          <p:cNvPr id="25" name="TextBox 24"/>
-          <p:cNvSpPr txBox="1"/>
-          <p:nvPr/>
-        </p:nvSpPr>
-        <p:spPr>
-          <a:xfrm>
-            <a:off x="8705088" y="2350008"/>
-            <a:ext cx="2414016" cy="1005839"/>
-          </a:xfrm>
-          <a:prstGeom prst="rect">
-            <a:avLst/>
-          </a:prstGeom>
-          <a:noFill/>
-        </p:spPr>
-        <p:txBody>
-          <a:bodyPr wrap="square" anchor="t">
-            <a:spAutoFit/>
-          </a:bodyPr>
-          <a:lstStyle/>
-          <a:p>
-            <a:pPr algn="l"/>
-            <a:r>
-              <a:rPr sz="1150" b="0">
-                <a:solidFill>
-                  <a:srgbClr val="161B26"/>
-                </a:solidFill>
-                <a:latin typeface="Arial"/>
-              </a:rPr>
-              <a:t>Is the reading order obvious at thumbnail size?</a:t>
-            </a:r>
-          </a:p>
-        </p:txBody>
-      </p:sp>
-      <p:sp>
-        <p:nvSpPr>
-          <p:cNvPr id="26" name="Rounded Rectangle 25"/>
-          <p:cNvSpPr/>
-          <p:nvPr/>
-        </p:nvSpPr>
-        <p:spPr>
-          <a:xfrm>
-            <a:off x="731520" y="3776472"/>
-            <a:ext cx="3401568" cy="1719072"/>
-          </a:xfrm>
-          <a:prstGeom prst="roundRect">
-            <a:avLst/>
-          </a:prstGeom>
-          <a:solidFill>
-            <a:srgbClr val="F5F8FC"/>
-          </a:solidFill>
-          <a:ln>
-            <a:solidFill>
-              <a:srgbClr val="E2E8F0"/>
-            </a:solidFill>
-          </a:ln>
-        </p:spPr>
-        <p:style>
-          <a:lnRef idx="1">
-            <a:schemeClr val="accent1"/>
-          </a:lnRef>
-          <a:fillRef idx="3">
-            <a:schemeClr val="accent1"/>
-          </a:fillRef>
-          <a:effectRef idx="2">
-            <a:schemeClr val="accent1"/>
-          </a:effectRef>
-          <a:fontRef idx="minor">
-            <a:schemeClr val="lt1"/>
-          </a:fontRef>
-        </p:style>
-        <p:txBody>
-          <a:bodyPr rtlCol="0" anchor="ctr"/>
-          <a:lstStyle/>
-          <a:p>
-            <a:pPr algn="ctr"/>
-          </a:p>
-        </p:txBody>
-      </p:sp>
-      <p:sp>
-        <p:nvSpPr>
-          <p:cNvPr id="27" name="Rectangle 26"/>
-          <p:cNvSpPr/>
-          <p:nvPr/>
-        </p:nvSpPr>
-        <p:spPr>
-          <a:xfrm>
-            <a:off x="731520" y="3776472"/>
-            <a:ext cx="73152" cy="1719072"/>
-          </a:xfrm>
-          <a:prstGeom prst="rect">
-            <a:avLst/>
-          </a:prstGeom>
-          <a:solidFill>
-            <a:srgbClr val="F59E0B"/>
-          </a:solidFill>
-          <a:ln>
-            <a:solidFill>
-              <a:srgbClr val="F59E0B"/>
-            </a:solidFill>
-          </a:ln>
-        </p:spPr>
-        <p:style>
-          <a:lnRef idx="1">
-            <a:schemeClr val="accent1"/>
-          </a:lnRef>
-          <a:fillRef idx="3">
-            <a:schemeClr val="accent1"/>
-          </a:fillRef>
-          <a:effectRef idx="2">
-            <a:schemeClr val="accent1"/>
-          </a:effectRef>
-          <a:fontRef idx="minor">
-            <a:schemeClr val="lt1"/>
-          </a:fontRef>
-        </p:style>
-        <p:txBody>
-          <a:bodyPr rtlCol="0" anchor="ctr"/>
-          <a:lstStyle/>
-          <a:p>
-            <a:pPr algn="ctr"/>
-          </a:p>
-        </p:txBody>
-      </p:sp>
-      <p:sp>
-        <p:nvSpPr>
-          <p:cNvPr id="28" name="Rounded Rectangle 27"/>
-          <p:cNvSpPr/>
-          <p:nvPr/>
-        </p:nvSpPr>
-        <p:spPr>
-          <a:xfrm>
-            <a:off x="932688" y="3995928"/>
-            <a:ext cx="438912" cy="438912"/>
-          </a:xfrm>
-          <a:prstGeom prst="roundRect">
-            <a:avLst/>
-          </a:prstGeom>
-          <a:solidFill>
-            <a:srgbClr val="F59E0B"/>
-          </a:solidFill>
-          <a:ln>
-            <a:solidFill>
-              <a:srgbClr val="F59E0B"/>
-            </a:solidFill>
-          </a:ln>
-        </p:spPr>
-        <p:style>
-          <a:lnRef idx="1">
-            <a:schemeClr val="accent1"/>
-          </a:lnRef>
-          <a:fillRef idx="3">
-            <a:schemeClr val="accent1"/>
-          </a:fillRef>
-          <a:effectRef idx="2">
-            <a:schemeClr val="accent1"/>
-          </a:effectRef>
-          <a:fontRef idx="minor">
-            <a:schemeClr val="lt1"/>
-          </a:fontRef>
-        </p:style>
-        <p:txBody>
-          <a:bodyPr rtlCol="0" anchor="ctr"/>
-          <a:lstStyle/>
-          <a:p>
-            <a:pPr algn="ctr"/>
-          </a:p>
-        </p:txBody>
-      </p:sp>
-      <p:sp>
-        <p:nvSpPr>
-          <p:cNvPr id="29" name="TextBox 28"/>
-          <p:cNvSpPr txBox="1"/>
-          <p:nvPr/>
-        </p:nvSpPr>
-        <p:spPr>
-          <a:xfrm>
-            <a:off x="932688" y="4005072"/>
-            <a:ext cx="438912" cy="420624"/>
-          </a:xfrm>
-          <a:prstGeom prst="rect">
-            <a:avLst/>
-          </a:prstGeom>
-          <a:noFill/>
-        </p:spPr>
-        <p:txBody>
-          <a:bodyPr wrap="square" anchor="ctr">
-            <a:spAutoFit/>
-          </a:bodyPr>
-          <a:lstStyle/>
-          <a:p>
-            <a:pPr algn="ctr"/>
-            <a:r>
-              <a:rPr sz="1400" b="1">
-                <a:solidFill>
-                  <a:srgbClr val="FFFFFF"/>
-                </a:solidFill>
-                <a:latin typeface="Arial"/>
-              </a:rPr>
-              <a:t>4</a:t>
-            </a:r>
-          </a:p>
-        </p:txBody>
-      </p:sp>
-      <p:sp>
-        <p:nvSpPr>
-          <p:cNvPr id="30" name="TextBox 29"/>
-          <p:cNvSpPr txBox="1"/>
-          <p:nvPr/>
-        </p:nvSpPr>
-        <p:spPr>
-          <a:xfrm>
-            <a:off x="1536192" y="3959352"/>
-            <a:ext cx="2414016" cy="329184"/>
-          </a:xfrm>
-          <a:prstGeom prst="rect">
-            <a:avLst/>
-          </a:prstGeom>
-          <a:noFill/>
-        </p:spPr>
-        <p:txBody>
-          <a:bodyPr wrap="square" anchor="t">
-            <a:spAutoFit/>
-          </a:bodyPr>
-          <a:lstStyle/>
-          <a:p>
-            <a:pPr algn="l"/>
-            <a:r>
-              <a:rPr sz="1400" b="1">
-                <a:solidFill>
-                  <a:srgbClr val="F59E0B"/>
-                </a:solidFill>
-                <a:latin typeface="Arial"/>
-              </a:rPr>
-              <a:t>Brand</a:t>
-            </a:r>
-          </a:p>
-        </p:txBody>
-      </p:sp>
-      <p:sp>
-        <p:nvSpPr>
-          <p:cNvPr id="31" name="TextBox 30"/>
-          <p:cNvSpPr txBox="1"/>
-          <p:nvPr/>
-        </p:nvSpPr>
-        <p:spPr>
-          <a:xfrm>
-            <a:off x="1536192" y="4343400"/>
-            <a:ext cx="2414016" cy="1005839"/>
-          </a:xfrm>
-          <a:prstGeom prst="rect">
-            <a:avLst/>
-          </a:prstGeom>
-          <a:noFill/>
-        </p:spPr>
-        <p:txBody>
-          <a:bodyPr wrap="square" anchor="t">
-            <a:spAutoFit/>
-          </a:bodyPr>
-          <a:lstStyle/>
-          <a:p>
-            <a:pPr algn="l"/>
-            <a:r>
-              <a:rPr sz="1150" b="0">
-                <a:solidFill>
-                  <a:srgbClr val="161B26"/>
-                </a:solidFill>
-                <a:latin typeface="Arial"/>
-              </a:rPr>
-              <a:t>Are palette, type, logo and tone approved?</a:t>
-            </a:r>
-          </a:p>
-        </p:txBody>
-      </p:sp>
-      <p:sp>
-        <p:nvSpPr>
-          <p:cNvPr id="32" name="Rounded Rectangle 31"/>
-          <p:cNvSpPr/>
-          <p:nvPr/>
-        </p:nvSpPr>
-        <p:spPr>
-          <a:xfrm>
-            <a:off x="4315968" y="3776472"/>
-            <a:ext cx="3401568" cy="1719072"/>
-          </a:xfrm>
-          <a:prstGeom prst="roundRect">
-            <a:avLst/>
-          </a:prstGeom>
-          <a:solidFill>
-            <a:srgbClr val="F5F8FC"/>
-          </a:solidFill>
-          <a:ln>
-            <a:solidFill>
-              <a:srgbClr val="E2E8F0"/>
-            </a:solidFill>
-          </a:ln>
-        </p:spPr>
-        <p:style>
-          <a:lnRef idx="1">
-            <a:schemeClr val="accent1"/>
-          </a:lnRef>
-          <a:fillRef idx="3">
-            <a:schemeClr val="accent1"/>
-          </a:fillRef>
-          <a:effectRef idx="2">
-            <a:schemeClr val="accent1"/>
-          </a:effectRef>
-          <a:fontRef idx="minor">
-            <a:schemeClr val="lt1"/>
-          </a:fontRef>
-        </p:style>
-        <p:txBody>
-          <a:bodyPr rtlCol="0" anchor="ctr"/>
-          <a:lstStyle/>
-          <a:p>
-            <a:pPr algn="ctr"/>
-          </a:p>
-        </p:txBody>
-      </p:sp>
-      <p:sp>
-        <p:nvSpPr>
-          <p:cNvPr id="33" name="Rectangle 32"/>
-          <p:cNvSpPr/>
-          <p:nvPr/>
-        </p:nvSpPr>
-        <p:spPr>
-          <a:xfrm>
-            <a:off x="4315968" y="3776472"/>
-            <a:ext cx="73152" cy="1719072"/>
-          </a:xfrm>
-          <a:prstGeom prst="rect">
-            <a:avLst/>
-          </a:prstGeom>
-          <a:solidFill>
-            <a:srgbClr val="1F6FEB"/>
-          </a:solidFill>
-          <a:ln>
-            <a:solidFill>
-              <a:srgbClr val="1F6FEB"/>
-            </a:solidFill>
-          </a:ln>
-        </p:spPr>
-        <p:style>
-          <a:lnRef idx="1">
-            <a:schemeClr val="accent1"/>
-          </a:lnRef>
-          <a:fillRef idx="3">
-            <a:schemeClr val="accent1"/>
-          </a:fillRef>
-          <a:effectRef idx="2">
-            <a:schemeClr val="accent1"/>
-          </a:effectRef>
-          <a:fontRef idx="minor">
-            <a:schemeClr val="lt1"/>
-          </a:fontRef>
-        </p:style>
-        <p:txBody>
-          <a:bodyPr rtlCol="0" anchor="ctr"/>
-          <a:lstStyle/>
-          <a:p>
-            <a:pPr algn="ctr"/>
-          </a:p>
-        </p:txBody>
-      </p:sp>
-      <p:sp>
-        <p:nvSpPr>
-          <p:cNvPr id="34" name="Rounded Rectangle 33"/>
-          <p:cNvSpPr/>
-          <p:nvPr/>
-        </p:nvSpPr>
-        <p:spPr>
-          <a:xfrm>
-            <a:off x="4517136" y="3995928"/>
-            <a:ext cx="438912" cy="438912"/>
-          </a:xfrm>
-          <a:prstGeom prst="roundRect">
-            <a:avLst/>
-          </a:prstGeom>
-          <a:solidFill>
-            <a:srgbClr val="1F6FEB"/>
-          </a:solidFill>
-          <a:ln>
-            <a:solidFill>
-              <a:srgbClr val="1F6FEB"/>
-            </a:solidFill>
-          </a:ln>
-        </p:spPr>
-        <p:style>
-          <a:lnRef idx="1">
-            <a:schemeClr val="accent1"/>
-          </a:lnRef>
-          <a:fillRef idx="3">
-            <a:schemeClr val="accent1"/>
-          </a:fillRef>
-          <a:effectRef idx="2">
-            <a:schemeClr val="accent1"/>
-          </a:effectRef>
-          <a:fontRef idx="minor">
-            <a:schemeClr val="lt1"/>
-          </a:fontRef>
-        </p:style>
-        <p:txBody>
-          <a:bodyPr rtlCol="0" anchor="ctr"/>
-          <a:lstStyle/>
-          <a:p>
-            <a:pPr algn="ctr"/>
-          </a:p>
-        </p:txBody>
-      </p:sp>
-      <p:sp>
-        <p:nvSpPr>
-          <p:cNvPr id="35" name="TextBox 34"/>
-          <p:cNvSpPr txBox="1"/>
-          <p:nvPr/>
-        </p:nvSpPr>
-        <p:spPr>
-          <a:xfrm>
-            <a:off x="4517136" y="4005072"/>
-            <a:ext cx="438912" cy="420624"/>
-          </a:xfrm>
-          <a:prstGeom prst="rect">
-            <a:avLst/>
-          </a:prstGeom>
-          <a:noFill/>
-        </p:spPr>
-        <p:txBody>
-          <a:bodyPr wrap="square" anchor="ctr">
-            <a:spAutoFit/>
-          </a:bodyPr>
-          <a:lstStyle/>
-          <a:p>
-            <a:pPr algn="ctr"/>
-            <a:r>
-              <a:rPr sz="1400" b="1">
-                <a:solidFill>
-                  <a:srgbClr val="FFFFFF"/>
-                </a:solidFill>
-                <a:latin typeface="Arial"/>
-              </a:rPr>
-              <a:t>5</a:t>
-            </a:r>
-          </a:p>
-        </p:txBody>
-      </p:sp>
-      <p:sp>
-        <p:nvSpPr>
-          <p:cNvPr id="36" name="TextBox 35"/>
-          <p:cNvSpPr txBox="1"/>
-          <p:nvPr/>
-        </p:nvSpPr>
-        <p:spPr>
-          <a:xfrm>
-            <a:off x="5120640" y="3959352"/>
-            <a:ext cx="2414016" cy="329184"/>
-          </a:xfrm>
-          <a:prstGeom prst="rect">
-            <a:avLst/>
-          </a:prstGeom>
-          <a:noFill/>
-        </p:spPr>
-        <p:txBody>
-          <a:bodyPr wrap="square" anchor="t">
-            <a:spAutoFit/>
-          </a:bodyPr>
-          <a:lstStyle/>
-          <a:p>
-            <a:pPr algn="l"/>
-            <a:r>
-              <a:rPr sz="1400" b="1">
-                <a:solidFill>
-                  <a:srgbClr val="1F6FEB"/>
-                </a:solidFill>
-                <a:latin typeface="Arial"/>
-              </a:rPr>
-              <a:t>Access</a:t>
-            </a:r>
-          </a:p>
-        </p:txBody>
-      </p:sp>
-      <p:sp>
-        <p:nvSpPr>
-          <p:cNvPr id="37" name="TextBox 36"/>
-          <p:cNvSpPr txBox="1"/>
-          <p:nvPr/>
-        </p:nvSpPr>
-        <p:spPr>
-          <a:xfrm>
-            <a:off x="5120640" y="4343400"/>
-            <a:ext cx="2414016" cy="1005839"/>
-          </a:xfrm>
-          <a:prstGeom prst="rect">
-            <a:avLst/>
-          </a:prstGeom>
-          <a:noFill/>
-        </p:spPr>
-        <p:txBody>
-          <a:bodyPr wrap="square" anchor="t">
-            <a:spAutoFit/>
-          </a:bodyPr>
-          <a:lstStyle/>
-          <a:p>
-            <a:pPr algn="l"/>
-            <a:r>
-              <a:rPr sz="1150" b="0">
-                <a:solidFill>
-                  <a:srgbClr val="161B26"/>
-                </a:solidFill>
-                <a:latin typeface="Arial"/>
-              </a:rPr>
-              <a:t>Are contrast, labels and alt text adequate?</a:t>
-            </a:r>
-          </a:p>
-        </p:txBody>
-      </p:sp>
-      <p:sp>
-        <p:nvSpPr>
-          <p:cNvPr id="38" name="Rounded Rectangle 37"/>
-          <p:cNvSpPr/>
-          <p:nvPr/>
-        </p:nvSpPr>
-        <p:spPr>
-          <a:xfrm>
-            <a:off x="7900416" y="3776472"/>
-            <a:ext cx="3401568" cy="1719072"/>
-          </a:xfrm>
-          <a:prstGeom prst="roundRect">
-            <a:avLst/>
-          </a:prstGeom>
-          <a:solidFill>
-            <a:srgbClr val="F5F8FC"/>
-          </a:solidFill>
-          <a:ln>
-            <a:solidFill>
-              <a:srgbClr val="E2E8F0"/>
-            </a:solidFill>
-          </a:ln>
-        </p:spPr>
-        <p:style>
-          <a:lnRef idx="1">
-            <a:schemeClr val="accent1"/>
-          </a:lnRef>
-          <a:fillRef idx="3">
-            <a:schemeClr val="accent1"/>
-          </a:fillRef>
-          <a:effectRef idx="2">
-            <a:schemeClr val="accent1"/>
-          </a:effectRef>
-          <a:fontRef idx="minor">
-            <a:schemeClr val="lt1"/>
-          </a:fontRef>
-        </p:style>
-        <p:txBody>
-          <a:bodyPr rtlCol="0" anchor="ctr"/>
-          <a:lstStyle/>
-          <a:p>
-            <a:pPr algn="ctr"/>
-          </a:p>
-        </p:txBody>
-      </p:sp>
-      <p:sp>
-        <p:nvSpPr>
-          <p:cNvPr id="39" name="Rectangle 38"/>
-          <p:cNvSpPr/>
-          <p:nvPr/>
-        </p:nvSpPr>
-        <p:spPr>
-          <a:xfrm>
-            <a:off x="7900416" y="3776472"/>
-            <a:ext cx="73152" cy="1719072"/>
-          </a:xfrm>
-          <a:prstGeom prst="rect">
-            <a:avLst/>
-          </a:prstGeom>
-          <a:solidFill>
-            <a:srgbClr val="10B981"/>
-          </a:solidFill>
-          <a:ln>
-            <a:solidFill>
-              <a:srgbClr val="10B981"/>
-            </a:solidFill>
-          </a:ln>
-        </p:spPr>
-        <p:style>
-          <a:lnRef idx="1">
-            <a:schemeClr val="accent1"/>
-          </a:lnRef>
-          <a:fillRef idx="3">
-            <a:schemeClr val="accent1"/>
-          </a:fillRef>
-          <a:effectRef idx="2">
-            <a:schemeClr val="accent1"/>
-          </a:effectRef>
-          <a:fontRef idx="minor">
-            <a:schemeClr val="lt1"/>
-          </a:fontRef>
-        </p:style>
-        <p:txBody>
-          <a:bodyPr rtlCol="0" anchor="ctr"/>
-          <a:lstStyle/>
-          <a:p>
-            <a:pPr algn="ctr"/>
-          </a:p>
-        </p:txBody>
-      </p:sp>
-      <p:sp>
-        <p:nvSpPr>
-          <p:cNvPr id="40" name="Rounded Rectangle 39"/>
-          <p:cNvSpPr/>
-          <p:nvPr/>
-        </p:nvSpPr>
-        <p:spPr>
-          <a:xfrm>
-            <a:off x="8101584" y="3995928"/>
-            <a:ext cx="438912" cy="438912"/>
-          </a:xfrm>
-          <a:prstGeom prst="roundRect">
-            <a:avLst/>
-          </a:prstGeom>
-          <a:solidFill>
-            <a:srgbClr val="10B981"/>
-          </a:solidFill>
-          <a:ln>
-            <a:solidFill>
-              <a:srgbClr val="10B981"/>
-            </a:solidFill>
-          </a:ln>
-        </p:spPr>
-        <p:style>
-          <a:lnRef idx="1">
-            <a:schemeClr val="accent1"/>
-          </a:lnRef>
-          <a:fillRef idx="3">
-            <a:schemeClr val="accent1"/>
-          </a:fillRef>
-          <a:effectRef idx="2">
-            <a:schemeClr val="accent1"/>
-          </a:effectRef>
-          <a:fontRef idx="minor">
-            <a:schemeClr val="lt1"/>
-          </a:fontRef>
-        </p:style>
-        <p:txBody>
-          <a:bodyPr rtlCol="0" anchor="ctr"/>
-          <a:lstStyle/>
-          <a:p>
-            <a:pPr algn="ctr"/>
-          </a:p>
-        </p:txBody>
-      </p:sp>
-      <p:sp>
-        <p:nvSpPr>
-          <p:cNvPr id="41" name="TextBox 40"/>
-          <p:cNvSpPr txBox="1"/>
-          <p:nvPr/>
-        </p:nvSpPr>
-        <p:spPr>
-          <a:xfrm>
-            <a:off x="8101584" y="4005072"/>
-            <a:ext cx="438912" cy="420624"/>
-          </a:xfrm>
-          <a:prstGeom prst="rect">
-            <a:avLst/>
-          </a:prstGeom>
-          <a:noFill/>
-        </p:spPr>
-        <p:txBody>
-          <a:bodyPr wrap="square" anchor="ctr">
-            <a:spAutoFit/>
-          </a:bodyPr>
-          <a:lstStyle/>
-          <a:p>
-            <a:pPr algn="ctr"/>
-            <a:r>
-              <a:rPr sz="1400" b="1">
-                <a:solidFill>
-                  <a:srgbClr val="FFFFFF"/>
-                </a:solidFill>
-                <a:latin typeface="Arial"/>
-              </a:rPr>
-              <a:t>6</a:t>
-            </a:r>
-          </a:p>
-        </p:txBody>
-      </p:sp>
-      <p:sp>
-        <p:nvSpPr>
-          <p:cNvPr id="42" name="TextBox 41"/>
-          <p:cNvSpPr txBox="1"/>
-          <p:nvPr/>
-        </p:nvSpPr>
-        <p:spPr>
-          <a:xfrm>
-            <a:off x="8705088" y="3959352"/>
-            <a:ext cx="2414016" cy="329184"/>
-          </a:xfrm>
-          <a:prstGeom prst="rect">
-            <a:avLst/>
-          </a:prstGeom>
-          <a:noFill/>
-        </p:spPr>
-        <p:txBody>
-          <a:bodyPr wrap="square" anchor="t">
-            <a:spAutoFit/>
-          </a:bodyPr>
-          <a:lstStyle/>
-          <a:p>
-            <a:pPr algn="l"/>
-            <a:r>
-              <a:rPr sz="1400" b="1">
-                <a:solidFill>
-                  <a:srgbClr val="10B981"/>
-                </a:solidFill>
-                <a:latin typeface="Arial"/>
-              </a:rPr>
-              <a:t>Output</a:t>
-            </a:r>
-          </a:p>
-        </p:txBody>
-      </p:sp>
-      <p:sp>
-        <p:nvSpPr>
-          <p:cNvPr id="43" name="TextBox 42"/>
-          <p:cNvSpPr txBox="1"/>
-          <p:nvPr/>
-        </p:nvSpPr>
-        <p:spPr>
-          <a:xfrm>
-            <a:off x="8705088" y="4343400"/>
-            <a:ext cx="2414016" cy="1005839"/>
-          </a:xfrm>
-          <a:prstGeom prst="rect">
-            <a:avLst/>
-          </a:prstGeom>
-          <a:noFill/>
-        </p:spPr>
-        <p:txBody>
-          <a:bodyPr wrap="square" anchor="t">
-            <a:spAutoFit/>
-          </a:bodyPr>
-          <a:lstStyle/>
-          <a:p>
-            <a:pPr algn="l"/>
-            <a:r>
-              <a:rPr sz="1150" b="0">
-                <a:solidFill>
-                  <a:srgbClr val="161B26"/>
-                </a:solidFill>
-                <a:latin typeface="Arial"/>
-              </a:rPr>
-              <a:t>Do PPTX, PDF and JPG render as intended?</a:t>
+              <a:t>Test PPTX, PDF and image output.</a:t>
             </a:r>
           </a:p>
         </p:txBody>
@@ -7419,6 +6940,246 @@
             <a:avLst/>
           </a:prstGeom>
           <a:solidFill>
+            <a:srgbClr val="7C3AED"/>
+          </a:solidFill>
+          <a:ln>
+            <a:solidFill>
+              <a:srgbClr val="7C3AED"/>
+            </a:solidFill>
+          </a:ln>
+        </p:spPr>
+        <p:style>
+          <a:lnRef idx="1">
+            <a:schemeClr val="accent1"/>
+          </a:lnRef>
+          <a:fillRef idx="3">
+            <a:schemeClr val="accent1"/>
+          </a:fillRef>
+          <a:effectRef idx="2">
+            <a:schemeClr val="accent1"/>
+          </a:effectRef>
+          <a:fontRef idx="minor">
+            <a:schemeClr val="lt1"/>
+          </a:fontRef>
+        </p:style>
+        <p:txBody>
+          <a:bodyPr rtlCol="0" anchor="ctr"/>
+          <a:lstStyle/>
+          <a:p>
+            <a:pPr algn="ctr"/>
+          </a:p>
+        </p:txBody>
+      </p:sp>
+      <p:sp>
+        <p:nvSpPr>
+          <p:cNvPr id="4" name="TextBox 3"/>
+          <p:cNvSpPr txBox="1"/>
+          <p:nvPr/>
+        </p:nvSpPr>
+        <p:spPr>
+          <a:xfrm>
+            <a:off x="658368" y="384048"/>
+            <a:ext cx="10789920" cy="320040"/>
+          </a:xfrm>
+          <a:prstGeom prst="rect">
+            <a:avLst/>
+          </a:prstGeom>
+          <a:noFill/>
+        </p:spPr>
+        <p:txBody>
+          <a:bodyPr wrap="square" anchor="t">
+            <a:spAutoFit/>
+          </a:bodyPr>
+          <a:lstStyle/>
+          <a:p>
+            <a:pPr algn="l"/>
+            <a:r>
+              <a:rPr sz="1100" b="1">
+                <a:solidFill>
+                  <a:srgbClr val="7C3AED"/>
+                </a:solidFill>
+                <a:latin typeface="Arial"/>
+              </a:rPr>
+              <a:t>ACTIVITY 03 · EXAMPLE</a:t>
+            </a:r>
+          </a:p>
+        </p:txBody>
+      </p:sp>
+      <p:sp>
+        <p:nvSpPr>
+          <p:cNvPr id="5" name="TextBox 4"/>
+          <p:cNvSpPr txBox="1"/>
+          <p:nvPr/>
+        </p:nvSpPr>
+        <p:spPr>
+          <a:xfrm>
+            <a:off x="658368" y="749808"/>
+            <a:ext cx="10789920" cy="658368"/>
+          </a:xfrm>
+          <a:prstGeom prst="rect">
+            <a:avLst/>
+          </a:prstGeom>
+          <a:noFill/>
+        </p:spPr>
+        <p:txBody>
+          <a:bodyPr wrap="square" anchor="t">
+            <a:spAutoFit/>
+          </a:bodyPr>
+          <a:lstStyle/>
+          <a:p>
+            <a:pPr algn="l"/>
+            <a:r>
+              <a:rPr sz="2700" b="1">
+                <a:solidFill>
+                  <a:srgbClr val="161B26"/>
+                </a:solidFill>
+                <a:latin typeface="Arial"/>
+              </a:rPr>
+              <a:t>Worked Output</a:t>
+            </a:r>
+          </a:p>
+        </p:txBody>
+      </p:sp>
+      <p:sp>
+        <p:nvSpPr>
+          <p:cNvPr id="6" name="Rectangle 5"/>
+          <p:cNvSpPr/>
+          <p:nvPr/>
+        </p:nvSpPr>
+        <p:spPr>
+          <a:xfrm>
+            <a:off x="658368" y="1444752"/>
+            <a:ext cx="10881360" cy="18288"/>
+          </a:xfrm>
+          <a:prstGeom prst="rect">
+            <a:avLst/>
+          </a:prstGeom>
+          <a:solidFill>
+            <a:srgbClr val="E2E8F0"/>
+          </a:solidFill>
+          <a:ln>
+            <a:solidFill>
+              <a:srgbClr val="E2E8F0"/>
+            </a:solidFill>
+          </a:ln>
+        </p:spPr>
+        <p:style>
+          <a:lnRef idx="1">
+            <a:schemeClr val="accent1"/>
+          </a:lnRef>
+          <a:fillRef idx="3">
+            <a:schemeClr val="accent1"/>
+          </a:fillRef>
+          <a:effectRef idx="2">
+            <a:schemeClr val="accent1"/>
+          </a:effectRef>
+          <a:fontRef idx="minor">
+            <a:schemeClr val="lt1"/>
+          </a:fontRef>
+        </p:style>
+        <p:txBody>
+          <a:bodyPr rtlCol="0" anchor="ctr"/>
+          <a:lstStyle/>
+          <a:p>
+            <a:pPr algn="ctr"/>
+          </a:p>
+        </p:txBody>
+      </p:sp>
+      <p:sp>
+        <p:nvSpPr>
+          <p:cNvPr id="7" name="TextBox 6"/>
+          <p:cNvSpPr txBox="1"/>
+          <p:nvPr/>
+        </p:nvSpPr>
+        <p:spPr>
+          <a:xfrm>
+            <a:off x="658368" y="6473952"/>
+            <a:ext cx="9875520" cy="201168"/>
+          </a:xfrm>
+          <a:prstGeom prst="rect">
+            <a:avLst/>
+          </a:prstGeom>
+          <a:noFill/>
+        </p:spPr>
+        <p:txBody>
+          <a:bodyPr wrap="square" anchor="t">
+            <a:spAutoFit/>
+          </a:bodyPr>
+          <a:lstStyle/>
+          <a:p>
+            <a:pPr algn="l"/>
+            <a:r>
+              <a:rPr sz="800" b="0">
+                <a:solidFill>
+                  <a:srgbClr val="5B6372"/>
+                </a:solidFill>
+                <a:latin typeface="Arial"/>
+              </a:rPr>
+              <a:t>TGS-2026064178 · ACTIVITY PRACTICE · Tertiary Infotech Academy Pte Ltd</a:t>
+            </a:r>
+          </a:p>
+        </p:txBody>
+      </p:sp>
+      <p:sp>
+        <p:nvSpPr>
+          <p:cNvPr id="8" name="Rounded Rectangle 7"/>
+          <p:cNvSpPr/>
+          <p:nvPr/>
+        </p:nvSpPr>
+        <p:spPr>
+          <a:xfrm>
+            <a:off x="731520" y="1783080"/>
+            <a:ext cx="3401568" cy="1719072"/>
+          </a:xfrm>
+          <a:prstGeom prst="roundRect">
+            <a:avLst/>
+          </a:prstGeom>
+          <a:solidFill>
+            <a:srgbClr val="F5F8FC"/>
+          </a:solidFill>
+          <a:ln>
+            <a:solidFill>
+              <a:srgbClr val="E2E8F0"/>
+            </a:solidFill>
+          </a:ln>
+        </p:spPr>
+        <p:style>
+          <a:lnRef idx="1">
+            <a:schemeClr val="accent1"/>
+          </a:lnRef>
+          <a:fillRef idx="3">
+            <a:schemeClr val="accent1"/>
+          </a:fillRef>
+          <a:effectRef idx="2">
+            <a:schemeClr val="accent1"/>
+          </a:effectRef>
+          <a:fontRef idx="minor">
+            <a:schemeClr val="lt1"/>
+          </a:fontRef>
+        </p:style>
+        <p:txBody>
+          <a:bodyPr rtlCol="0" anchor="ctr"/>
+          <a:lstStyle/>
+          <a:p>
+            <a:pPr algn="ctr"/>
+          </a:p>
+        </p:txBody>
+      </p:sp>
+      <p:sp>
+        <p:nvSpPr>
+          <p:cNvPr id="9" name="Rectangle 8"/>
+          <p:cNvSpPr/>
+          <p:nvPr/>
+        </p:nvSpPr>
+        <p:spPr>
+          <a:xfrm>
+            <a:off x="731520" y="1783080"/>
+            <a:ext cx="73152" cy="1719072"/>
+          </a:xfrm>
+          <a:prstGeom prst="rect">
+            <a:avLst/>
+          </a:prstGeom>
+          <a:solidFill>
             <a:srgbClr val="1F6FEB"/>
           </a:solidFill>
           <a:ln>
@@ -7451,14 +7212,94 @@
       </p:sp>
       <p:sp>
         <p:nvSpPr>
-          <p:cNvPr id="4" name="TextBox 3"/>
+          <p:cNvPr id="10" name="Rounded Rectangle 9"/>
+          <p:cNvSpPr/>
+          <p:nvPr/>
+        </p:nvSpPr>
+        <p:spPr>
+          <a:xfrm>
+            <a:off x="932688" y="2002536"/>
+            <a:ext cx="438912" cy="438912"/>
+          </a:xfrm>
+          <a:prstGeom prst="roundRect">
+            <a:avLst/>
+          </a:prstGeom>
+          <a:solidFill>
+            <a:srgbClr val="1F6FEB"/>
+          </a:solidFill>
+          <a:ln>
+            <a:solidFill>
+              <a:srgbClr val="1F6FEB"/>
+            </a:solidFill>
+          </a:ln>
+        </p:spPr>
+        <p:style>
+          <a:lnRef idx="1">
+            <a:schemeClr val="accent1"/>
+          </a:lnRef>
+          <a:fillRef idx="3">
+            <a:schemeClr val="accent1"/>
+          </a:fillRef>
+          <a:effectRef idx="2">
+            <a:schemeClr val="accent1"/>
+          </a:effectRef>
+          <a:fontRef idx="minor">
+            <a:schemeClr val="lt1"/>
+          </a:fontRef>
+        </p:style>
+        <p:txBody>
+          <a:bodyPr rtlCol="0" anchor="ctr"/>
+          <a:lstStyle/>
+          <a:p>
+            <a:pPr algn="ctr"/>
+          </a:p>
+        </p:txBody>
+      </p:sp>
+      <p:sp>
+        <p:nvSpPr>
+          <p:cNvPr id="11" name="TextBox 10"/>
           <p:cNvSpPr txBox="1"/>
           <p:nvPr/>
         </p:nvSpPr>
         <p:spPr>
           <a:xfrm>
-            <a:off x="658368" y="384048"/>
-            <a:ext cx="10789920" cy="320040"/>
+            <a:off x="932688" y="2011680"/>
+            <a:ext cx="438912" cy="420624"/>
+          </a:xfrm>
+          <a:prstGeom prst="rect">
+            <a:avLst/>
+          </a:prstGeom>
+          <a:noFill/>
+        </p:spPr>
+        <p:txBody>
+          <a:bodyPr wrap="square" anchor="ctr">
+            <a:spAutoFit/>
+          </a:bodyPr>
+          <a:lstStyle/>
+          <a:p>
+            <a:pPr algn="ctr"/>
+            <a:r>
+              <a:rPr sz="1400" b="1">
+                <a:solidFill>
+                  <a:srgbClr val="FFFFFF"/>
+                </a:solidFill>
+                <a:latin typeface="Arial"/>
+              </a:rPr>
+              <a:t>1</a:t>
+            </a:r>
+          </a:p>
+        </p:txBody>
+      </p:sp>
+      <p:sp>
+        <p:nvSpPr>
+          <p:cNvPr id="12" name="TextBox 11"/>
+          <p:cNvSpPr txBox="1"/>
+          <p:nvPr/>
+        </p:nvSpPr>
+        <p:spPr>
+          <a:xfrm>
+            <a:off x="1536192" y="1965960"/>
+            <a:ext cx="2414016" cy="329184"/>
           </a:xfrm>
           <a:prstGeom prst="rect">
             <a:avLst/>
@@ -7473,27 +7314,27 @@
           <a:p>
             <a:pPr algn="l"/>
             <a:r>
-              <a:rPr sz="1100" b="1">
+              <a:rPr sz="1400" b="1">
                 <a:solidFill>
                   <a:srgbClr val="1F6FEB"/>
                 </a:solidFill>
                 <a:latin typeface="Arial"/>
               </a:rPr>
-              <a:t>ACTIVITY 03 · ACCEPTANCE</a:t>
-            </a:r>
-          </a:p>
-        </p:txBody>
-      </p:sp>
-      <p:sp>
-        <p:nvSpPr>
-          <p:cNvPr id="5" name="TextBox 4"/>
+              <a:t>Purpose</a:t>
+            </a:r>
+          </a:p>
+        </p:txBody>
+      </p:sp>
+      <p:sp>
+        <p:nvSpPr>
+          <p:cNvPr id="13" name="TextBox 12"/>
           <p:cNvSpPr txBox="1"/>
           <p:nvPr/>
         </p:nvSpPr>
         <p:spPr>
           <a:xfrm>
-            <a:off x="658368" y="749808"/>
-            <a:ext cx="10789920" cy="658368"/>
+            <a:off x="1536192" y="2350008"/>
+            <a:ext cx="2414016" cy="1005839"/>
           </a:xfrm>
           <a:prstGeom prst="rect">
             <a:avLst/>
@@ -7508,33 +7349,33 @@
           <a:p>
             <a:pPr algn="l"/>
             <a:r>
-              <a:rPr sz="2700" b="1">
+              <a:rPr sz="1150" b="0">
                 <a:solidFill>
                   <a:srgbClr val="161B26"/>
                 </a:solidFill>
                 <a:latin typeface="Arial"/>
               </a:rPr>
-              <a:t>What Good Looks Like</a:t>
-            </a:r>
-          </a:p>
-        </p:txBody>
-      </p:sp>
-      <p:sp>
-        <p:nvSpPr>
-          <p:cNvPr id="6" name="Rectangle 5"/>
+              <a:t>Does the layout answer the audience question?</a:t>
+            </a:r>
+          </a:p>
+        </p:txBody>
+      </p:sp>
+      <p:sp>
+        <p:nvSpPr>
+          <p:cNvPr id="14" name="Rounded Rectangle 13"/>
           <p:cNvSpPr/>
           <p:nvPr/>
         </p:nvSpPr>
         <p:spPr>
           <a:xfrm>
-            <a:off x="658368" y="1444752"/>
-            <a:ext cx="10881360" cy="18288"/>
-          </a:xfrm>
-          <a:prstGeom prst="rect">
-            <a:avLst/>
-          </a:prstGeom>
-          <a:solidFill>
-            <a:srgbClr val="E2E8F0"/>
+            <a:off x="4315968" y="1783080"/>
+            <a:ext cx="3401568" cy="1719072"/>
+          </a:xfrm>
+          <a:prstGeom prst="roundRect">
+            <a:avLst/>
+          </a:prstGeom>
+          <a:solidFill>
+            <a:srgbClr val="F5F8FC"/>
           </a:solidFill>
           <a:ln>
             <a:solidFill>
@@ -7566,14 +7407,139 @@
       </p:sp>
       <p:sp>
         <p:nvSpPr>
-          <p:cNvPr id="7" name="TextBox 6"/>
+          <p:cNvPr id="15" name="Rectangle 14"/>
+          <p:cNvSpPr/>
+          <p:nvPr/>
+        </p:nvSpPr>
+        <p:spPr>
+          <a:xfrm>
+            <a:off x="4315968" y="1783080"/>
+            <a:ext cx="73152" cy="1719072"/>
+          </a:xfrm>
+          <a:prstGeom prst="rect">
+            <a:avLst/>
+          </a:prstGeom>
+          <a:solidFill>
+            <a:srgbClr val="10B981"/>
+          </a:solidFill>
+          <a:ln>
+            <a:solidFill>
+              <a:srgbClr val="10B981"/>
+            </a:solidFill>
+          </a:ln>
+        </p:spPr>
+        <p:style>
+          <a:lnRef idx="1">
+            <a:schemeClr val="accent1"/>
+          </a:lnRef>
+          <a:fillRef idx="3">
+            <a:schemeClr val="accent1"/>
+          </a:fillRef>
+          <a:effectRef idx="2">
+            <a:schemeClr val="accent1"/>
+          </a:effectRef>
+          <a:fontRef idx="minor">
+            <a:schemeClr val="lt1"/>
+          </a:fontRef>
+        </p:style>
+        <p:txBody>
+          <a:bodyPr rtlCol="0" anchor="ctr"/>
+          <a:lstStyle/>
+          <a:p>
+            <a:pPr algn="ctr"/>
+          </a:p>
+        </p:txBody>
+      </p:sp>
+      <p:sp>
+        <p:nvSpPr>
+          <p:cNvPr id="16" name="Rounded Rectangle 15"/>
+          <p:cNvSpPr/>
+          <p:nvPr/>
+        </p:nvSpPr>
+        <p:spPr>
+          <a:xfrm>
+            <a:off x="4517136" y="2002536"/>
+            <a:ext cx="438912" cy="438912"/>
+          </a:xfrm>
+          <a:prstGeom prst="roundRect">
+            <a:avLst/>
+          </a:prstGeom>
+          <a:solidFill>
+            <a:srgbClr val="10B981"/>
+          </a:solidFill>
+          <a:ln>
+            <a:solidFill>
+              <a:srgbClr val="10B981"/>
+            </a:solidFill>
+          </a:ln>
+        </p:spPr>
+        <p:style>
+          <a:lnRef idx="1">
+            <a:schemeClr val="accent1"/>
+          </a:lnRef>
+          <a:fillRef idx="3">
+            <a:schemeClr val="accent1"/>
+          </a:fillRef>
+          <a:effectRef idx="2">
+            <a:schemeClr val="accent1"/>
+          </a:effectRef>
+          <a:fontRef idx="minor">
+            <a:schemeClr val="lt1"/>
+          </a:fontRef>
+        </p:style>
+        <p:txBody>
+          <a:bodyPr rtlCol="0" anchor="ctr"/>
+          <a:lstStyle/>
+          <a:p>
+            <a:pPr algn="ctr"/>
+          </a:p>
+        </p:txBody>
+      </p:sp>
+      <p:sp>
+        <p:nvSpPr>
+          <p:cNvPr id="17" name="TextBox 16"/>
           <p:cNvSpPr txBox="1"/>
           <p:nvPr/>
         </p:nvSpPr>
         <p:spPr>
           <a:xfrm>
-            <a:off x="658368" y="6473952"/>
-            <a:ext cx="9875520" cy="201168"/>
+            <a:off x="4517136" y="2011680"/>
+            <a:ext cx="438912" cy="420624"/>
+          </a:xfrm>
+          <a:prstGeom prst="rect">
+            <a:avLst/>
+          </a:prstGeom>
+          <a:noFill/>
+        </p:spPr>
+        <p:txBody>
+          <a:bodyPr wrap="square" anchor="ctr">
+            <a:spAutoFit/>
+          </a:bodyPr>
+          <a:lstStyle/>
+          <a:p>
+            <a:pPr algn="ctr"/>
+            <a:r>
+              <a:rPr sz="1400" b="1">
+                <a:solidFill>
+                  <a:srgbClr val="FFFFFF"/>
+                </a:solidFill>
+                <a:latin typeface="Arial"/>
+              </a:rPr>
+              <a:t>2</a:t>
+            </a:r>
+          </a:p>
+        </p:txBody>
+      </p:sp>
+      <p:sp>
+        <p:nvSpPr>
+          <p:cNvPr id="18" name="TextBox 17"/>
+          <p:cNvSpPr txBox="1"/>
+          <p:nvPr/>
+        </p:nvSpPr>
+        <p:spPr>
+          <a:xfrm>
+            <a:off x="5120640" y="1965960"/>
+            <a:ext cx="2414016" cy="329184"/>
           </a:xfrm>
           <a:prstGeom prst="rect">
             <a:avLst/>
@@ -7588,13 +7554,1266 @@
           <a:p>
             <a:pPr algn="l"/>
             <a:r>
-              <a:rPr sz="800" b="0">
-                <a:solidFill>
-                  <a:srgbClr val="5B6372"/>
+              <a:rPr sz="1400" b="1">
+                <a:solidFill>
+                  <a:srgbClr val="10B981"/>
                 </a:solidFill>
                 <a:latin typeface="Arial"/>
               </a:rPr>
-              <a:t>TGS-2024048310 · ACTIVITY PRACTICE · Tertiary Infotech Academy Pte Ltd</a:t>
+              <a:t>Content</a:t>
+            </a:r>
+          </a:p>
+        </p:txBody>
+      </p:sp>
+      <p:sp>
+        <p:nvSpPr>
+          <p:cNvPr id="19" name="TextBox 18"/>
+          <p:cNvSpPr txBox="1"/>
+          <p:nvPr/>
+        </p:nvSpPr>
+        <p:spPr>
+          <a:xfrm>
+            <a:off x="5120640" y="2350008"/>
+            <a:ext cx="2414016" cy="1005839"/>
+          </a:xfrm>
+          <a:prstGeom prst="rect">
+            <a:avLst/>
+          </a:prstGeom>
+          <a:noFill/>
+        </p:spPr>
+        <p:txBody>
+          <a:bodyPr wrap="square" anchor="t">
+            <a:spAutoFit/>
+          </a:bodyPr>
+          <a:lstStyle/>
+          <a:p>
+            <a:pPr algn="l"/>
+            <a:r>
+              <a:rPr sz="1150" b="0">
+                <a:solidFill>
+                  <a:srgbClr val="161B26"/>
+                </a:solidFill>
+                <a:latin typeface="Arial"/>
+              </a:rPr>
+              <a:t>Are all placeholders replaced and all claims verified?</a:t>
+            </a:r>
+          </a:p>
+        </p:txBody>
+      </p:sp>
+      <p:sp>
+        <p:nvSpPr>
+          <p:cNvPr id="20" name="Rounded Rectangle 19"/>
+          <p:cNvSpPr/>
+          <p:nvPr/>
+        </p:nvSpPr>
+        <p:spPr>
+          <a:xfrm>
+            <a:off x="7900416" y="1783080"/>
+            <a:ext cx="3401568" cy="1719072"/>
+          </a:xfrm>
+          <a:prstGeom prst="roundRect">
+            <a:avLst/>
+          </a:prstGeom>
+          <a:solidFill>
+            <a:srgbClr val="F5F8FC"/>
+          </a:solidFill>
+          <a:ln>
+            <a:solidFill>
+              <a:srgbClr val="E2E8F0"/>
+            </a:solidFill>
+          </a:ln>
+        </p:spPr>
+        <p:style>
+          <a:lnRef idx="1">
+            <a:schemeClr val="accent1"/>
+          </a:lnRef>
+          <a:fillRef idx="3">
+            <a:schemeClr val="accent1"/>
+          </a:fillRef>
+          <a:effectRef idx="2">
+            <a:schemeClr val="accent1"/>
+          </a:effectRef>
+          <a:fontRef idx="minor">
+            <a:schemeClr val="lt1"/>
+          </a:fontRef>
+        </p:style>
+        <p:txBody>
+          <a:bodyPr rtlCol="0" anchor="ctr"/>
+          <a:lstStyle/>
+          <a:p>
+            <a:pPr algn="ctr"/>
+          </a:p>
+        </p:txBody>
+      </p:sp>
+      <p:sp>
+        <p:nvSpPr>
+          <p:cNvPr id="21" name="Rectangle 20"/>
+          <p:cNvSpPr/>
+          <p:nvPr/>
+        </p:nvSpPr>
+        <p:spPr>
+          <a:xfrm>
+            <a:off x="7900416" y="1783080"/>
+            <a:ext cx="73152" cy="1719072"/>
+          </a:xfrm>
+          <a:prstGeom prst="rect">
+            <a:avLst/>
+          </a:prstGeom>
+          <a:solidFill>
+            <a:srgbClr val="7C3AED"/>
+          </a:solidFill>
+          <a:ln>
+            <a:solidFill>
+              <a:srgbClr val="7C3AED"/>
+            </a:solidFill>
+          </a:ln>
+        </p:spPr>
+        <p:style>
+          <a:lnRef idx="1">
+            <a:schemeClr val="accent1"/>
+          </a:lnRef>
+          <a:fillRef idx="3">
+            <a:schemeClr val="accent1"/>
+          </a:fillRef>
+          <a:effectRef idx="2">
+            <a:schemeClr val="accent1"/>
+          </a:effectRef>
+          <a:fontRef idx="minor">
+            <a:schemeClr val="lt1"/>
+          </a:fontRef>
+        </p:style>
+        <p:txBody>
+          <a:bodyPr rtlCol="0" anchor="ctr"/>
+          <a:lstStyle/>
+          <a:p>
+            <a:pPr algn="ctr"/>
+          </a:p>
+        </p:txBody>
+      </p:sp>
+      <p:sp>
+        <p:nvSpPr>
+          <p:cNvPr id="22" name="Rounded Rectangle 21"/>
+          <p:cNvSpPr/>
+          <p:nvPr/>
+        </p:nvSpPr>
+        <p:spPr>
+          <a:xfrm>
+            <a:off x="8101584" y="2002536"/>
+            <a:ext cx="438912" cy="438912"/>
+          </a:xfrm>
+          <a:prstGeom prst="roundRect">
+            <a:avLst/>
+          </a:prstGeom>
+          <a:solidFill>
+            <a:srgbClr val="7C3AED"/>
+          </a:solidFill>
+          <a:ln>
+            <a:solidFill>
+              <a:srgbClr val="7C3AED"/>
+            </a:solidFill>
+          </a:ln>
+        </p:spPr>
+        <p:style>
+          <a:lnRef idx="1">
+            <a:schemeClr val="accent1"/>
+          </a:lnRef>
+          <a:fillRef idx="3">
+            <a:schemeClr val="accent1"/>
+          </a:fillRef>
+          <a:effectRef idx="2">
+            <a:schemeClr val="accent1"/>
+          </a:effectRef>
+          <a:fontRef idx="minor">
+            <a:schemeClr val="lt1"/>
+          </a:fontRef>
+        </p:style>
+        <p:txBody>
+          <a:bodyPr rtlCol="0" anchor="ctr"/>
+          <a:lstStyle/>
+          <a:p>
+            <a:pPr algn="ctr"/>
+          </a:p>
+        </p:txBody>
+      </p:sp>
+      <p:sp>
+        <p:nvSpPr>
+          <p:cNvPr id="23" name="TextBox 22"/>
+          <p:cNvSpPr txBox="1"/>
+          <p:nvPr/>
+        </p:nvSpPr>
+        <p:spPr>
+          <a:xfrm>
+            <a:off x="8101584" y="2011680"/>
+            <a:ext cx="438912" cy="420624"/>
+          </a:xfrm>
+          <a:prstGeom prst="rect">
+            <a:avLst/>
+          </a:prstGeom>
+          <a:noFill/>
+        </p:spPr>
+        <p:txBody>
+          <a:bodyPr wrap="square" anchor="ctr">
+            <a:spAutoFit/>
+          </a:bodyPr>
+          <a:lstStyle/>
+          <a:p>
+            <a:pPr algn="ctr"/>
+            <a:r>
+              <a:rPr sz="1400" b="1">
+                <a:solidFill>
+                  <a:srgbClr val="FFFFFF"/>
+                </a:solidFill>
+                <a:latin typeface="Arial"/>
+              </a:rPr>
+              <a:t>3</a:t>
+            </a:r>
+          </a:p>
+        </p:txBody>
+      </p:sp>
+      <p:sp>
+        <p:nvSpPr>
+          <p:cNvPr id="24" name="TextBox 23"/>
+          <p:cNvSpPr txBox="1"/>
+          <p:nvPr/>
+        </p:nvSpPr>
+        <p:spPr>
+          <a:xfrm>
+            <a:off x="8705088" y="1965960"/>
+            <a:ext cx="2414016" cy="329184"/>
+          </a:xfrm>
+          <a:prstGeom prst="rect">
+            <a:avLst/>
+          </a:prstGeom>
+          <a:noFill/>
+        </p:spPr>
+        <p:txBody>
+          <a:bodyPr wrap="square" anchor="t">
+            <a:spAutoFit/>
+          </a:bodyPr>
+          <a:lstStyle/>
+          <a:p>
+            <a:pPr algn="l"/>
+            <a:r>
+              <a:rPr sz="1400" b="1">
+                <a:solidFill>
+                  <a:srgbClr val="7C3AED"/>
+                </a:solidFill>
+                <a:latin typeface="Arial"/>
+              </a:rPr>
+              <a:t>Hierarchy</a:t>
+            </a:r>
+          </a:p>
+        </p:txBody>
+      </p:sp>
+      <p:sp>
+        <p:nvSpPr>
+          <p:cNvPr id="25" name="TextBox 24"/>
+          <p:cNvSpPr txBox="1"/>
+          <p:nvPr/>
+        </p:nvSpPr>
+        <p:spPr>
+          <a:xfrm>
+            <a:off x="8705088" y="2350008"/>
+            <a:ext cx="2414016" cy="1005839"/>
+          </a:xfrm>
+          <a:prstGeom prst="rect">
+            <a:avLst/>
+          </a:prstGeom>
+          <a:noFill/>
+        </p:spPr>
+        <p:txBody>
+          <a:bodyPr wrap="square" anchor="t">
+            <a:spAutoFit/>
+          </a:bodyPr>
+          <a:lstStyle/>
+          <a:p>
+            <a:pPr algn="l"/>
+            <a:r>
+              <a:rPr sz="1150" b="0">
+                <a:solidFill>
+                  <a:srgbClr val="161B26"/>
+                </a:solidFill>
+                <a:latin typeface="Arial"/>
+              </a:rPr>
+              <a:t>Is the reading order obvious at thumbnail size?</a:t>
+            </a:r>
+          </a:p>
+        </p:txBody>
+      </p:sp>
+      <p:sp>
+        <p:nvSpPr>
+          <p:cNvPr id="26" name="Rounded Rectangle 25"/>
+          <p:cNvSpPr/>
+          <p:nvPr/>
+        </p:nvSpPr>
+        <p:spPr>
+          <a:xfrm>
+            <a:off x="731520" y="3776472"/>
+            <a:ext cx="3401568" cy="1719072"/>
+          </a:xfrm>
+          <a:prstGeom prst="roundRect">
+            <a:avLst/>
+          </a:prstGeom>
+          <a:solidFill>
+            <a:srgbClr val="F5F8FC"/>
+          </a:solidFill>
+          <a:ln>
+            <a:solidFill>
+              <a:srgbClr val="E2E8F0"/>
+            </a:solidFill>
+          </a:ln>
+        </p:spPr>
+        <p:style>
+          <a:lnRef idx="1">
+            <a:schemeClr val="accent1"/>
+          </a:lnRef>
+          <a:fillRef idx="3">
+            <a:schemeClr val="accent1"/>
+          </a:fillRef>
+          <a:effectRef idx="2">
+            <a:schemeClr val="accent1"/>
+          </a:effectRef>
+          <a:fontRef idx="minor">
+            <a:schemeClr val="lt1"/>
+          </a:fontRef>
+        </p:style>
+        <p:txBody>
+          <a:bodyPr rtlCol="0" anchor="ctr"/>
+          <a:lstStyle/>
+          <a:p>
+            <a:pPr algn="ctr"/>
+          </a:p>
+        </p:txBody>
+      </p:sp>
+      <p:sp>
+        <p:nvSpPr>
+          <p:cNvPr id="27" name="Rectangle 26"/>
+          <p:cNvSpPr/>
+          <p:nvPr/>
+        </p:nvSpPr>
+        <p:spPr>
+          <a:xfrm>
+            <a:off x="731520" y="3776472"/>
+            <a:ext cx="73152" cy="1719072"/>
+          </a:xfrm>
+          <a:prstGeom prst="rect">
+            <a:avLst/>
+          </a:prstGeom>
+          <a:solidFill>
+            <a:srgbClr val="F59E0B"/>
+          </a:solidFill>
+          <a:ln>
+            <a:solidFill>
+              <a:srgbClr val="F59E0B"/>
+            </a:solidFill>
+          </a:ln>
+        </p:spPr>
+        <p:style>
+          <a:lnRef idx="1">
+            <a:schemeClr val="accent1"/>
+          </a:lnRef>
+          <a:fillRef idx="3">
+            <a:schemeClr val="accent1"/>
+          </a:fillRef>
+          <a:effectRef idx="2">
+            <a:schemeClr val="accent1"/>
+          </a:effectRef>
+          <a:fontRef idx="minor">
+            <a:schemeClr val="lt1"/>
+          </a:fontRef>
+        </p:style>
+        <p:txBody>
+          <a:bodyPr rtlCol="0" anchor="ctr"/>
+          <a:lstStyle/>
+          <a:p>
+            <a:pPr algn="ctr"/>
+          </a:p>
+        </p:txBody>
+      </p:sp>
+      <p:sp>
+        <p:nvSpPr>
+          <p:cNvPr id="28" name="Rounded Rectangle 27"/>
+          <p:cNvSpPr/>
+          <p:nvPr/>
+        </p:nvSpPr>
+        <p:spPr>
+          <a:xfrm>
+            <a:off x="932688" y="3995928"/>
+            <a:ext cx="438912" cy="438912"/>
+          </a:xfrm>
+          <a:prstGeom prst="roundRect">
+            <a:avLst/>
+          </a:prstGeom>
+          <a:solidFill>
+            <a:srgbClr val="F59E0B"/>
+          </a:solidFill>
+          <a:ln>
+            <a:solidFill>
+              <a:srgbClr val="F59E0B"/>
+            </a:solidFill>
+          </a:ln>
+        </p:spPr>
+        <p:style>
+          <a:lnRef idx="1">
+            <a:schemeClr val="accent1"/>
+          </a:lnRef>
+          <a:fillRef idx="3">
+            <a:schemeClr val="accent1"/>
+          </a:fillRef>
+          <a:effectRef idx="2">
+            <a:schemeClr val="accent1"/>
+          </a:effectRef>
+          <a:fontRef idx="minor">
+            <a:schemeClr val="lt1"/>
+          </a:fontRef>
+        </p:style>
+        <p:txBody>
+          <a:bodyPr rtlCol="0" anchor="ctr"/>
+          <a:lstStyle/>
+          <a:p>
+            <a:pPr algn="ctr"/>
+          </a:p>
+        </p:txBody>
+      </p:sp>
+      <p:sp>
+        <p:nvSpPr>
+          <p:cNvPr id="29" name="TextBox 28"/>
+          <p:cNvSpPr txBox="1"/>
+          <p:nvPr/>
+        </p:nvSpPr>
+        <p:spPr>
+          <a:xfrm>
+            <a:off x="932688" y="4005072"/>
+            <a:ext cx="438912" cy="420624"/>
+          </a:xfrm>
+          <a:prstGeom prst="rect">
+            <a:avLst/>
+          </a:prstGeom>
+          <a:noFill/>
+        </p:spPr>
+        <p:txBody>
+          <a:bodyPr wrap="square" anchor="ctr">
+            <a:spAutoFit/>
+          </a:bodyPr>
+          <a:lstStyle/>
+          <a:p>
+            <a:pPr algn="ctr"/>
+            <a:r>
+              <a:rPr sz="1400" b="1">
+                <a:solidFill>
+                  <a:srgbClr val="FFFFFF"/>
+                </a:solidFill>
+                <a:latin typeface="Arial"/>
+              </a:rPr>
+              <a:t>4</a:t>
+            </a:r>
+          </a:p>
+        </p:txBody>
+      </p:sp>
+      <p:sp>
+        <p:nvSpPr>
+          <p:cNvPr id="30" name="TextBox 29"/>
+          <p:cNvSpPr txBox="1"/>
+          <p:nvPr/>
+        </p:nvSpPr>
+        <p:spPr>
+          <a:xfrm>
+            <a:off x="1536192" y="3959352"/>
+            <a:ext cx="2414016" cy="329184"/>
+          </a:xfrm>
+          <a:prstGeom prst="rect">
+            <a:avLst/>
+          </a:prstGeom>
+          <a:noFill/>
+        </p:spPr>
+        <p:txBody>
+          <a:bodyPr wrap="square" anchor="t">
+            <a:spAutoFit/>
+          </a:bodyPr>
+          <a:lstStyle/>
+          <a:p>
+            <a:pPr algn="l"/>
+            <a:r>
+              <a:rPr sz="1400" b="1">
+                <a:solidFill>
+                  <a:srgbClr val="F59E0B"/>
+                </a:solidFill>
+                <a:latin typeface="Arial"/>
+              </a:rPr>
+              <a:t>Brand</a:t>
+            </a:r>
+          </a:p>
+        </p:txBody>
+      </p:sp>
+      <p:sp>
+        <p:nvSpPr>
+          <p:cNvPr id="31" name="TextBox 30"/>
+          <p:cNvSpPr txBox="1"/>
+          <p:nvPr/>
+        </p:nvSpPr>
+        <p:spPr>
+          <a:xfrm>
+            <a:off x="1536192" y="4343400"/>
+            <a:ext cx="2414016" cy="1005839"/>
+          </a:xfrm>
+          <a:prstGeom prst="rect">
+            <a:avLst/>
+          </a:prstGeom>
+          <a:noFill/>
+        </p:spPr>
+        <p:txBody>
+          <a:bodyPr wrap="square" anchor="t">
+            <a:spAutoFit/>
+          </a:bodyPr>
+          <a:lstStyle/>
+          <a:p>
+            <a:pPr algn="l"/>
+            <a:r>
+              <a:rPr sz="1150" b="0">
+                <a:solidFill>
+                  <a:srgbClr val="161B26"/>
+                </a:solidFill>
+                <a:latin typeface="Arial"/>
+              </a:rPr>
+              <a:t>Are palette, type, logo and tone approved?</a:t>
+            </a:r>
+          </a:p>
+        </p:txBody>
+      </p:sp>
+      <p:sp>
+        <p:nvSpPr>
+          <p:cNvPr id="32" name="Rounded Rectangle 31"/>
+          <p:cNvSpPr/>
+          <p:nvPr/>
+        </p:nvSpPr>
+        <p:spPr>
+          <a:xfrm>
+            <a:off x="4315968" y="3776472"/>
+            <a:ext cx="3401568" cy="1719072"/>
+          </a:xfrm>
+          <a:prstGeom prst="roundRect">
+            <a:avLst/>
+          </a:prstGeom>
+          <a:solidFill>
+            <a:srgbClr val="F5F8FC"/>
+          </a:solidFill>
+          <a:ln>
+            <a:solidFill>
+              <a:srgbClr val="E2E8F0"/>
+            </a:solidFill>
+          </a:ln>
+        </p:spPr>
+        <p:style>
+          <a:lnRef idx="1">
+            <a:schemeClr val="accent1"/>
+          </a:lnRef>
+          <a:fillRef idx="3">
+            <a:schemeClr val="accent1"/>
+          </a:fillRef>
+          <a:effectRef idx="2">
+            <a:schemeClr val="accent1"/>
+          </a:effectRef>
+          <a:fontRef idx="minor">
+            <a:schemeClr val="lt1"/>
+          </a:fontRef>
+        </p:style>
+        <p:txBody>
+          <a:bodyPr rtlCol="0" anchor="ctr"/>
+          <a:lstStyle/>
+          <a:p>
+            <a:pPr algn="ctr"/>
+          </a:p>
+        </p:txBody>
+      </p:sp>
+      <p:sp>
+        <p:nvSpPr>
+          <p:cNvPr id="33" name="Rectangle 32"/>
+          <p:cNvSpPr/>
+          <p:nvPr/>
+        </p:nvSpPr>
+        <p:spPr>
+          <a:xfrm>
+            <a:off x="4315968" y="3776472"/>
+            <a:ext cx="73152" cy="1719072"/>
+          </a:xfrm>
+          <a:prstGeom prst="rect">
+            <a:avLst/>
+          </a:prstGeom>
+          <a:solidFill>
+            <a:srgbClr val="1F6FEB"/>
+          </a:solidFill>
+          <a:ln>
+            <a:solidFill>
+              <a:srgbClr val="1F6FEB"/>
+            </a:solidFill>
+          </a:ln>
+        </p:spPr>
+        <p:style>
+          <a:lnRef idx="1">
+            <a:schemeClr val="accent1"/>
+          </a:lnRef>
+          <a:fillRef idx="3">
+            <a:schemeClr val="accent1"/>
+          </a:fillRef>
+          <a:effectRef idx="2">
+            <a:schemeClr val="accent1"/>
+          </a:effectRef>
+          <a:fontRef idx="minor">
+            <a:schemeClr val="lt1"/>
+          </a:fontRef>
+        </p:style>
+        <p:txBody>
+          <a:bodyPr rtlCol="0" anchor="ctr"/>
+          <a:lstStyle/>
+          <a:p>
+            <a:pPr algn="ctr"/>
+          </a:p>
+        </p:txBody>
+      </p:sp>
+      <p:sp>
+        <p:nvSpPr>
+          <p:cNvPr id="34" name="Rounded Rectangle 33"/>
+          <p:cNvSpPr/>
+          <p:nvPr/>
+        </p:nvSpPr>
+        <p:spPr>
+          <a:xfrm>
+            <a:off x="4517136" y="3995928"/>
+            <a:ext cx="438912" cy="438912"/>
+          </a:xfrm>
+          <a:prstGeom prst="roundRect">
+            <a:avLst/>
+          </a:prstGeom>
+          <a:solidFill>
+            <a:srgbClr val="1F6FEB"/>
+          </a:solidFill>
+          <a:ln>
+            <a:solidFill>
+              <a:srgbClr val="1F6FEB"/>
+            </a:solidFill>
+          </a:ln>
+        </p:spPr>
+        <p:style>
+          <a:lnRef idx="1">
+            <a:schemeClr val="accent1"/>
+          </a:lnRef>
+          <a:fillRef idx="3">
+            <a:schemeClr val="accent1"/>
+          </a:fillRef>
+          <a:effectRef idx="2">
+            <a:schemeClr val="accent1"/>
+          </a:effectRef>
+          <a:fontRef idx="minor">
+            <a:schemeClr val="lt1"/>
+          </a:fontRef>
+        </p:style>
+        <p:txBody>
+          <a:bodyPr rtlCol="0" anchor="ctr"/>
+          <a:lstStyle/>
+          <a:p>
+            <a:pPr algn="ctr"/>
+          </a:p>
+        </p:txBody>
+      </p:sp>
+      <p:sp>
+        <p:nvSpPr>
+          <p:cNvPr id="35" name="TextBox 34"/>
+          <p:cNvSpPr txBox="1"/>
+          <p:nvPr/>
+        </p:nvSpPr>
+        <p:spPr>
+          <a:xfrm>
+            <a:off x="4517136" y="4005072"/>
+            <a:ext cx="438912" cy="420624"/>
+          </a:xfrm>
+          <a:prstGeom prst="rect">
+            <a:avLst/>
+          </a:prstGeom>
+          <a:noFill/>
+        </p:spPr>
+        <p:txBody>
+          <a:bodyPr wrap="square" anchor="ctr">
+            <a:spAutoFit/>
+          </a:bodyPr>
+          <a:lstStyle/>
+          <a:p>
+            <a:pPr algn="ctr"/>
+            <a:r>
+              <a:rPr sz="1400" b="1">
+                <a:solidFill>
+                  <a:srgbClr val="FFFFFF"/>
+                </a:solidFill>
+                <a:latin typeface="Arial"/>
+              </a:rPr>
+              <a:t>5</a:t>
+            </a:r>
+          </a:p>
+        </p:txBody>
+      </p:sp>
+      <p:sp>
+        <p:nvSpPr>
+          <p:cNvPr id="36" name="TextBox 35"/>
+          <p:cNvSpPr txBox="1"/>
+          <p:nvPr/>
+        </p:nvSpPr>
+        <p:spPr>
+          <a:xfrm>
+            <a:off x="5120640" y="3959352"/>
+            <a:ext cx="2414016" cy="329184"/>
+          </a:xfrm>
+          <a:prstGeom prst="rect">
+            <a:avLst/>
+          </a:prstGeom>
+          <a:noFill/>
+        </p:spPr>
+        <p:txBody>
+          <a:bodyPr wrap="square" anchor="t">
+            <a:spAutoFit/>
+          </a:bodyPr>
+          <a:lstStyle/>
+          <a:p>
+            <a:pPr algn="l"/>
+            <a:r>
+              <a:rPr sz="1400" b="1">
+                <a:solidFill>
+                  <a:srgbClr val="1F6FEB"/>
+                </a:solidFill>
+                <a:latin typeface="Arial"/>
+              </a:rPr>
+              <a:t>Access</a:t>
+            </a:r>
+          </a:p>
+        </p:txBody>
+      </p:sp>
+      <p:sp>
+        <p:nvSpPr>
+          <p:cNvPr id="37" name="TextBox 36"/>
+          <p:cNvSpPr txBox="1"/>
+          <p:nvPr/>
+        </p:nvSpPr>
+        <p:spPr>
+          <a:xfrm>
+            <a:off x="5120640" y="4343400"/>
+            <a:ext cx="2414016" cy="1005839"/>
+          </a:xfrm>
+          <a:prstGeom prst="rect">
+            <a:avLst/>
+          </a:prstGeom>
+          <a:noFill/>
+        </p:spPr>
+        <p:txBody>
+          <a:bodyPr wrap="square" anchor="t">
+            <a:spAutoFit/>
+          </a:bodyPr>
+          <a:lstStyle/>
+          <a:p>
+            <a:pPr algn="l"/>
+            <a:r>
+              <a:rPr sz="1150" b="0">
+                <a:solidFill>
+                  <a:srgbClr val="161B26"/>
+                </a:solidFill>
+                <a:latin typeface="Arial"/>
+              </a:rPr>
+              <a:t>Are contrast, labels and alt text adequate?</a:t>
+            </a:r>
+          </a:p>
+        </p:txBody>
+      </p:sp>
+      <p:sp>
+        <p:nvSpPr>
+          <p:cNvPr id="38" name="Rounded Rectangle 37"/>
+          <p:cNvSpPr/>
+          <p:nvPr/>
+        </p:nvSpPr>
+        <p:spPr>
+          <a:xfrm>
+            <a:off x="7900416" y="3776472"/>
+            <a:ext cx="3401568" cy="1719072"/>
+          </a:xfrm>
+          <a:prstGeom prst="roundRect">
+            <a:avLst/>
+          </a:prstGeom>
+          <a:solidFill>
+            <a:srgbClr val="F5F8FC"/>
+          </a:solidFill>
+          <a:ln>
+            <a:solidFill>
+              <a:srgbClr val="E2E8F0"/>
+            </a:solidFill>
+          </a:ln>
+        </p:spPr>
+        <p:style>
+          <a:lnRef idx="1">
+            <a:schemeClr val="accent1"/>
+          </a:lnRef>
+          <a:fillRef idx="3">
+            <a:schemeClr val="accent1"/>
+          </a:fillRef>
+          <a:effectRef idx="2">
+            <a:schemeClr val="accent1"/>
+          </a:effectRef>
+          <a:fontRef idx="minor">
+            <a:schemeClr val="lt1"/>
+          </a:fontRef>
+        </p:style>
+        <p:txBody>
+          <a:bodyPr rtlCol="0" anchor="ctr"/>
+          <a:lstStyle/>
+          <a:p>
+            <a:pPr algn="ctr"/>
+          </a:p>
+        </p:txBody>
+      </p:sp>
+      <p:sp>
+        <p:nvSpPr>
+          <p:cNvPr id="39" name="Rectangle 38"/>
+          <p:cNvSpPr/>
+          <p:nvPr/>
+        </p:nvSpPr>
+        <p:spPr>
+          <a:xfrm>
+            <a:off x="7900416" y="3776472"/>
+            <a:ext cx="73152" cy="1719072"/>
+          </a:xfrm>
+          <a:prstGeom prst="rect">
+            <a:avLst/>
+          </a:prstGeom>
+          <a:solidFill>
+            <a:srgbClr val="10B981"/>
+          </a:solidFill>
+          <a:ln>
+            <a:solidFill>
+              <a:srgbClr val="10B981"/>
+            </a:solidFill>
+          </a:ln>
+        </p:spPr>
+        <p:style>
+          <a:lnRef idx="1">
+            <a:schemeClr val="accent1"/>
+          </a:lnRef>
+          <a:fillRef idx="3">
+            <a:schemeClr val="accent1"/>
+          </a:fillRef>
+          <a:effectRef idx="2">
+            <a:schemeClr val="accent1"/>
+          </a:effectRef>
+          <a:fontRef idx="minor">
+            <a:schemeClr val="lt1"/>
+          </a:fontRef>
+        </p:style>
+        <p:txBody>
+          <a:bodyPr rtlCol="0" anchor="ctr"/>
+          <a:lstStyle/>
+          <a:p>
+            <a:pPr algn="ctr"/>
+          </a:p>
+        </p:txBody>
+      </p:sp>
+      <p:sp>
+        <p:nvSpPr>
+          <p:cNvPr id="40" name="Rounded Rectangle 39"/>
+          <p:cNvSpPr/>
+          <p:nvPr/>
+        </p:nvSpPr>
+        <p:spPr>
+          <a:xfrm>
+            <a:off x="8101584" y="3995928"/>
+            <a:ext cx="438912" cy="438912"/>
+          </a:xfrm>
+          <a:prstGeom prst="roundRect">
+            <a:avLst/>
+          </a:prstGeom>
+          <a:solidFill>
+            <a:srgbClr val="10B981"/>
+          </a:solidFill>
+          <a:ln>
+            <a:solidFill>
+              <a:srgbClr val="10B981"/>
+            </a:solidFill>
+          </a:ln>
+        </p:spPr>
+        <p:style>
+          <a:lnRef idx="1">
+            <a:schemeClr val="accent1"/>
+          </a:lnRef>
+          <a:fillRef idx="3">
+            <a:schemeClr val="accent1"/>
+          </a:fillRef>
+          <a:effectRef idx="2">
+            <a:schemeClr val="accent1"/>
+          </a:effectRef>
+          <a:fontRef idx="minor">
+            <a:schemeClr val="lt1"/>
+          </a:fontRef>
+        </p:style>
+        <p:txBody>
+          <a:bodyPr rtlCol="0" anchor="ctr"/>
+          <a:lstStyle/>
+          <a:p>
+            <a:pPr algn="ctr"/>
+          </a:p>
+        </p:txBody>
+      </p:sp>
+      <p:sp>
+        <p:nvSpPr>
+          <p:cNvPr id="41" name="TextBox 40"/>
+          <p:cNvSpPr txBox="1"/>
+          <p:nvPr/>
+        </p:nvSpPr>
+        <p:spPr>
+          <a:xfrm>
+            <a:off x="8101584" y="4005072"/>
+            <a:ext cx="438912" cy="420624"/>
+          </a:xfrm>
+          <a:prstGeom prst="rect">
+            <a:avLst/>
+          </a:prstGeom>
+          <a:noFill/>
+        </p:spPr>
+        <p:txBody>
+          <a:bodyPr wrap="square" anchor="ctr">
+            <a:spAutoFit/>
+          </a:bodyPr>
+          <a:lstStyle/>
+          <a:p>
+            <a:pPr algn="ctr"/>
+            <a:r>
+              <a:rPr sz="1400" b="1">
+                <a:solidFill>
+                  <a:srgbClr val="FFFFFF"/>
+                </a:solidFill>
+                <a:latin typeface="Arial"/>
+              </a:rPr>
+              <a:t>6</a:t>
+            </a:r>
+          </a:p>
+        </p:txBody>
+      </p:sp>
+      <p:sp>
+        <p:nvSpPr>
+          <p:cNvPr id="42" name="TextBox 41"/>
+          <p:cNvSpPr txBox="1"/>
+          <p:nvPr/>
+        </p:nvSpPr>
+        <p:spPr>
+          <a:xfrm>
+            <a:off x="8705088" y="3959352"/>
+            <a:ext cx="2414016" cy="329184"/>
+          </a:xfrm>
+          <a:prstGeom prst="rect">
+            <a:avLst/>
+          </a:prstGeom>
+          <a:noFill/>
+        </p:spPr>
+        <p:txBody>
+          <a:bodyPr wrap="square" anchor="t">
+            <a:spAutoFit/>
+          </a:bodyPr>
+          <a:lstStyle/>
+          <a:p>
+            <a:pPr algn="l"/>
+            <a:r>
+              <a:rPr sz="1400" b="1">
+                <a:solidFill>
+                  <a:srgbClr val="10B981"/>
+                </a:solidFill>
+                <a:latin typeface="Arial"/>
+              </a:rPr>
+              <a:t>Output</a:t>
+            </a:r>
+          </a:p>
+        </p:txBody>
+      </p:sp>
+      <p:sp>
+        <p:nvSpPr>
+          <p:cNvPr id="43" name="TextBox 42"/>
+          <p:cNvSpPr txBox="1"/>
+          <p:nvPr/>
+        </p:nvSpPr>
+        <p:spPr>
+          <a:xfrm>
+            <a:off x="8705088" y="4343400"/>
+            <a:ext cx="2414016" cy="1005839"/>
+          </a:xfrm>
+          <a:prstGeom prst="rect">
+            <a:avLst/>
+          </a:prstGeom>
+          <a:noFill/>
+        </p:spPr>
+        <p:txBody>
+          <a:bodyPr wrap="square" anchor="t">
+            <a:spAutoFit/>
+          </a:bodyPr>
+          <a:lstStyle/>
+          <a:p>
+            <a:pPr algn="l"/>
+            <a:r>
+              <a:rPr sz="1150" b="0">
+                <a:solidFill>
+                  <a:srgbClr val="161B26"/>
+                </a:solidFill>
+                <a:latin typeface="Arial"/>
+              </a:rPr>
+              <a:t>Do PPTX, PDF and JPG render as intended?</a:t>
+            </a:r>
+          </a:p>
+        </p:txBody>
+      </p:sp>
+    </p:spTree>
+  </p:cSld>
+  <p:clrMapOvr>
+    <a:masterClrMapping/>
+  </p:clrMapOvr>
+</p:sld>
+</file>
+
+<file path=ppt/slides/slide6.xml><?xml version="1.0" encoding="utf-8"?>
+<p:sld xmlns:a="http://schemas.openxmlformats.org/drawingml/2006/main" xmlns:p="http://schemas.openxmlformats.org/presentationml/2006/main" xmlns:r="http://schemas.openxmlformats.org/officeDocument/2006/relationships">
+  <p:cSld>
+    <p:spTree>
+      <p:nvGrpSpPr>
+        <p:cNvPr id="1" name=""/>
+        <p:cNvGrpSpPr/>
+        <p:nvPr/>
+      </p:nvGrpSpPr>
+      <p:grpSpPr/>
+      <p:sp>
+        <p:nvSpPr>
+          <p:cNvPr id="2" name="Rectangle 1"/>
+          <p:cNvSpPr/>
+          <p:nvPr/>
+        </p:nvSpPr>
+        <p:spPr>
+          <a:xfrm>
+            <a:off x="0" y="0"/>
+            <a:ext cx="12191695" cy="6858000"/>
+          </a:xfrm>
+          <a:prstGeom prst="rect">
+            <a:avLst/>
+          </a:prstGeom>
+          <a:solidFill>
+            <a:srgbClr val="FFFFFF"/>
+          </a:solidFill>
+          <a:ln>
+            <a:solidFill>
+              <a:srgbClr val="FFFFFF"/>
+            </a:solidFill>
+          </a:ln>
+        </p:spPr>
+        <p:style>
+          <a:lnRef idx="1">
+            <a:schemeClr val="accent1"/>
+          </a:lnRef>
+          <a:fillRef idx="3">
+            <a:schemeClr val="accent1"/>
+          </a:fillRef>
+          <a:effectRef idx="2">
+            <a:schemeClr val="accent1"/>
+          </a:effectRef>
+          <a:fontRef idx="minor">
+            <a:schemeClr val="lt1"/>
+          </a:fontRef>
+        </p:style>
+        <p:txBody>
+          <a:bodyPr rtlCol="0" anchor="ctr"/>
+          <a:lstStyle/>
+          <a:p>
+            <a:pPr algn="ctr"/>
+          </a:p>
+        </p:txBody>
+      </p:sp>
+      <p:sp>
+        <p:nvSpPr>
+          <p:cNvPr id="3" name="Rectangle 2"/>
+          <p:cNvSpPr/>
+          <p:nvPr/>
+        </p:nvSpPr>
+        <p:spPr>
+          <a:xfrm>
+            <a:off x="0" y="0"/>
+            <a:ext cx="164592" cy="6858000"/>
+          </a:xfrm>
+          <a:prstGeom prst="rect">
+            <a:avLst/>
+          </a:prstGeom>
+          <a:solidFill>
+            <a:srgbClr val="1F6FEB"/>
+          </a:solidFill>
+          <a:ln>
+            <a:solidFill>
+              <a:srgbClr val="1F6FEB"/>
+            </a:solidFill>
+          </a:ln>
+        </p:spPr>
+        <p:style>
+          <a:lnRef idx="1">
+            <a:schemeClr val="accent1"/>
+          </a:lnRef>
+          <a:fillRef idx="3">
+            <a:schemeClr val="accent1"/>
+          </a:fillRef>
+          <a:effectRef idx="2">
+            <a:schemeClr val="accent1"/>
+          </a:effectRef>
+          <a:fontRef idx="minor">
+            <a:schemeClr val="lt1"/>
+          </a:fontRef>
+        </p:style>
+        <p:txBody>
+          <a:bodyPr rtlCol="0" anchor="ctr"/>
+          <a:lstStyle/>
+          <a:p>
+            <a:pPr algn="ctr"/>
+          </a:p>
+        </p:txBody>
+      </p:sp>
+      <p:sp>
+        <p:nvSpPr>
+          <p:cNvPr id="4" name="TextBox 3"/>
+          <p:cNvSpPr txBox="1"/>
+          <p:nvPr/>
+        </p:nvSpPr>
+        <p:spPr>
+          <a:xfrm>
+            <a:off x="658368" y="384048"/>
+            <a:ext cx="10789920" cy="320040"/>
+          </a:xfrm>
+          <a:prstGeom prst="rect">
+            <a:avLst/>
+          </a:prstGeom>
+          <a:noFill/>
+        </p:spPr>
+        <p:txBody>
+          <a:bodyPr wrap="square" anchor="t">
+            <a:spAutoFit/>
+          </a:bodyPr>
+          <a:lstStyle/>
+          <a:p>
+            <a:pPr algn="l"/>
+            <a:r>
+              <a:rPr sz="1100" b="1">
+                <a:solidFill>
+                  <a:srgbClr val="1F6FEB"/>
+                </a:solidFill>
+                <a:latin typeface="Arial"/>
+              </a:rPr>
+              <a:t>ACTIVITY 03 · ACCEPTANCE</a:t>
+            </a:r>
+          </a:p>
+        </p:txBody>
+      </p:sp>
+      <p:sp>
+        <p:nvSpPr>
+          <p:cNvPr id="5" name="TextBox 4"/>
+          <p:cNvSpPr txBox="1"/>
+          <p:nvPr/>
+        </p:nvSpPr>
+        <p:spPr>
+          <a:xfrm>
+            <a:off x="658368" y="749808"/>
+            <a:ext cx="10789920" cy="658368"/>
+          </a:xfrm>
+          <a:prstGeom prst="rect">
+            <a:avLst/>
+          </a:prstGeom>
+          <a:noFill/>
+        </p:spPr>
+        <p:txBody>
+          <a:bodyPr wrap="square" anchor="t">
+            <a:spAutoFit/>
+          </a:bodyPr>
+          <a:lstStyle/>
+          <a:p>
+            <a:pPr algn="l"/>
+            <a:r>
+              <a:rPr sz="2700" b="1">
+                <a:solidFill>
+                  <a:srgbClr val="161B26"/>
+                </a:solidFill>
+                <a:latin typeface="Arial"/>
+              </a:rPr>
+              <a:t>What Good Looks Like</a:t>
+            </a:r>
+          </a:p>
+        </p:txBody>
+      </p:sp>
+      <p:sp>
+        <p:nvSpPr>
+          <p:cNvPr id="6" name="Rectangle 5"/>
+          <p:cNvSpPr/>
+          <p:nvPr/>
+        </p:nvSpPr>
+        <p:spPr>
+          <a:xfrm>
+            <a:off x="658368" y="1444752"/>
+            <a:ext cx="10881360" cy="18288"/>
+          </a:xfrm>
+          <a:prstGeom prst="rect">
+            <a:avLst/>
+          </a:prstGeom>
+          <a:solidFill>
+            <a:srgbClr val="E2E8F0"/>
+          </a:solidFill>
+          <a:ln>
+            <a:solidFill>
+              <a:srgbClr val="E2E8F0"/>
+            </a:solidFill>
+          </a:ln>
+        </p:spPr>
+        <p:style>
+          <a:lnRef idx="1">
+            <a:schemeClr val="accent1"/>
+          </a:lnRef>
+          <a:fillRef idx="3">
+            <a:schemeClr val="accent1"/>
+          </a:fillRef>
+          <a:effectRef idx="2">
+            <a:schemeClr val="accent1"/>
+          </a:effectRef>
+          <a:fontRef idx="minor">
+            <a:schemeClr val="lt1"/>
+          </a:fontRef>
+        </p:style>
+        <p:txBody>
+          <a:bodyPr rtlCol="0" anchor="ctr"/>
+          <a:lstStyle/>
+          <a:p>
+            <a:pPr algn="ctr"/>
+          </a:p>
+        </p:txBody>
+      </p:sp>
+      <p:sp>
+        <p:nvSpPr>
+          <p:cNvPr id="7" name="TextBox 6"/>
+          <p:cNvSpPr txBox="1"/>
+          <p:nvPr/>
+        </p:nvSpPr>
+        <p:spPr>
+          <a:xfrm>
+            <a:off x="658368" y="6473952"/>
+            <a:ext cx="9875520" cy="201168"/>
+          </a:xfrm>
+          <a:prstGeom prst="rect">
+            <a:avLst/>
+          </a:prstGeom>
+          <a:noFill/>
+        </p:spPr>
+        <p:txBody>
+          <a:bodyPr wrap="square" anchor="t">
+            <a:spAutoFit/>
+          </a:bodyPr>
+          <a:lstStyle/>
+          <a:p>
+            <a:pPr algn="l"/>
+            <a:r>
+              <a:rPr sz="800" b="0">
+                <a:solidFill>
+                  <a:srgbClr val="5B6372"/>
+                </a:solidFill>
+                <a:latin typeface="Arial"/>
+              </a:rPr>
+              <a:t>TGS-2026064178 · ACTIVITY PRACTICE · Tertiary Infotech Academy Pte Ltd</a:t>
             </a:r>
           </a:p>
         </p:txBody>

--- a/activities/Activity-03-Build-from-Microsoft-Infographic-Maker/A03-Build-from-Microsoft-Infographic-Maker-Sample.pptx
+++ b/activities/Activity-03-Build-from-Microsoft-Infographic-Maker/A03-Build-from-Microsoft-Infographic-Maker-Sample.pptx
@@ -11,6 +11,7 @@
     <p:sldId id="259" r:id="rId10"/>
     <p:sldId id="260" r:id="rId11"/>
     <p:sldId id="261" r:id="rId12"/>
+    <p:sldId id="262" r:id="rId13"/>
   </p:sldIdLst>
   <p:sldSz cx="12191695" cy="6858000" type="screen4x3"/>
   <p:notesSz cx="6858000" cy="9144000"/>
@@ -3293,7 +3294,7 @@
                 </a:solidFill>
                 <a:latin typeface="Arial"/>
               </a:rPr>
-              <a:t>Build from Microsoft Infographic Maker</a:t>
+              <a:t>Create a Timeline Infographic with Microsoft 365 Copilot</a:t>
             </a:r>
           </a:p>
         </p:txBody>
@@ -3443,7 +3444,7 @@
                 </a:solidFill>
                 <a:latin typeface="Arial"/>
               </a:rPr>
-              <a:t>Microsoft 365 Copilot infographic maker + PowerPoint</a:t>
+              <a:t>Microsoft 365 Copilot app + PowerPoint</a:t>
             </a:r>
           </a:p>
         </p:txBody>
@@ -3906,7 +3907,7 @@
                 </a:solidFill>
                 <a:latin typeface="Arial"/>
               </a:rPr>
-              <a:t>Data analyst</a:t>
+              <a:t>Analyse the evidence</a:t>
             </a:r>
           </a:p>
         </p:txBody>
@@ -3941,7 +3942,7 @@
                 </a:solidFill>
                 <a:latin typeface="Arial"/>
               </a:rPr>
-              <a:t>Using only the attached approved sources, create a source register, identify duplicates or conflicting definitions, clean the table, show formulas or transformations, and return five candidate insights with citations, caveats and a con…</a:t>
+              <a:t>Using only the attached approved source, identify the three strongest patterns, the denominator for each metric, one limitation and one proportionate business action. Cite the source field or row for every number. Do not invent missing…</a:t>
             </a:r>
           </a:p>
         </p:txBody>
@@ -4146,7 +4147,7 @@
                 </a:solidFill>
                 <a:latin typeface="Arial"/>
               </a:rPr>
-              <a:t>Infographic</a:t>
+              <a:t>Create the infographic</a:t>
             </a:r>
           </a:p>
         </p:txBody>
@@ -4181,7 +4182,7 @@
                 </a:solidFill>
                 <a:latin typeface="Arial"/>
               </a:rPr>
-              <a:t>Create a one-page executive infographic for Singapore retail managers. Lead with one decision insight, show three supporting metrics, include a five-stage flow and a source footer. Use a clean professional style, strong hierarchy and n…</a:t>
+              <a:t>Create a one-page [TYPE] infographic about [TOPIC]. Sections: 1. [SECTION ONE] 2. [SECTION TWO] 3. [SECTION THREE] 4. [SECTION FOUR] 5. [SECTION FIVE]. Audience: [AUDIENCE]. Decision: [DECISION]. Style: professional, high contrast, con…</a:t>
             </a:r>
           </a:p>
         </p:txBody>
@@ -4386,7 +4387,7 @@
                 </a:solidFill>
                 <a:latin typeface="Arial"/>
               </a:rPr>
-              <a:t>Text to image</a:t>
+              <a:t>Refine in PowerPoint</a:t>
             </a:r>
           </a:p>
         </p:txBody>
@@ -4421,7 +4422,7 @@
                 </a:solidFill>
                 <a:latin typeface="Arial"/>
               </a:rPr>
-              <a:t>Create a clean vector-like sustainability delivery illustration for a PowerPoint infographic: one electric van, one reusable parcel, a simple route and a feedback symbol. Transparent background, consistent blue/teal/violet/amber palett…</a:t>
+              <a:t>Turn the selected infographic direction into one editable PowerPoint slide. Keep the action title, labels, numbers, chart or process, source footer and accessibility notes editable. Remove decoration that does not support the message. …</a:t>
             </a:r>
           </a:p>
         </p:txBody>
@@ -4626,7 +4627,7 @@
                 </a:solidFill>
                 <a:latin typeface="Arial"/>
               </a:rPr>
-              <a:t>Gemini Notebook deck</a:t>
+              <a:t>Quality review</a:t>
             </a:r>
           </a:p>
         </p:txBody>
@@ -4661,7 +4662,7 @@
                 </a:solidFill>
                 <a:latin typeface="Arial"/>
               </a:rPr>
-              <a:t>Create Presenter Slides for business stakeholders. Focus on the verified decision insight, use a concise professional style, include source-grounded comparisons and a final recommendation. Avoid claims not supported by selected sources…</a:t>
+              <a:t>Review this infographic against message clarity, data accuracy, visual hierarchy, audience fit, accessibility, editability and business goal. List each issue with evidence, its impact, the proposed change and a pass/fail acceptance che…</a:t>
             </a:r>
           </a:p>
         </p:txBody>
@@ -4744,11 +4745,11 @@
             <a:avLst/>
           </a:prstGeom>
           <a:solidFill>
-            <a:srgbClr val="1F6FEB"/>
+            <a:srgbClr val="7C3AED"/>
           </a:solidFill>
           <a:ln>
             <a:solidFill>
-              <a:srgbClr val="1F6FEB"/>
+              <a:srgbClr val="7C3AED"/>
             </a:solidFill>
           </a:ln>
         </p:spPr>
@@ -4800,11 +4801,11 @@
             <a:r>
               <a:rPr sz="1100" b="1">
                 <a:solidFill>
-                  <a:srgbClr val="1F6FEB"/>
+                  <a:srgbClr val="7C3AED"/>
                 </a:solidFill>
                 <a:latin typeface="Arial"/>
               </a:rPr>
-              <a:t>ACTIVITY 03 · CONTEXT</a:t>
+              <a:t>ACTIVITY 03 · COPY, ADAPT AND VERIFY</a:t>
             </a:r>
           </a:p>
         </p:txBody>
@@ -4839,7 +4840,7 @@
                 </a:solidFill>
                 <a:latin typeface="Arial"/>
               </a:rPr>
-              <a:t>The Scenario</a:t>
+              <a:t>Structured Microsoft 365 Copilot Prompt</a:t>
             </a:r>
           </a:p>
         </p:txBody>
@@ -4932,8 +4933,8 @@
         </p:nvSpPr>
         <p:spPr>
           <a:xfrm>
-            <a:off x="731520" y="1783080"/>
-            <a:ext cx="10698480" cy="1691640"/>
+            <a:off x="749808" y="1700784"/>
+            <a:ext cx="10698480" cy="4370832"/>
           </a:xfrm>
           <a:prstGeom prst="roundRect">
             <a:avLst/>
@@ -4971,104 +4972,14 @@
       </p:sp>
       <p:sp>
         <p:nvSpPr>
-          <p:cNvPr id="9" name="Rectangle 8"/>
-          <p:cNvSpPr/>
-          <p:nvPr/>
-        </p:nvSpPr>
-        <p:spPr>
-          <a:xfrm>
-            <a:off x="731520" y="1783080"/>
-            <a:ext cx="73152" cy="1691640"/>
-          </a:xfrm>
-          <a:prstGeom prst="rect">
-            <a:avLst/>
-          </a:prstGeom>
-          <a:solidFill>
-            <a:srgbClr val="1F6FEB"/>
-          </a:solidFill>
-          <a:ln>
-            <a:solidFill>
-              <a:srgbClr val="1F6FEB"/>
-            </a:solidFill>
-          </a:ln>
-        </p:spPr>
-        <p:style>
-          <a:lnRef idx="1">
-            <a:schemeClr val="accent1"/>
-          </a:lnRef>
-          <a:fillRef idx="3">
-            <a:schemeClr val="accent1"/>
-          </a:fillRef>
-          <a:effectRef idx="2">
-            <a:schemeClr val="accent1"/>
-          </a:effectRef>
-          <a:fontRef idx="minor">
-            <a:schemeClr val="lt1"/>
-          </a:fontRef>
-        </p:style>
-        <p:txBody>
-          <a:bodyPr rtlCol="0" anchor="ctr"/>
-          <a:lstStyle/>
-          <a:p>
-            <a:pPr algn="ctr"/>
-          </a:p>
-        </p:txBody>
-      </p:sp>
-      <p:sp>
-        <p:nvSpPr>
-          <p:cNvPr id="10" name="Rounded Rectangle 9"/>
-          <p:cNvSpPr/>
-          <p:nvPr/>
-        </p:nvSpPr>
-        <p:spPr>
-          <a:xfrm>
-            <a:off x="932688" y="2002536"/>
-            <a:ext cx="438912" cy="438912"/>
-          </a:xfrm>
-          <a:prstGeom prst="roundRect">
-            <a:avLst/>
-          </a:prstGeom>
-          <a:solidFill>
-            <a:srgbClr val="1F6FEB"/>
-          </a:solidFill>
-          <a:ln>
-            <a:solidFill>
-              <a:srgbClr val="1F6FEB"/>
-            </a:solidFill>
-          </a:ln>
-        </p:spPr>
-        <p:style>
-          <a:lnRef idx="1">
-            <a:schemeClr val="accent1"/>
-          </a:lnRef>
-          <a:fillRef idx="3">
-            <a:schemeClr val="accent1"/>
-          </a:fillRef>
-          <a:effectRef idx="2">
-            <a:schemeClr val="accent1"/>
-          </a:effectRef>
-          <a:fontRef idx="minor">
-            <a:schemeClr val="lt1"/>
-          </a:fontRef>
-        </p:style>
-        <p:txBody>
-          <a:bodyPr rtlCol="0" anchor="ctr"/>
-          <a:lstStyle/>
-          <a:p>
-            <a:pPr algn="ctr"/>
-          </a:p>
-        </p:txBody>
-      </p:sp>
-      <p:sp>
-        <p:nvSpPr>
-          <p:cNvPr id="11" name="TextBox 10"/>
+          <p:cNvPr id="9" name="TextBox 8"/>
           <p:cNvSpPr txBox="1"/>
           <p:nvPr/>
         </p:nvSpPr>
         <p:spPr>
           <a:xfrm>
-            <a:off x="932688" y="2011680"/>
-            <a:ext cx="438912" cy="420624"/>
+            <a:off x="960120" y="1874519"/>
+            <a:ext cx="384048" cy="246888"/>
           </a:xfrm>
           <a:prstGeom prst="rect">
             <a:avLst/>
@@ -5076,16 +4987,16 @@
           <a:noFill/>
         </p:spPr>
         <p:txBody>
-          <a:bodyPr wrap="square" anchor="ctr">
+          <a:bodyPr wrap="square" anchor="t">
             <a:spAutoFit/>
           </a:bodyPr>
           <a:lstStyle/>
           <a:p>
-            <a:pPr algn="ctr"/>
-            <a:r>
-              <a:rPr sz="1400" b="1">
-                <a:solidFill>
-                  <a:srgbClr val="FFFFFF"/>
+            <a:pPr algn="r"/>
+            <a:r>
+              <a:rPr sz="900" b="0">
+                <a:solidFill>
+                  <a:srgbClr val="5B6372"/>
                 </a:solidFill>
                 <a:latin typeface="Arial"/>
               </a:rPr>
@@ -5096,14 +5007,14 @@
       </p:sp>
       <p:sp>
         <p:nvSpPr>
-          <p:cNvPr id="12" name="TextBox 11"/>
+          <p:cNvPr id="10" name="TextBox 9"/>
           <p:cNvSpPr txBox="1"/>
           <p:nvPr/>
         </p:nvSpPr>
         <p:spPr>
           <a:xfrm>
-            <a:off x="1536192" y="1965960"/>
-            <a:ext cx="9710928" cy="329184"/>
+            <a:off x="1554480" y="1874519"/>
+            <a:ext cx="9418320" cy="256032"/>
           </a:xfrm>
           <a:prstGeom prst="rect">
             <a:avLst/>
@@ -5118,27 +5029,27 @@
           <a:p>
             <a:pPr algn="l"/>
             <a:r>
-              <a:rPr sz="1400" b="1">
-                <a:solidFill>
-                  <a:srgbClr val="1F6FEB"/>
+              <a:rPr sz="1050" b="0">
+                <a:solidFill>
+                  <a:srgbClr val="161B26"/>
                 </a:solidFill>
                 <a:latin typeface="Arial"/>
               </a:rPr>
-              <a:t>Context</a:t>
-            </a:r>
-          </a:p>
-        </p:txBody>
-      </p:sp>
-      <p:sp>
-        <p:nvSpPr>
-          <p:cNvPr id="13" name="TextBox 12"/>
+              <a:t>Create a one-page timeline infographic about Create a Timeline Infographic with Microsoft 365 Copilot.</a:t>
+            </a:r>
+          </a:p>
+        </p:txBody>
+      </p:sp>
+      <p:sp>
+        <p:nvSpPr>
+          <p:cNvPr id="11" name="TextBox 10"/>
           <p:cNvSpPr txBox="1"/>
           <p:nvPr/>
         </p:nvSpPr>
         <p:spPr>
           <a:xfrm>
-            <a:off x="1536192" y="2350008"/>
-            <a:ext cx="9710928" cy="978408"/>
+            <a:off x="960120" y="2157984"/>
+            <a:ext cx="384048" cy="246888"/>
           </a:xfrm>
           <a:prstGeom prst="rect">
             <a:avLst/>
@@ -5151,181 +5062,11 @@
           </a:bodyPr>
           <a:lstStyle/>
           <a:p>
-            <a:pPr algn="l"/>
-            <a:r>
-              <a:rPr sz="1150" b="0">
-                <a:solidFill>
-                  <a:srgbClr val="161B26"/>
-                </a:solidFill>
-                <a:latin typeface="Arial"/>
-              </a:rPr>
-              <a:t>Northstar wants a vertical five-stage sustainable-delivery journey for an employee town hall and social post.</a:t>
-            </a:r>
-          </a:p>
-        </p:txBody>
-      </p:sp>
-      <p:sp>
-        <p:nvSpPr>
-          <p:cNvPr id="14" name="Rounded Rectangle 13"/>
-          <p:cNvSpPr/>
-          <p:nvPr/>
-        </p:nvSpPr>
-        <p:spPr>
-          <a:xfrm>
-            <a:off x="731520" y="3776472"/>
-            <a:ext cx="10698480" cy="1691640"/>
-          </a:xfrm>
-          <a:prstGeom prst="roundRect">
-            <a:avLst/>
-          </a:prstGeom>
-          <a:solidFill>
-            <a:srgbClr val="F5F8FC"/>
-          </a:solidFill>
-          <a:ln>
-            <a:solidFill>
-              <a:srgbClr val="E2E8F0"/>
-            </a:solidFill>
-          </a:ln>
-        </p:spPr>
-        <p:style>
-          <a:lnRef idx="1">
-            <a:schemeClr val="accent1"/>
-          </a:lnRef>
-          <a:fillRef idx="3">
-            <a:schemeClr val="accent1"/>
-          </a:fillRef>
-          <a:effectRef idx="2">
-            <a:schemeClr val="accent1"/>
-          </a:effectRef>
-          <a:fontRef idx="minor">
-            <a:schemeClr val="lt1"/>
-          </a:fontRef>
-        </p:style>
-        <p:txBody>
-          <a:bodyPr rtlCol="0" anchor="ctr"/>
-          <a:lstStyle/>
-          <a:p>
-            <a:pPr algn="ctr"/>
-          </a:p>
-        </p:txBody>
-      </p:sp>
-      <p:sp>
-        <p:nvSpPr>
-          <p:cNvPr id="15" name="Rectangle 14"/>
-          <p:cNvSpPr/>
-          <p:nvPr/>
-        </p:nvSpPr>
-        <p:spPr>
-          <a:xfrm>
-            <a:off x="731520" y="3776472"/>
-            <a:ext cx="73152" cy="1691640"/>
-          </a:xfrm>
-          <a:prstGeom prst="rect">
-            <a:avLst/>
-          </a:prstGeom>
-          <a:solidFill>
-            <a:srgbClr val="10B981"/>
-          </a:solidFill>
-          <a:ln>
-            <a:solidFill>
-              <a:srgbClr val="10B981"/>
-            </a:solidFill>
-          </a:ln>
-        </p:spPr>
-        <p:style>
-          <a:lnRef idx="1">
-            <a:schemeClr val="accent1"/>
-          </a:lnRef>
-          <a:fillRef idx="3">
-            <a:schemeClr val="accent1"/>
-          </a:fillRef>
-          <a:effectRef idx="2">
-            <a:schemeClr val="accent1"/>
-          </a:effectRef>
-          <a:fontRef idx="minor">
-            <a:schemeClr val="lt1"/>
-          </a:fontRef>
-        </p:style>
-        <p:txBody>
-          <a:bodyPr rtlCol="0" anchor="ctr"/>
-          <a:lstStyle/>
-          <a:p>
-            <a:pPr algn="ctr"/>
-          </a:p>
-        </p:txBody>
-      </p:sp>
-      <p:sp>
-        <p:nvSpPr>
-          <p:cNvPr id="16" name="Rounded Rectangle 15"/>
-          <p:cNvSpPr/>
-          <p:nvPr/>
-        </p:nvSpPr>
-        <p:spPr>
-          <a:xfrm>
-            <a:off x="932688" y="3995928"/>
-            <a:ext cx="438912" cy="438912"/>
-          </a:xfrm>
-          <a:prstGeom prst="roundRect">
-            <a:avLst/>
-          </a:prstGeom>
-          <a:solidFill>
-            <a:srgbClr val="10B981"/>
-          </a:solidFill>
-          <a:ln>
-            <a:solidFill>
-              <a:srgbClr val="10B981"/>
-            </a:solidFill>
-          </a:ln>
-        </p:spPr>
-        <p:style>
-          <a:lnRef idx="1">
-            <a:schemeClr val="accent1"/>
-          </a:lnRef>
-          <a:fillRef idx="3">
-            <a:schemeClr val="accent1"/>
-          </a:fillRef>
-          <a:effectRef idx="2">
-            <a:schemeClr val="accent1"/>
-          </a:effectRef>
-          <a:fontRef idx="minor">
-            <a:schemeClr val="lt1"/>
-          </a:fontRef>
-        </p:style>
-        <p:txBody>
-          <a:bodyPr rtlCol="0" anchor="ctr"/>
-          <a:lstStyle/>
-          <a:p>
-            <a:pPr algn="ctr"/>
-          </a:p>
-        </p:txBody>
-      </p:sp>
-      <p:sp>
-        <p:nvSpPr>
-          <p:cNvPr id="17" name="TextBox 16"/>
-          <p:cNvSpPr txBox="1"/>
-          <p:nvPr/>
-        </p:nvSpPr>
-        <p:spPr>
-          <a:xfrm>
-            <a:off x="932688" y="4005072"/>
-            <a:ext cx="438912" cy="420624"/>
-          </a:xfrm>
-          <a:prstGeom prst="rect">
-            <a:avLst/>
-          </a:prstGeom>
-          <a:noFill/>
-        </p:spPr>
-        <p:txBody>
-          <a:bodyPr wrap="square" anchor="ctr">
-            <a:spAutoFit/>
-          </a:bodyPr>
-          <a:lstStyle/>
-          <a:p>
-            <a:pPr algn="ctr"/>
-            <a:r>
-              <a:rPr sz="1400" b="1">
-                <a:solidFill>
-                  <a:srgbClr val="FFFFFF"/>
+            <a:pPr algn="r"/>
+            <a:r>
+              <a:rPr sz="900" b="0">
+                <a:solidFill>
+                  <a:srgbClr val="5B6372"/>
                 </a:solidFill>
                 <a:latin typeface="Arial"/>
               </a:rPr>
@@ -5336,14 +5077,14 @@
       </p:sp>
       <p:sp>
         <p:nvSpPr>
-          <p:cNvPr id="18" name="TextBox 17"/>
+          <p:cNvPr id="12" name="TextBox 11"/>
           <p:cNvSpPr txBox="1"/>
           <p:nvPr/>
         </p:nvSpPr>
         <p:spPr>
           <a:xfrm>
-            <a:off x="1536192" y="3959352"/>
-            <a:ext cx="9710928" cy="329184"/>
+            <a:off x="1554480" y="2157984"/>
+            <a:ext cx="9418320" cy="256032"/>
           </a:xfrm>
           <a:prstGeom prst="rect">
             <a:avLst/>
@@ -5358,27 +5099,27 @@
           <a:p>
             <a:pPr algn="l"/>
             <a:r>
-              <a:rPr sz="1400" b="1">
-                <a:solidFill>
-                  <a:srgbClr val="10B981"/>
+              <a:rPr sz="1050" b="1">
+                <a:solidFill>
+                  <a:srgbClr val="161B26"/>
                 </a:solidFill>
                 <a:latin typeface="Arial"/>
               </a:rPr>
-              <a:t>Decision pressure</a:t>
-            </a:r>
-          </a:p>
-        </p:txBody>
-      </p:sp>
-      <p:sp>
-        <p:nvSpPr>
-          <p:cNvPr id="19" name="TextBox 18"/>
+              <a:t>Sections:</a:t>
+            </a:r>
+          </a:p>
+        </p:txBody>
+      </p:sp>
+      <p:sp>
+        <p:nvSpPr>
+          <p:cNvPr id="13" name="TextBox 12"/>
           <p:cNvSpPr txBox="1"/>
           <p:nvPr/>
         </p:nvSpPr>
         <p:spPr>
           <a:xfrm>
-            <a:off x="1536192" y="4343400"/>
-            <a:ext cx="9710928" cy="978408"/>
+            <a:off x="960120" y="2441448"/>
+            <a:ext cx="384048" cy="246888"/>
           </a:xfrm>
           <a:prstGeom prst="rect">
             <a:avLst/>
@@ -5391,15 +5132,680 @@
           </a:bodyPr>
           <a:lstStyle/>
           <a:p>
-            <a:pPr algn="l"/>
-            <a:r>
-              <a:rPr sz="1150" b="0">
-                <a:solidFill>
-                  <a:srgbClr val="161B26"/>
+            <a:pPr algn="r"/>
+            <a:r>
+              <a:rPr sz="900" b="0">
+                <a:solidFill>
+                  <a:srgbClr val="5B6372"/>
                 </a:solidFill>
                 <a:latin typeface="Arial"/>
               </a:rPr>
-              <a:t>Start from a Microsoft infographic-maker template or the supplied editable sample. Adapt it to the approved wireframe; do not let inherited placeholders define the story.</a:t>
+              <a:t>3</a:t>
+            </a:r>
+          </a:p>
+        </p:txBody>
+      </p:sp>
+      <p:sp>
+        <p:nvSpPr>
+          <p:cNvPr id="14" name="TextBox 13"/>
+          <p:cNvSpPr txBox="1"/>
+          <p:nvPr/>
+        </p:nvSpPr>
+        <p:spPr>
+          <a:xfrm>
+            <a:off x="1554480" y="2441448"/>
+            <a:ext cx="9418320" cy="256032"/>
+          </a:xfrm>
+          <a:prstGeom prst="rect">
+            <a:avLst/>
+          </a:prstGeom>
+          <a:noFill/>
+        </p:spPr>
+        <p:txBody>
+          <a:bodyPr wrap="square" anchor="t">
+            <a:spAutoFit/>
+          </a:bodyPr>
+          <a:lstStyle/>
+          <a:p>
+            <a:pPr algn="l"/>
+            <a:r>
+              <a:rPr sz="1050" b="0">
+                <a:solidFill>
+                  <a:srgbClr val="161B26"/>
+                </a:solidFill>
+                <a:latin typeface="Arial"/>
+              </a:rPr>
+              <a:t>1. Purpose</a:t>
+            </a:r>
+          </a:p>
+        </p:txBody>
+      </p:sp>
+      <p:sp>
+        <p:nvSpPr>
+          <p:cNvPr id="15" name="TextBox 14"/>
+          <p:cNvSpPr txBox="1"/>
+          <p:nvPr/>
+        </p:nvSpPr>
+        <p:spPr>
+          <a:xfrm>
+            <a:off x="960120" y="2724911"/>
+            <a:ext cx="384048" cy="246888"/>
+          </a:xfrm>
+          <a:prstGeom prst="rect">
+            <a:avLst/>
+          </a:prstGeom>
+          <a:noFill/>
+        </p:spPr>
+        <p:txBody>
+          <a:bodyPr wrap="square" anchor="t">
+            <a:spAutoFit/>
+          </a:bodyPr>
+          <a:lstStyle/>
+          <a:p>
+            <a:pPr algn="r"/>
+            <a:r>
+              <a:rPr sz="900" b="0">
+                <a:solidFill>
+                  <a:srgbClr val="5B6372"/>
+                </a:solidFill>
+                <a:latin typeface="Arial"/>
+              </a:rPr>
+              <a:t>4</a:t>
+            </a:r>
+          </a:p>
+        </p:txBody>
+      </p:sp>
+      <p:sp>
+        <p:nvSpPr>
+          <p:cNvPr id="16" name="TextBox 15"/>
+          <p:cNvSpPr txBox="1"/>
+          <p:nvPr/>
+        </p:nvSpPr>
+        <p:spPr>
+          <a:xfrm>
+            <a:off x="1554480" y="2724911"/>
+            <a:ext cx="9418320" cy="256032"/>
+          </a:xfrm>
+          <a:prstGeom prst="rect">
+            <a:avLst/>
+          </a:prstGeom>
+          <a:noFill/>
+        </p:spPr>
+        <p:txBody>
+          <a:bodyPr wrap="square" anchor="t">
+            <a:spAutoFit/>
+          </a:bodyPr>
+          <a:lstStyle/>
+          <a:p>
+            <a:pPr algn="l"/>
+            <a:r>
+              <a:rPr sz="1050" b="0">
+                <a:solidFill>
+                  <a:srgbClr val="161B26"/>
+                </a:solidFill>
+                <a:latin typeface="Arial"/>
+              </a:rPr>
+              <a:t>2. Content</a:t>
+            </a:r>
+          </a:p>
+        </p:txBody>
+      </p:sp>
+      <p:sp>
+        <p:nvSpPr>
+          <p:cNvPr id="17" name="TextBox 16"/>
+          <p:cNvSpPr txBox="1"/>
+          <p:nvPr/>
+        </p:nvSpPr>
+        <p:spPr>
+          <a:xfrm>
+            <a:off x="960120" y="3008376"/>
+            <a:ext cx="384048" cy="246888"/>
+          </a:xfrm>
+          <a:prstGeom prst="rect">
+            <a:avLst/>
+          </a:prstGeom>
+          <a:noFill/>
+        </p:spPr>
+        <p:txBody>
+          <a:bodyPr wrap="square" anchor="t">
+            <a:spAutoFit/>
+          </a:bodyPr>
+          <a:lstStyle/>
+          <a:p>
+            <a:pPr algn="r"/>
+            <a:r>
+              <a:rPr sz="900" b="0">
+                <a:solidFill>
+                  <a:srgbClr val="5B6372"/>
+                </a:solidFill>
+                <a:latin typeface="Arial"/>
+              </a:rPr>
+              <a:t>5</a:t>
+            </a:r>
+          </a:p>
+        </p:txBody>
+      </p:sp>
+      <p:sp>
+        <p:nvSpPr>
+          <p:cNvPr id="18" name="TextBox 17"/>
+          <p:cNvSpPr txBox="1"/>
+          <p:nvPr/>
+        </p:nvSpPr>
+        <p:spPr>
+          <a:xfrm>
+            <a:off x="1554480" y="3008376"/>
+            <a:ext cx="9418320" cy="256032"/>
+          </a:xfrm>
+          <a:prstGeom prst="rect">
+            <a:avLst/>
+          </a:prstGeom>
+          <a:noFill/>
+        </p:spPr>
+        <p:txBody>
+          <a:bodyPr wrap="square" anchor="t">
+            <a:spAutoFit/>
+          </a:bodyPr>
+          <a:lstStyle/>
+          <a:p>
+            <a:pPr algn="l"/>
+            <a:r>
+              <a:rPr sz="1050" b="0">
+                <a:solidFill>
+                  <a:srgbClr val="161B26"/>
+                </a:solidFill>
+                <a:latin typeface="Arial"/>
+              </a:rPr>
+              <a:t>3. Hierarchy</a:t>
+            </a:r>
+          </a:p>
+        </p:txBody>
+      </p:sp>
+      <p:sp>
+        <p:nvSpPr>
+          <p:cNvPr id="19" name="TextBox 18"/>
+          <p:cNvSpPr txBox="1"/>
+          <p:nvPr/>
+        </p:nvSpPr>
+        <p:spPr>
+          <a:xfrm>
+            <a:off x="960120" y="3291839"/>
+            <a:ext cx="384048" cy="246888"/>
+          </a:xfrm>
+          <a:prstGeom prst="rect">
+            <a:avLst/>
+          </a:prstGeom>
+          <a:noFill/>
+        </p:spPr>
+        <p:txBody>
+          <a:bodyPr wrap="square" anchor="t">
+            <a:spAutoFit/>
+          </a:bodyPr>
+          <a:lstStyle/>
+          <a:p>
+            <a:pPr algn="r"/>
+            <a:r>
+              <a:rPr sz="900" b="0">
+                <a:solidFill>
+                  <a:srgbClr val="5B6372"/>
+                </a:solidFill>
+                <a:latin typeface="Arial"/>
+              </a:rPr>
+              <a:t>6</a:t>
+            </a:r>
+          </a:p>
+        </p:txBody>
+      </p:sp>
+      <p:sp>
+        <p:nvSpPr>
+          <p:cNvPr id="20" name="TextBox 19"/>
+          <p:cNvSpPr txBox="1"/>
+          <p:nvPr/>
+        </p:nvSpPr>
+        <p:spPr>
+          <a:xfrm>
+            <a:off x="1554480" y="3291839"/>
+            <a:ext cx="9418320" cy="256032"/>
+          </a:xfrm>
+          <a:prstGeom prst="rect">
+            <a:avLst/>
+          </a:prstGeom>
+          <a:noFill/>
+        </p:spPr>
+        <p:txBody>
+          <a:bodyPr wrap="square" anchor="t">
+            <a:spAutoFit/>
+          </a:bodyPr>
+          <a:lstStyle/>
+          <a:p>
+            <a:pPr algn="l"/>
+            <a:r>
+              <a:rPr sz="1050" b="0">
+                <a:solidFill>
+                  <a:srgbClr val="161B26"/>
+                </a:solidFill>
+                <a:latin typeface="Arial"/>
+              </a:rPr>
+              <a:t>4. Brand</a:t>
+            </a:r>
+          </a:p>
+        </p:txBody>
+      </p:sp>
+      <p:sp>
+        <p:nvSpPr>
+          <p:cNvPr id="21" name="TextBox 20"/>
+          <p:cNvSpPr txBox="1"/>
+          <p:nvPr/>
+        </p:nvSpPr>
+        <p:spPr>
+          <a:xfrm>
+            <a:off x="960120" y="3575303"/>
+            <a:ext cx="384048" cy="246888"/>
+          </a:xfrm>
+          <a:prstGeom prst="rect">
+            <a:avLst/>
+          </a:prstGeom>
+          <a:noFill/>
+        </p:spPr>
+        <p:txBody>
+          <a:bodyPr wrap="square" anchor="t">
+            <a:spAutoFit/>
+          </a:bodyPr>
+          <a:lstStyle/>
+          <a:p>
+            <a:pPr algn="r"/>
+            <a:r>
+              <a:rPr sz="900" b="0">
+                <a:solidFill>
+                  <a:srgbClr val="5B6372"/>
+                </a:solidFill>
+                <a:latin typeface="Arial"/>
+              </a:rPr>
+              <a:t>7</a:t>
+            </a:r>
+          </a:p>
+        </p:txBody>
+      </p:sp>
+      <p:sp>
+        <p:nvSpPr>
+          <p:cNvPr id="22" name="TextBox 21"/>
+          <p:cNvSpPr txBox="1"/>
+          <p:nvPr/>
+        </p:nvSpPr>
+        <p:spPr>
+          <a:xfrm>
+            <a:off x="1554480" y="3575303"/>
+            <a:ext cx="9418320" cy="256032"/>
+          </a:xfrm>
+          <a:prstGeom prst="rect">
+            <a:avLst/>
+          </a:prstGeom>
+          <a:noFill/>
+        </p:spPr>
+        <p:txBody>
+          <a:bodyPr wrap="square" anchor="t">
+            <a:spAutoFit/>
+          </a:bodyPr>
+          <a:lstStyle/>
+          <a:p>
+            <a:pPr algn="l"/>
+            <a:r>
+              <a:rPr sz="1050" b="0">
+                <a:solidFill>
+                  <a:srgbClr val="161B26"/>
+                </a:solidFill>
+                <a:latin typeface="Arial"/>
+              </a:rPr>
+              <a:t>5. Access</a:t>
+            </a:r>
+          </a:p>
+        </p:txBody>
+      </p:sp>
+      <p:sp>
+        <p:nvSpPr>
+          <p:cNvPr id="23" name="TextBox 22"/>
+          <p:cNvSpPr txBox="1"/>
+          <p:nvPr/>
+        </p:nvSpPr>
+        <p:spPr>
+          <a:xfrm>
+            <a:off x="960120" y="3858768"/>
+            <a:ext cx="384048" cy="246888"/>
+          </a:xfrm>
+          <a:prstGeom prst="rect">
+            <a:avLst/>
+          </a:prstGeom>
+          <a:noFill/>
+        </p:spPr>
+        <p:txBody>
+          <a:bodyPr wrap="square" anchor="t">
+            <a:spAutoFit/>
+          </a:bodyPr>
+          <a:lstStyle/>
+          <a:p>
+            <a:pPr algn="r"/>
+            <a:r>
+              <a:rPr sz="900" b="0">
+                <a:solidFill>
+                  <a:srgbClr val="5B6372"/>
+                </a:solidFill>
+                <a:latin typeface="Arial"/>
+              </a:rPr>
+              <a:t>8</a:t>
+            </a:r>
+          </a:p>
+        </p:txBody>
+      </p:sp>
+      <p:sp>
+        <p:nvSpPr>
+          <p:cNvPr id="24" name="TextBox 23"/>
+          <p:cNvSpPr txBox="1"/>
+          <p:nvPr/>
+        </p:nvSpPr>
+        <p:spPr>
+          <a:xfrm>
+            <a:off x="1554480" y="3858768"/>
+            <a:ext cx="9418320" cy="256032"/>
+          </a:xfrm>
+          <a:prstGeom prst="rect">
+            <a:avLst/>
+          </a:prstGeom>
+          <a:noFill/>
+        </p:spPr>
+        <p:txBody>
+          <a:bodyPr wrap="square" anchor="t">
+            <a:spAutoFit/>
+          </a:bodyPr>
+          <a:lstStyle/>
+          <a:p>
+            <a:pPr algn="l"/>
+            <a:r>
+              <a:rPr sz="1050" b="0">
+                <a:solidFill>
+                  <a:srgbClr val="7C3AED"/>
+                </a:solidFill>
+                <a:latin typeface="Arial"/>
+              </a:rPr>
+              <a:t>Audience: people managers</a:t>
+            </a:r>
+          </a:p>
+        </p:txBody>
+      </p:sp>
+      <p:sp>
+        <p:nvSpPr>
+          <p:cNvPr id="25" name="TextBox 24"/>
+          <p:cNvSpPr txBox="1"/>
+          <p:nvPr/>
+        </p:nvSpPr>
+        <p:spPr>
+          <a:xfrm>
+            <a:off x="960120" y="4142231"/>
+            <a:ext cx="384048" cy="246888"/>
+          </a:xfrm>
+          <a:prstGeom prst="rect">
+            <a:avLst/>
+          </a:prstGeom>
+          <a:noFill/>
+        </p:spPr>
+        <p:txBody>
+          <a:bodyPr wrap="square" anchor="t">
+            <a:spAutoFit/>
+          </a:bodyPr>
+          <a:lstStyle/>
+          <a:p>
+            <a:pPr algn="r"/>
+            <a:r>
+              <a:rPr sz="900" b="0">
+                <a:solidFill>
+                  <a:srgbClr val="5B6372"/>
+                </a:solidFill>
+                <a:latin typeface="Arial"/>
+              </a:rPr>
+              <a:t>9</a:t>
+            </a:r>
+          </a:p>
+        </p:txBody>
+      </p:sp>
+      <p:sp>
+        <p:nvSpPr>
+          <p:cNvPr id="26" name="TextBox 25"/>
+          <p:cNvSpPr txBox="1"/>
+          <p:nvPr/>
+        </p:nvSpPr>
+        <p:spPr>
+          <a:xfrm>
+            <a:off x="1554480" y="4142231"/>
+            <a:ext cx="9418320" cy="256032"/>
+          </a:xfrm>
+          <a:prstGeom prst="rect">
+            <a:avLst/>
+          </a:prstGeom>
+          <a:noFill/>
+        </p:spPr>
+        <p:txBody>
+          <a:bodyPr wrap="square" anchor="t">
+            <a:spAutoFit/>
+          </a:bodyPr>
+          <a:lstStyle/>
+          <a:p>
+            <a:pPr algn="l"/>
+            <a:r>
+              <a:rPr sz="1050" b="0">
+                <a:solidFill>
+                  <a:srgbClr val="7C3AED"/>
+                </a:solidFill>
+                <a:latin typeface="Arial"/>
+              </a:rPr>
+              <a:t>Decision: The final template-based infographic is message-led, branded, accessible, source-labelled and fully editable.</a:t>
+            </a:r>
+          </a:p>
+        </p:txBody>
+      </p:sp>
+      <p:sp>
+        <p:nvSpPr>
+          <p:cNvPr id="27" name="TextBox 26"/>
+          <p:cNvSpPr txBox="1"/>
+          <p:nvPr/>
+        </p:nvSpPr>
+        <p:spPr>
+          <a:xfrm>
+            <a:off x="960120" y="4425696"/>
+            <a:ext cx="384048" cy="246888"/>
+          </a:xfrm>
+          <a:prstGeom prst="rect">
+            <a:avLst/>
+          </a:prstGeom>
+          <a:noFill/>
+        </p:spPr>
+        <p:txBody>
+          <a:bodyPr wrap="square" anchor="t">
+            <a:spAutoFit/>
+          </a:bodyPr>
+          <a:lstStyle/>
+          <a:p>
+            <a:pPr algn="r"/>
+            <a:r>
+              <a:rPr sz="900" b="0">
+                <a:solidFill>
+                  <a:srgbClr val="5B6372"/>
+                </a:solidFill>
+                <a:latin typeface="Arial"/>
+              </a:rPr>
+              <a:t>10</a:t>
+            </a:r>
+          </a:p>
+        </p:txBody>
+      </p:sp>
+      <p:sp>
+        <p:nvSpPr>
+          <p:cNvPr id="28" name="TextBox 27"/>
+          <p:cNvSpPr txBox="1"/>
+          <p:nvPr/>
+        </p:nvSpPr>
+        <p:spPr>
+          <a:xfrm>
+            <a:off x="1554480" y="4425696"/>
+            <a:ext cx="9418320" cy="256032"/>
+          </a:xfrm>
+          <a:prstGeom prst="rect">
+            <a:avLst/>
+          </a:prstGeom>
+          <a:noFill/>
+        </p:spPr>
+        <p:txBody>
+          <a:bodyPr wrap="square" anchor="t">
+            <a:spAutoFit/>
+          </a:bodyPr>
+          <a:lstStyle/>
+          <a:p>
+            <a:pPr algn="l"/>
+            <a:r>
+              <a:rPr sz="1050" b="0">
+                <a:solidFill>
+                  <a:srgbClr val="7C3AED"/>
+                </a:solidFill>
+                <a:latin typeface="Arial"/>
+              </a:rPr>
+              <a:t>Style: professional, concise, high contrast and accessible</a:t>
+            </a:r>
+          </a:p>
+        </p:txBody>
+      </p:sp>
+      <p:sp>
+        <p:nvSpPr>
+          <p:cNvPr id="29" name="TextBox 28"/>
+          <p:cNvSpPr txBox="1"/>
+          <p:nvPr/>
+        </p:nvSpPr>
+        <p:spPr>
+          <a:xfrm>
+            <a:off x="960120" y="4709160"/>
+            <a:ext cx="384048" cy="246888"/>
+          </a:xfrm>
+          <a:prstGeom prst="rect">
+            <a:avLst/>
+          </a:prstGeom>
+          <a:noFill/>
+        </p:spPr>
+        <p:txBody>
+          <a:bodyPr wrap="square" anchor="t">
+            <a:spAutoFit/>
+          </a:bodyPr>
+          <a:lstStyle/>
+          <a:p>
+            <a:pPr algn="r"/>
+            <a:r>
+              <a:rPr sz="900" b="0">
+                <a:solidFill>
+                  <a:srgbClr val="5B6372"/>
+                </a:solidFill>
+                <a:latin typeface="Arial"/>
+              </a:rPr>
+              <a:t>11</a:t>
+            </a:r>
+          </a:p>
+        </p:txBody>
+      </p:sp>
+      <p:sp>
+        <p:nvSpPr>
+          <p:cNvPr id="30" name="TextBox 29"/>
+          <p:cNvSpPr txBox="1"/>
+          <p:nvPr/>
+        </p:nvSpPr>
+        <p:spPr>
+          <a:xfrm>
+            <a:off x="1554480" y="4709160"/>
+            <a:ext cx="9418320" cy="256032"/>
+          </a:xfrm>
+          <a:prstGeom prst="rect">
+            <a:avLst/>
+          </a:prstGeom>
+          <a:noFill/>
+        </p:spPr>
+        <p:txBody>
+          <a:bodyPr wrap="square" anchor="t">
+            <a:spAutoFit/>
+          </a:bodyPr>
+          <a:lstStyle/>
+          <a:p>
+            <a:pPr algn="l"/>
+            <a:r>
+              <a:rPr sz="1050" b="0">
+                <a:solidFill>
+                  <a:srgbClr val="7C3AED"/>
+                </a:solidFill>
+                <a:latin typeface="Arial"/>
+              </a:rPr>
+              <a:t>Format: Wide for PowerPoint unless the brief requires Portrait</a:t>
+            </a:r>
+          </a:p>
+        </p:txBody>
+      </p:sp>
+      <p:sp>
+        <p:nvSpPr>
+          <p:cNvPr id="31" name="TextBox 30"/>
+          <p:cNvSpPr txBox="1"/>
+          <p:nvPr/>
+        </p:nvSpPr>
+        <p:spPr>
+          <a:xfrm>
+            <a:off x="960120" y="4992624"/>
+            <a:ext cx="384048" cy="246888"/>
+          </a:xfrm>
+          <a:prstGeom prst="rect">
+            <a:avLst/>
+          </a:prstGeom>
+          <a:noFill/>
+        </p:spPr>
+        <p:txBody>
+          <a:bodyPr wrap="square" anchor="t">
+            <a:spAutoFit/>
+          </a:bodyPr>
+          <a:lstStyle/>
+          <a:p>
+            <a:pPr algn="r"/>
+            <a:r>
+              <a:rPr sz="900" b="0">
+                <a:solidFill>
+                  <a:srgbClr val="5B6372"/>
+                </a:solidFill>
+                <a:latin typeface="Arial"/>
+              </a:rPr>
+              <a:t>12</a:t>
+            </a:r>
+          </a:p>
+        </p:txBody>
+      </p:sp>
+      <p:sp>
+        <p:nvSpPr>
+          <p:cNvPr id="32" name="TextBox 31"/>
+          <p:cNvSpPr txBox="1"/>
+          <p:nvPr/>
+        </p:nvSpPr>
+        <p:spPr>
+          <a:xfrm>
+            <a:off x="1554480" y="4992624"/>
+            <a:ext cx="9418320" cy="256032"/>
+          </a:xfrm>
+          <a:prstGeom prst="rect">
+            <a:avLst/>
+          </a:prstGeom>
+          <a:noFill/>
+        </p:spPr>
+        <p:txBody>
+          <a:bodyPr wrap="square" anchor="t">
+            <a:spAutoFit/>
+          </a:bodyPr>
+          <a:lstStyle/>
+          <a:p>
+            <a:pPr algn="l"/>
+            <a:r>
+              <a:rPr sz="1050" b="0">
+                <a:solidFill>
+                  <a:srgbClr val="7C3AED"/>
+                </a:solidFill>
+                <a:latin typeface="Arial"/>
+              </a:rPr>
+              <a:t>Source rule: use only the attached approved or synthetic course data; include period and source; do not invent facts</a:t>
             </a:r>
           </a:p>
         </p:txBody>
@@ -5482,11 +5888,11 @@
             <a:avLst/>
           </a:prstGeom>
           <a:solidFill>
-            <a:srgbClr val="10B981"/>
+            <a:srgbClr val="1F6FEB"/>
           </a:solidFill>
           <a:ln>
             <a:solidFill>
-              <a:srgbClr val="10B981"/>
+              <a:srgbClr val="1F6FEB"/>
             </a:solidFill>
           </a:ln>
         </p:spPr>
@@ -5538,11 +5944,11 @@
             <a:r>
               <a:rPr sz="1100" b="1">
                 <a:solidFill>
-                  <a:srgbClr val="10B981"/>
+                  <a:srgbClr val="1F6FEB"/>
                 </a:solidFill>
                 <a:latin typeface="Arial"/>
               </a:rPr>
-              <a:t>ACTIVITY 03 · FRAMEWORK</a:t>
+              <a:t>ACTIVITY 03 · CONTEXT</a:t>
             </a:r>
           </a:p>
         </p:txBody>
@@ -5577,7 +5983,7 @@
                 </a:solidFill>
                 <a:latin typeface="Arial"/>
               </a:rPr>
-              <a:t>Template-to-Infographic Workflow</a:t>
+              <a:t>The Scenario</a:t>
             </a:r>
           </a:p>
         </p:txBody>
@@ -5670,8 +6076,8 @@
         </p:nvSpPr>
         <p:spPr>
           <a:xfrm>
-            <a:off x="685800" y="1920240"/>
-            <a:ext cx="1997049" cy="3566160"/>
+            <a:off x="731520" y="1783080"/>
+            <a:ext cx="10698480" cy="1691640"/>
           </a:xfrm>
           <a:prstGeom prst="roundRect">
             <a:avLst/>
@@ -5715,8 +6121,8 @@
         </p:nvSpPr>
         <p:spPr>
           <a:xfrm>
-            <a:off x="685800" y="1920240"/>
-            <a:ext cx="73152" cy="3566160"/>
+            <a:off x="731520" y="1783080"/>
+            <a:ext cx="73152" cy="1691640"/>
           </a:xfrm>
           <a:prstGeom prst="rect">
             <a:avLst/>
@@ -5760,7 +6166,7 @@
         </p:nvSpPr>
         <p:spPr>
           <a:xfrm>
-            <a:off x="886968" y="2139696"/>
+            <a:off x="932688" y="2002536"/>
             <a:ext cx="438912" cy="438912"/>
           </a:xfrm>
           <a:prstGeom prst="roundRect">
@@ -5805,7 +6211,7 @@
         </p:nvSpPr>
         <p:spPr>
           <a:xfrm>
-            <a:off x="886968" y="2148840"/>
+            <a:off x="932688" y="2011680"/>
             <a:ext cx="438912" cy="420624"/>
           </a:xfrm>
           <a:prstGeom prst="rect">
@@ -5840,8 +6246,8 @@
         </p:nvSpPr>
         <p:spPr>
           <a:xfrm>
-            <a:off x="1490472" y="2103120"/>
-            <a:ext cx="1009497" cy="329184"/>
+            <a:off x="1536192" y="1965960"/>
+            <a:ext cx="9710928" cy="329184"/>
           </a:xfrm>
           <a:prstGeom prst="rect">
             <a:avLst/>
@@ -5862,7 +6268,7 @@
                 </a:solidFill>
                 <a:latin typeface="Arial"/>
               </a:rPr>
-              <a:t>Select</a:t>
+              <a:t>Context</a:t>
             </a:r>
           </a:p>
         </p:txBody>
@@ -5875,8 +6281,8 @@
         </p:nvSpPr>
         <p:spPr>
           <a:xfrm>
-            <a:off x="1490472" y="2487168"/>
-            <a:ext cx="1009497" cy="2852928"/>
+            <a:off x="1536192" y="2350008"/>
+            <a:ext cx="9710928" cy="978408"/>
           </a:xfrm>
           <a:prstGeom prst="rect">
             <a:avLst/>
@@ -5897,7 +6303,7 @@
                 </a:solidFill>
                 <a:latin typeface="Arial"/>
               </a:rPr>
-              <a:t>Choose a template by relationship and output format.</a:t>
+              <a:t>Northstar HR needs a five-milestone onboarding timeline for managers: account request, manager plan, Day 1 orientation, Day 7 skills check and Day 30 outcome review.</a:t>
             </a:r>
           </a:p>
         </p:txBody>
@@ -5910,8 +6316,8 @@
         </p:nvSpPr>
         <p:spPr>
           <a:xfrm>
-            <a:off x="2884017" y="1920240"/>
-            <a:ext cx="1997049" cy="3566160"/>
+            <a:off x="731520" y="3776472"/>
+            <a:ext cx="10698480" cy="1691640"/>
           </a:xfrm>
           <a:prstGeom prst="roundRect">
             <a:avLst/>
@@ -5955,8 +6361,8 @@
         </p:nvSpPr>
         <p:spPr>
           <a:xfrm>
-            <a:off x="2884017" y="1920240"/>
-            <a:ext cx="73152" cy="3566160"/>
+            <a:off x="731520" y="3776472"/>
+            <a:ext cx="73152" cy="1691640"/>
           </a:xfrm>
           <a:prstGeom prst="rect">
             <a:avLst/>
@@ -6000,7 +6406,7 @@
         </p:nvSpPr>
         <p:spPr>
           <a:xfrm>
-            <a:off x="3085185" y="2139696"/>
+            <a:off x="932688" y="3995928"/>
             <a:ext cx="438912" cy="438912"/>
           </a:xfrm>
           <a:prstGeom prst="roundRect">
@@ -6045,7 +6451,7 @@
         </p:nvSpPr>
         <p:spPr>
           <a:xfrm>
-            <a:off x="3085185" y="2148840"/>
+            <a:off x="932688" y="4005072"/>
             <a:ext cx="438912" cy="420624"/>
           </a:xfrm>
           <a:prstGeom prst="rect">
@@ -6080,8 +6486,8 @@
         </p:nvSpPr>
         <p:spPr>
           <a:xfrm>
-            <a:off x="3688689" y="2103120"/>
-            <a:ext cx="1009497" cy="329184"/>
+            <a:off x="1536192" y="3959352"/>
+            <a:ext cx="9710928" cy="329184"/>
           </a:xfrm>
           <a:prstGeom prst="rect">
             <a:avLst/>
@@ -6102,7 +6508,7 @@
                 </a:solidFill>
                 <a:latin typeface="Arial"/>
               </a:rPr>
-              <a:t>Audit</a:t>
+              <a:t>Decision pressure</a:t>
             </a:r>
           </a:p>
         </p:txBody>
@@ -6115,8 +6521,8 @@
         </p:nvSpPr>
         <p:spPr>
           <a:xfrm>
-            <a:off x="3688689" y="2487168"/>
-            <a:ext cx="1009497" cy="2852928"/>
+            <a:off x="1536192" y="4343400"/>
+            <a:ext cx="9710928" cy="978408"/>
           </a:xfrm>
           <a:prstGeom prst="rect">
             <a:avLst/>
@@ -6137,727 +6543,7 @@
                 </a:solidFill>
                 <a:latin typeface="Arial"/>
               </a:rPr>
-              <a:t>Identify all placeholders and inherited decorative elements.</a:t>
-            </a:r>
-          </a:p>
-        </p:txBody>
-      </p:sp>
-      <p:sp>
-        <p:nvSpPr>
-          <p:cNvPr id="20" name="Rounded Rectangle 19"/>
-          <p:cNvSpPr/>
-          <p:nvPr/>
-        </p:nvSpPr>
-        <p:spPr>
-          <a:xfrm>
-            <a:off x="5082235" y="1920240"/>
-            <a:ext cx="1997049" cy="3566160"/>
-          </a:xfrm>
-          <a:prstGeom prst="roundRect">
-            <a:avLst/>
-          </a:prstGeom>
-          <a:solidFill>
-            <a:srgbClr val="F5F8FC"/>
-          </a:solidFill>
-          <a:ln>
-            <a:solidFill>
-              <a:srgbClr val="E2E8F0"/>
-            </a:solidFill>
-          </a:ln>
-        </p:spPr>
-        <p:style>
-          <a:lnRef idx="1">
-            <a:schemeClr val="accent1"/>
-          </a:lnRef>
-          <a:fillRef idx="3">
-            <a:schemeClr val="accent1"/>
-          </a:fillRef>
-          <a:effectRef idx="2">
-            <a:schemeClr val="accent1"/>
-          </a:effectRef>
-          <a:fontRef idx="minor">
-            <a:schemeClr val="lt1"/>
-          </a:fontRef>
-        </p:style>
-        <p:txBody>
-          <a:bodyPr rtlCol="0" anchor="ctr"/>
-          <a:lstStyle/>
-          <a:p>
-            <a:pPr algn="ctr"/>
-          </a:p>
-        </p:txBody>
-      </p:sp>
-      <p:sp>
-        <p:nvSpPr>
-          <p:cNvPr id="21" name="Rectangle 20"/>
-          <p:cNvSpPr/>
-          <p:nvPr/>
-        </p:nvSpPr>
-        <p:spPr>
-          <a:xfrm>
-            <a:off x="5082235" y="1920240"/>
-            <a:ext cx="73152" cy="3566160"/>
-          </a:xfrm>
-          <a:prstGeom prst="rect">
-            <a:avLst/>
-          </a:prstGeom>
-          <a:solidFill>
-            <a:srgbClr val="7C3AED"/>
-          </a:solidFill>
-          <a:ln>
-            <a:solidFill>
-              <a:srgbClr val="7C3AED"/>
-            </a:solidFill>
-          </a:ln>
-        </p:spPr>
-        <p:style>
-          <a:lnRef idx="1">
-            <a:schemeClr val="accent1"/>
-          </a:lnRef>
-          <a:fillRef idx="3">
-            <a:schemeClr val="accent1"/>
-          </a:fillRef>
-          <a:effectRef idx="2">
-            <a:schemeClr val="accent1"/>
-          </a:effectRef>
-          <a:fontRef idx="minor">
-            <a:schemeClr val="lt1"/>
-          </a:fontRef>
-        </p:style>
-        <p:txBody>
-          <a:bodyPr rtlCol="0" anchor="ctr"/>
-          <a:lstStyle/>
-          <a:p>
-            <a:pPr algn="ctr"/>
-          </a:p>
-        </p:txBody>
-      </p:sp>
-      <p:sp>
-        <p:nvSpPr>
-          <p:cNvPr id="22" name="Rounded Rectangle 21"/>
-          <p:cNvSpPr/>
-          <p:nvPr/>
-        </p:nvSpPr>
-        <p:spPr>
-          <a:xfrm>
-            <a:off x="5283403" y="2139696"/>
-            <a:ext cx="438912" cy="438912"/>
-          </a:xfrm>
-          <a:prstGeom prst="roundRect">
-            <a:avLst/>
-          </a:prstGeom>
-          <a:solidFill>
-            <a:srgbClr val="7C3AED"/>
-          </a:solidFill>
-          <a:ln>
-            <a:solidFill>
-              <a:srgbClr val="7C3AED"/>
-            </a:solidFill>
-          </a:ln>
-        </p:spPr>
-        <p:style>
-          <a:lnRef idx="1">
-            <a:schemeClr val="accent1"/>
-          </a:lnRef>
-          <a:fillRef idx="3">
-            <a:schemeClr val="accent1"/>
-          </a:fillRef>
-          <a:effectRef idx="2">
-            <a:schemeClr val="accent1"/>
-          </a:effectRef>
-          <a:fontRef idx="minor">
-            <a:schemeClr val="lt1"/>
-          </a:fontRef>
-        </p:style>
-        <p:txBody>
-          <a:bodyPr rtlCol="0" anchor="ctr"/>
-          <a:lstStyle/>
-          <a:p>
-            <a:pPr algn="ctr"/>
-          </a:p>
-        </p:txBody>
-      </p:sp>
-      <p:sp>
-        <p:nvSpPr>
-          <p:cNvPr id="23" name="TextBox 22"/>
-          <p:cNvSpPr txBox="1"/>
-          <p:nvPr/>
-        </p:nvSpPr>
-        <p:spPr>
-          <a:xfrm>
-            <a:off x="5283403" y="2148840"/>
-            <a:ext cx="438912" cy="420624"/>
-          </a:xfrm>
-          <a:prstGeom prst="rect">
-            <a:avLst/>
-          </a:prstGeom>
-          <a:noFill/>
-        </p:spPr>
-        <p:txBody>
-          <a:bodyPr wrap="square" anchor="ctr">
-            <a:spAutoFit/>
-          </a:bodyPr>
-          <a:lstStyle/>
-          <a:p>
-            <a:pPr algn="ctr"/>
-            <a:r>
-              <a:rPr sz="1400" b="1">
-                <a:solidFill>
-                  <a:srgbClr val="FFFFFF"/>
-                </a:solidFill>
-                <a:latin typeface="Arial"/>
-              </a:rPr>
-              <a:t>3</a:t>
-            </a:r>
-          </a:p>
-        </p:txBody>
-      </p:sp>
-      <p:sp>
-        <p:nvSpPr>
-          <p:cNvPr id="24" name="TextBox 23"/>
-          <p:cNvSpPr txBox="1"/>
-          <p:nvPr/>
-        </p:nvSpPr>
-        <p:spPr>
-          <a:xfrm>
-            <a:off x="5886907" y="2103120"/>
-            <a:ext cx="1009497" cy="329184"/>
-          </a:xfrm>
-          <a:prstGeom prst="rect">
-            <a:avLst/>
-          </a:prstGeom>
-          <a:noFill/>
-        </p:spPr>
-        <p:txBody>
-          <a:bodyPr wrap="square" anchor="t">
-            <a:spAutoFit/>
-          </a:bodyPr>
-          <a:lstStyle/>
-          <a:p>
-            <a:pPr algn="l"/>
-            <a:r>
-              <a:rPr sz="1400" b="1">
-                <a:solidFill>
-                  <a:srgbClr val="7C3AED"/>
-                </a:solidFill>
-                <a:latin typeface="Arial"/>
-              </a:rPr>
-              <a:t>Replace</a:t>
-            </a:r>
-          </a:p>
-        </p:txBody>
-      </p:sp>
-      <p:sp>
-        <p:nvSpPr>
-          <p:cNvPr id="25" name="TextBox 24"/>
-          <p:cNvSpPr txBox="1"/>
-          <p:nvPr/>
-        </p:nvSpPr>
-        <p:spPr>
-          <a:xfrm>
-            <a:off x="5886907" y="2487168"/>
-            <a:ext cx="1009497" cy="2852928"/>
-          </a:xfrm>
-          <a:prstGeom prst="rect">
-            <a:avLst/>
-          </a:prstGeom>
-          <a:noFill/>
-        </p:spPr>
-        <p:txBody>
-          <a:bodyPr wrap="square" anchor="t">
-            <a:spAutoFit/>
-          </a:bodyPr>
-          <a:lstStyle/>
-          <a:p>
-            <a:pPr algn="l"/>
-            <a:r>
-              <a:rPr sz="1150" b="0">
-                <a:solidFill>
-                  <a:srgbClr val="161B26"/>
-                </a:solidFill>
-                <a:latin typeface="Arial"/>
-              </a:rPr>
-              <a:t>Insert the approved message, data and visuals.</a:t>
-            </a:r>
-          </a:p>
-        </p:txBody>
-      </p:sp>
-      <p:sp>
-        <p:nvSpPr>
-          <p:cNvPr id="26" name="Rounded Rectangle 25"/>
-          <p:cNvSpPr/>
-          <p:nvPr/>
-        </p:nvSpPr>
-        <p:spPr>
-          <a:xfrm>
-            <a:off x="7280452" y="1920240"/>
-            <a:ext cx="1997049" cy="3566160"/>
-          </a:xfrm>
-          <a:prstGeom prst="roundRect">
-            <a:avLst/>
-          </a:prstGeom>
-          <a:solidFill>
-            <a:srgbClr val="F5F8FC"/>
-          </a:solidFill>
-          <a:ln>
-            <a:solidFill>
-              <a:srgbClr val="E2E8F0"/>
-            </a:solidFill>
-          </a:ln>
-        </p:spPr>
-        <p:style>
-          <a:lnRef idx="1">
-            <a:schemeClr val="accent1"/>
-          </a:lnRef>
-          <a:fillRef idx="3">
-            <a:schemeClr val="accent1"/>
-          </a:fillRef>
-          <a:effectRef idx="2">
-            <a:schemeClr val="accent1"/>
-          </a:effectRef>
-          <a:fontRef idx="minor">
-            <a:schemeClr val="lt1"/>
-          </a:fontRef>
-        </p:style>
-        <p:txBody>
-          <a:bodyPr rtlCol="0" anchor="ctr"/>
-          <a:lstStyle/>
-          <a:p>
-            <a:pPr algn="ctr"/>
-          </a:p>
-        </p:txBody>
-      </p:sp>
-      <p:sp>
-        <p:nvSpPr>
-          <p:cNvPr id="27" name="Rectangle 26"/>
-          <p:cNvSpPr/>
-          <p:nvPr/>
-        </p:nvSpPr>
-        <p:spPr>
-          <a:xfrm>
-            <a:off x="7280452" y="1920240"/>
-            <a:ext cx="73152" cy="3566160"/>
-          </a:xfrm>
-          <a:prstGeom prst="rect">
-            <a:avLst/>
-          </a:prstGeom>
-          <a:solidFill>
-            <a:srgbClr val="F59E0B"/>
-          </a:solidFill>
-          <a:ln>
-            <a:solidFill>
-              <a:srgbClr val="F59E0B"/>
-            </a:solidFill>
-          </a:ln>
-        </p:spPr>
-        <p:style>
-          <a:lnRef idx="1">
-            <a:schemeClr val="accent1"/>
-          </a:lnRef>
-          <a:fillRef idx="3">
-            <a:schemeClr val="accent1"/>
-          </a:fillRef>
-          <a:effectRef idx="2">
-            <a:schemeClr val="accent1"/>
-          </a:effectRef>
-          <a:fontRef idx="minor">
-            <a:schemeClr val="lt1"/>
-          </a:fontRef>
-        </p:style>
-        <p:txBody>
-          <a:bodyPr rtlCol="0" anchor="ctr"/>
-          <a:lstStyle/>
-          <a:p>
-            <a:pPr algn="ctr"/>
-          </a:p>
-        </p:txBody>
-      </p:sp>
-      <p:sp>
-        <p:nvSpPr>
-          <p:cNvPr id="28" name="Rounded Rectangle 27"/>
-          <p:cNvSpPr/>
-          <p:nvPr/>
-        </p:nvSpPr>
-        <p:spPr>
-          <a:xfrm>
-            <a:off x="7481620" y="2139696"/>
-            <a:ext cx="438912" cy="438912"/>
-          </a:xfrm>
-          <a:prstGeom prst="roundRect">
-            <a:avLst/>
-          </a:prstGeom>
-          <a:solidFill>
-            <a:srgbClr val="F59E0B"/>
-          </a:solidFill>
-          <a:ln>
-            <a:solidFill>
-              <a:srgbClr val="F59E0B"/>
-            </a:solidFill>
-          </a:ln>
-        </p:spPr>
-        <p:style>
-          <a:lnRef idx="1">
-            <a:schemeClr val="accent1"/>
-          </a:lnRef>
-          <a:fillRef idx="3">
-            <a:schemeClr val="accent1"/>
-          </a:fillRef>
-          <a:effectRef idx="2">
-            <a:schemeClr val="accent1"/>
-          </a:effectRef>
-          <a:fontRef idx="minor">
-            <a:schemeClr val="lt1"/>
-          </a:fontRef>
-        </p:style>
-        <p:txBody>
-          <a:bodyPr rtlCol="0" anchor="ctr"/>
-          <a:lstStyle/>
-          <a:p>
-            <a:pPr algn="ctr"/>
-          </a:p>
-        </p:txBody>
-      </p:sp>
-      <p:sp>
-        <p:nvSpPr>
-          <p:cNvPr id="29" name="TextBox 28"/>
-          <p:cNvSpPr txBox="1"/>
-          <p:nvPr/>
-        </p:nvSpPr>
-        <p:spPr>
-          <a:xfrm>
-            <a:off x="7481620" y="2148840"/>
-            <a:ext cx="438912" cy="420624"/>
-          </a:xfrm>
-          <a:prstGeom prst="rect">
-            <a:avLst/>
-          </a:prstGeom>
-          <a:noFill/>
-        </p:spPr>
-        <p:txBody>
-          <a:bodyPr wrap="square" anchor="ctr">
-            <a:spAutoFit/>
-          </a:bodyPr>
-          <a:lstStyle/>
-          <a:p>
-            <a:pPr algn="ctr"/>
-            <a:r>
-              <a:rPr sz="1400" b="1">
-                <a:solidFill>
-                  <a:srgbClr val="FFFFFF"/>
-                </a:solidFill>
-                <a:latin typeface="Arial"/>
-              </a:rPr>
-              <a:t>4</a:t>
-            </a:r>
-          </a:p>
-        </p:txBody>
-      </p:sp>
-      <p:sp>
-        <p:nvSpPr>
-          <p:cNvPr id="30" name="TextBox 29"/>
-          <p:cNvSpPr txBox="1"/>
-          <p:nvPr/>
-        </p:nvSpPr>
-        <p:spPr>
-          <a:xfrm>
-            <a:off x="8085124" y="2103120"/>
-            <a:ext cx="1009497" cy="329184"/>
-          </a:xfrm>
-          <a:prstGeom prst="rect">
-            <a:avLst/>
-          </a:prstGeom>
-          <a:noFill/>
-        </p:spPr>
-        <p:txBody>
-          <a:bodyPr wrap="square" anchor="t">
-            <a:spAutoFit/>
-          </a:bodyPr>
-          <a:lstStyle/>
-          <a:p>
-            <a:pPr algn="l"/>
-            <a:r>
-              <a:rPr sz="1400" b="1">
-                <a:solidFill>
-                  <a:srgbClr val="F59E0B"/>
-                </a:solidFill>
-                <a:latin typeface="Arial"/>
-              </a:rPr>
-              <a:t>Align</a:t>
-            </a:r>
-          </a:p>
-        </p:txBody>
-      </p:sp>
-      <p:sp>
-        <p:nvSpPr>
-          <p:cNvPr id="31" name="TextBox 30"/>
-          <p:cNvSpPr txBox="1"/>
-          <p:nvPr/>
-        </p:nvSpPr>
-        <p:spPr>
-          <a:xfrm>
-            <a:off x="8085124" y="2487168"/>
-            <a:ext cx="1009497" cy="2852928"/>
-          </a:xfrm>
-          <a:prstGeom prst="rect">
-            <a:avLst/>
-          </a:prstGeom>
-          <a:noFill/>
-        </p:spPr>
-        <p:txBody>
-          <a:bodyPr wrap="square" anchor="t">
-            <a:spAutoFit/>
-          </a:bodyPr>
-          <a:lstStyle/>
-          <a:p>
-            <a:pPr algn="l"/>
-            <a:r>
-              <a:rPr sz="1150" b="0">
-                <a:solidFill>
-                  <a:srgbClr val="161B26"/>
-                </a:solidFill>
-                <a:latin typeface="Arial"/>
-              </a:rPr>
-              <a:t>Apply brand, grid, hierarchy and accessibility.</a:t>
-            </a:r>
-          </a:p>
-        </p:txBody>
-      </p:sp>
-      <p:sp>
-        <p:nvSpPr>
-          <p:cNvPr id="32" name="Rounded Rectangle 31"/>
-          <p:cNvSpPr/>
-          <p:nvPr/>
-        </p:nvSpPr>
-        <p:spPr>
-          <a:xfrm>
-            <a:off x="9478670" y="1920240"/>
-            <a:ext cx="1997049" cy="3566160"/>
-          </a:xfrm>
-          <a:prstGeom prst="roundRect">
-            <a:avLst/>
-          </a:prstGeom>
-          <a:solidFill>
-            <a:srgbClr val="F5F8FC"/>
-          </a:solidFill>
-          <a:ln>
-            <a:solidFill>
-              <a:srgbClr val="E2E8F0"/>
-            </a:solidFill>
-          </a:ln>
-        </p:spPr>
-        <p:style>
-          <a:lnRef idx="1">
-            <a:schemeClr val="accent1"/>
-          </a:lnRef>
-          <a:fillRef idx="3">
-            <a:schemeClr val="accent1"/>
-          </a:fillRef>
-          <a:effectRef idx="2">
-            <a:schemeClr val="accent1"/>
-          </a:effectRef>
-          <a:fontRef idx="minor">
-            <a:schemeClr val="lt1"/>
-          </a:fontRef>
-        </p:style>
-        <p:txBody>
-          <a:bodyPr rtlCol="0" anchor="ctr"/>
-          <a:lstStyle/>
-          <a:p>
-            <a:pPr algn="ctr"/>
-          </a:p>
-        </p:txBody>
-      </p:sp>
-      <p:sp>
-        <p:nvSpPr>
-          <p:cNvPr id="33" name="Rectangle 32"/>
-          <p:cNvSpPr/>
-          <p:nvPr/>
-        </p:nvSpPr>
-        <p:spPr>
-          <a:xfrm>
-            <a:off x="9478670" y="1920240"/>
-            <a:ext cx="73152" cy="3566160"/>
-          </a:xfrm>
-          <a:prstGeom prst="rect">
-            <a:avLst/>
-          </a:prstGeom>
-          <a:solidFill>
-            <a:srgbClr val="1F6FEB"/>
-          </a:solidFill>
-          <a:ln>
-            <a:solidFill>
-              <a:srgbClr val="1F6FEB"/>
-            </a:solidFill>
-          </a:ln>
-        </p:spPr>
-        <p:style>
-          <a:lnRef idx="1">
-            <a:schemeClr val="accent1"/>
-          </a:lnRef>
-          <a:fillRef idx="3">
-            <a:schemeClr val="accent1"/>
-          </a:fillRef>
-          <a:effectRef idx="2">
-            <a:schemeClr val="accent1"/>
-          </a:effectRef>
-          <a:fontRef idx="minor">
-            <a:schemeClr val="lt1"/>
-          </a:fontRef>
-        </p:style>
-        <p:txBody>
-          <a:bodyPr rtlCol="0" anchor="ctr"/>
-          <a:lstStyle/>
-          <a:p>
-            <a:pPr algn="ctr"/>
-          </a:p>
-        </p:txBody>
-      </p:sp>
-      <p:sp>
-        <p:nvSpPr>
-          <p:cNvPr id="34" name="Rounded Rectangle 33"/>
-          <p:cNvSpPr/>
-          <p:nvPr/>
-        </p:nvSpPr>
-        <p:spPr>
-          <a:xfrm>
-            <a:off x="9679838" y="2139696"/>
-            <a:ext cx="438912" cy="438912"/>
-          </a:xfrm>
-          <a:prstGeom prst="roundRect">
-            <a:avLst/>
-          </a:prstGeom>
-          <a:solidFill>
-            <a:srgbClr val="1F6FEB"/>
-          </a:solidFill>
-          <a:ln>
-            <a:solidFill>
-              <a:srgbClr val="1F6FEB"/>
-            </a:solidFill>
-          </a:ln>
-        </p:spPr>
-        <p:style>
-          <a:lnRef idx="1">
-            <a:schemeClr val="accent1"/>
-          </a:lnRef>
-          <a:fillRef idx="3">
-            <a:schemeClr val="accent1"/>
-          </a:fillRef>
-          <a:effectRef idx="2">
-            <a:schemeClr val="accent1"/>
-          </a:effectRef>
-          <a:fontRef idx="minor">
-            <a:schemeClr val="lt1"/>
-          </a:fontRef>
-        </p:style>
-        <p:txBody>
-          <a:bodyPr rtlCol="0" anchor="ctr"/>
-          <a:lstStyle/>
-          <a:p>
-            <a:pPr algn="ctr"/>
-          </a:p>
-        </p:txBody>
-      </p:sp>
-      <p:sp>
-        <p:nvSpPr>
-          <p:cNvPr id="35" name="TextBox 34"/>
-          <p:cNvSpPr txBox="1"/>
-          <p:nvPr/>
-        </p:nvSpPr>
-        <p:spPr>
-          <a:xfrm>
-            <a:off x="9679838" y="2148840"/>
-            <a:ext cx="438912" cy="420624"/>
-          </a:xfrm>
-          <a:prstGeom prst="rect">
-            <a:avLst/>
-          </a:prstGeom>
-          <a:noFill/>
-        </p:spPr>
-        <p:txBody>
-          <a:bodyPr wrap="square" anchor="ctr">
-            <a:spAutoFit/>
-          </a:bodyPr>
-          <a:lstStyle/>
-          <a:p>
-            <a:pPr algn="ctr"/>
-            <a:r>
-              <a:rPr sz="1400" b="1">
-                <a:solidFill>
-                  <a:srgbClr val="FFFFFF"/>
-                </a:solidFill>
-                <a:latin typeface="Arial"/>
-              </a:rPr>
-              <a:t>5</a:t>
-            </a:r>
-          </a:p>
-        </p:txBody>
-      </p:sp>
-      <p:sp>
-        <p:nvSpPr>
-          <p:cNvPr id="36" name="TextBox 35"/>
-          <p:cNvSpPr txBox="1"/>
-          <p:nvPr/>
-        </p:nvSpPr>
-        <p:spPr>
-          <a:xfrm>
-            <a:off x="10283342" y="2103120"/>
-            <a:ext cx="1009497" cy="329184"/>
-          </a:xfrm>
-          <a:prstGeom prst="rect">
-            <a:avLst/>
-          </a:prstGeom>
-          <a:noFill/>
-        </p:spPr>
-        <p:txBody>
-          <a:bodyPr wrap="square" anchor="t">
-            <a:spAutoFit/>
-          </a:bodyPr>
-          <a:lstStyle/>
-          <a:p>
-            <a:pPr algn="l"/>
-            <a:r>
-              <a:rPr sz="1400" b="1">
-                <a:solidFill>
-                  <a:srgbClr val="1F6FEB"/>
-                </a:solidFill>
-                <a:latin typeface="Arial"/>
-              </a:rPr>
-              <a:t>Export</a:t>
-            </a:r>
-          </a:p>
-        </p:txBody>
-      </p:sp>
-      <p:sp>
-        <p:nvSpPr>
-          <p:cNvPr id="37" name="TextBox 36"/>
-          <p:cNvSpPr txBox="1"/>
-          <p:nvPr/>
-        </p:nvSpPr>
-        <p:spPr>
-          <a:xfrm>
-            <a:off x="10283342" y="2487168"/>
-            <a:ext cx="1009497" cy="2852928"/>
-          </a:xfrm>
-          <a:prstGeom prst="rect">
-            <a:avLst/>
-          </a:prstGeom>
-          <a:noFill/>
-        </p:spPr>
-        <p:txBody>
-          <a:bodyPr wrap="square" anchor="t">
-            <a:spAutoFit/>
-          </a:bodyPr>
-          <a:lstStyle/>
-          <a:p>
-            <a:pPr algn="l"/>
-            <a:r>
-              <a:rPr sz="1150" b="0">
-                <a:solidFill>
-                  <a:srgbClr val="161B26"/>
-                </a:solidFill>
-                <a:latin typeface="Arial"/>
-              </a:rPr>
-              <a:t>Test PPTX, PDF and image output.</a:t>
+              <a:t>Use Microsoft 365 Copilot Create &gt; Design an infographic with the supplied structured prompt and approved brief. Refine the selected Wide timeline in PowerPoint; do not let generated decoration replace dated evidence.</a:t>
             </a:r>
           </a:p>
         </p:txBody>
@@ -6940,11 +6626,11 @@
             <a:avLst/>
           </a:prstGeom>
           <a:solidFill>
-            <a:srgbClr val="7C3AED"/>
+            <a:srgbClr val="10B981"/>
           </a:solidFill>
           <a:ln>
             <a:solidFill>
-              <a:srgbClr val="7C3AED"/>
+              <a:srgbClr val="10B981"/>
             </a:solidFill>
           </a:ln>
         </p:spPr>
@@ -6996,11 +6682,11 @@
             <a:r>
               <a:rPr sz="1100" b="1">
                 <a:solidFill>
-                  <a:srgbClr val="7C3AED"/>
+                  <a:srgbClr val="10B981"/>
                 </a:solidFill>
                 <a:latin typeface="Arial"/>
               </a:rPr>
-              <a:t>ACTIVITY 03 · EXAMPLE</a:t>
+              <a:t>ACTIVITY 03 · FRAMEWORK</a:t>
             </a:r>
           </a:p>
         </p:txBody>
@@ -7035,7 +6721,7 @@
                 </a:solidFill>
                 <a:latin typeface="Arial"/>
               </a:rPr>
-              <a:t>Worked Output</a:t>
+              <a:t>Copilot-to-Timeline Workflow</a:t>
             </a:r>
           </a:p>
         </p:txBody>
@@ -7128,8 +6814,8 @@
         </p:nvSpPr>
         <p:spPr>
           <a:xfrm>
-            <a:off x="731520" y="1783080"/>
-            <a:ext cx="3401568" cy="1719072"/>
+            <a:off x="685800" y="1920240"/>
+            <a:ext cx="1997049" cy="3566160"/>
           </a:xfrm>
           <a:prstGeom prst="roundRect">
             <a:avLst/>
@@ -7173,8 +6859,8 @@
         </p:nvSpPr>
         <p:spPr>
           <a:xfrm>
-            <a:off x="731520" y="1783080"/>
-            <a:ext cx="73152" cy="1719072"/>
+            <a:off x="685800" y="1920240"/>
+            <a:ext cx="73152" cy="3566160"/>
           </a:xfrm>
           <a:prstGeom prst="rect">
             <a:avLst/>
@@ -7218,7 +6904,7 @@
         </p:nvSpPr>
         <p:spPr>
           <a:xfrm>
-            <a:off x="932688" y="2002536"/>
+            <a:off x="886968" y="2139696"/>
             <a:ext cx="438912" cy="438912"/>
           </a:xfrm>
           <a:prstGeom prst="roundRect">
@@ -7263,7 +6949,7 @@
         </p:nvSpPr>
         <p:spPr>
           <a:xfrm>
-            <a:off x="932688" y="2011680"/>
+            <a:off x="886968" y="2148840"/>
             <a:ext cx="438912" cy="420624"/>
           </a:xfrm>
           <a:prstGeom prst="rect">
@@ -7298,8 +6984,8 @@
         </p:nvSpPr>
         <p:spPr>
           <a:xfrm>
-            <a:off x="1536192" y="1965960"/>
-            <a:ext cx="2414016" cy="329184"/>
+            <a:off x="1490472" y="2103120"/>
+            <a:ext cx="1009497" cy="329184"/>
           </a:xfrm>
           <a:prstGeom prst="rect">
             <a:avLst/>
@@ -7320,7 +7006,7 @@
                 </a:solidFill>
                 <a:latin typeface="Arial"/>
               </a:rPr>
-              <a:t>Purpose</a:t>
+              <a:t>Describe</a:t>
             </a:r>
           </a:p>
         </p:txBody>
@@ -7333,8 +7019,8 @@
         </p:nvSpPr>
         <p:spPr>
           <a:xfrm>
-            <a:off x="1536192" y="2350008"/>
-            <a:ext cx="2414016" cy="1005839"/>
+            <a:off x="1490472" y="2487168"/>
+            <a:ext cx="1009497" cy="2852928"/>
           </a:xfrm>
           <a:prstGeom prst="rect">
             <a:avLst/>
@@ -7355,7 +7041,7 @@
                 </a:solidFill>
                 <a:latin typeface="Arial"/>
               </a:rPr>
-              <a:t>Does the layout answer the audience question?</a:t>
+              <a:t>Specify the timeline topic, five milestones, audience and decision.</a:t>
             </a:r>
           </a:p>
         </p:txBody>
@@ -7368,8 +7054,8 @@
         </p:nvSpPr>
         <p:spPr>
           <a:xfrm>
-            <a:off x="4315968" y="1783080"/>
-            <a:ext cx="3401568" cy="1719072"/>
+            <a:off x="2884017" y="1920240"/>
+            <a:ext cx="1997049" cy="3566160"/>
           </a:xfrm>
           <a:prstGeom prst="roundRect">
             <a:avLst/>
@@ -7413,8 +7099,8 @@
         </p:nvSpPr>
         <p:spPr>
           <a:xfrm>
-            <a:off x="4315968" y="1783080"/>
-            <a:ext cx="73152" cy="1719072"/>
+            <a:off x="2884017" y="1920240"/>
+            <a:ext cx="73152" cy="3566160"/>
           </a:xfrm>
           <a:prstGeom prst="rect">
             <a:avLst/>
@@ -7458,7 +7144,7 @@
         </p:nvSpPr>
         <p:spPr>
           <a:xfrm>
-            <a:off x="4517136" y="2002536"/>
+            <a:off x="3085185" y="2139696"/>
             <a:ext cx="438912" cy="438912"/>
           </a:xfrm>
           <a:prstGeom prst="roundRect">
@@ -7503,7 +7189,7 @@
         </p:nvSpPr>
         <p:spPr>
           <a:xfrm>
-            <a:off x="4517136" y="2011680"/>
+            <a:off x="3085185" y="2148840"/>
             <a:ext cx="438912" cy="420624"/>
           </a:xfrm>
           <a:prstGeom prst="rect">
@@ -7538,8 +7224,8 @@
         </p:nvSpPr>
         <p:spPr>
           <a:xfrm>
-            <a:off x="5120640" y="1965960"/>
-            <a:ext cx="2414016" cy="329184"/>
+            <a:off x="3688689" y="2103120"/>
+            <a:ext cx="1009497" cy="329184"/>
           </a:xfrm>
           <a:prstGeom prst="rect">
             <a:avLst/>
@@ -7560,7 +7246,7 @@
                 </a:solidFill>
                 <a:latin typeface="Arial"/>
               </a:rPr>
-              <a:t>Content</a:t>
+              <a:t>Ground</a:t>
             </a:r>
           </a:p>
         </p:txBody>
@@ -7573,8 +7259,8 @@
         </p:nvSpPr>
         <p:spPr>
           <a:xfrm>
-            <a:off x="5120640" y="2350008"/>
-            <a:ext cx="2414016" cy="1005839"/>
+            <a:off x="3688689" y="2487168"/>
+            <a:ext cx="1009497" cy="2852928"/>
           </a:xfrm>
           <a:prstGeom prst="rect">
             <a:avLst/>
@@ -7595,7 +7281,7 @@
                 </a:solidFill>
                 <a:latin typeface="Arial"/>
               </a:rPr>
-              <a:t>Are all placeholders replaced and all claims verified?</a:t>
+              <a:t>Add only the approved onboarding brief and dated evidence.</a:t>
             </a:r>
           </a:p>
         </p:txBody>
@@ -7608,8 +7294,8 @@
         </p:nvSpPr>
         <p:spPr>
           <a:xfrm>
-            <a:off x="7900416" y="1783080"/>
-            <a:ext cx="3401568" cy="1719072"/>
+            <a:off x="5082235" y="1920240"/>
+            <a:ext cx="1997049" cy="3566160"/>
           </a:xfrm>
           <a:prstGeom prst="roundRect">
             <a:avLst/>
@@ -7653,8 +7339,8 @@
         </p:nvSpPr>
         <p:spPr>
           <a:xfrm>
-            <a:off x="7900416" y="1783080"/>
-            <a:ext cx="73152" cy="1719072"/>
+            <a:off x="5082235" y="1920240"/>
+            <a:ext cx="73152" cy="3566160"/>
           </a:xfrm>
           <a:prstGeom prst="rect">
             <a:avLst/>
@@ -7698,7 +7384,7 @@
         </p:nvSpPr>
         <p:spPr>
           <a:xfrm>
-            <a:off x="8101584" y="2002536"/>
+            <a:off x="5283403" y="2139696"/>
             <a:ext cx="438912" cy="438912"/>
           </a:xfrm>
           <a:prstGeom prst="roundRect">
@@ -7743,7 +7429,7 @@
         </p:nvSpPr>
         <p:spPr>
           <a:xfrm>
-            <a:off x="8101584" y="2011680"/>
+            <a:off x="5283403" y="2148840"/>
             <a:ext cx="438912" cy="420624"/>
           </a:xfrm>
           <a:prstGeom prst="rect">
@@ -7778,8 +7464,8 @@
         </p:nvSpPr>
         <p:spPr>
           <a:xfrm>
-            <a:off x="8705088" y="1965960"/>
-            <a:ext cx="2414016" cy="329184"/>
+            <a:off x="5886907" y="2103120"/>
+            <a:ext cx="1009497" cy="329184"/>
           </a:xfrm>
           <a:prstGeom prst="rect">
             <a:avLst/>
@@ -7800,7 +7486,7 @@
                 </a:solidFill>
                 <a:latin typeface="Arial"/>
               </a:rPr>
-              <a:t>Hierarchy</a:t>
+              <a:t>Generate</a:t>
             </a:r>
           </a:p>
         </p:txBody>
@@ -7813,8 +7499,8 @@
         </p:nvSpPr>
         <p:spPr>
           <a:xfrm>
-            <a:off x="8705088" y="2350008"/>
-            <a:ext cx="2414016" cy="1005839"/>
+            <a:off x="5886907" y="2487168"/>
+            <a:ext cx="1009497" cy="2852928"/>
           </a:xfrm>
           <a:prstGeom prst="rect">
             <a:avLst/>
@@ -7835,7 +7521,7 @@
                 </a:solidFill>
                 <a:latin typeface="Arial"/>
               </a:rPr>
-              <a:t>Is the reading order obvious at thumbnail size?</a:t>
+              <a:t>Choose Wide, apply brand and create two timeline directions.</a:t>
             </a:r>
           </a:p>
         </p:txBody>
@@ -7848,8 +7534,8 @@
         </p:nvSpPr>
         <p:spPr>
           <a:xfrm>
-            <a:off x="731520" y="3776472"/>
-            <a:ext cx="3401568" cy="1719072"/>
+            <a:off x="7280452" y="1920240"/>
+            <a:ext cx="1997049" cy="3566160"/>
           </a:xfrm>
           <a:prstGeom prst="roundRect">
             <a:avLst/>
@@ -7893,8 +7579,8 @@
         </p:nvSpPr>
         <p:spPr>
           <a:xfrm>
-            <a:off x="731520" y="3776472"/>
-            <a:ext cx="73152" cy="1719072"/>
+            <a:off x="7280452" y="1920240"/>
+            <a:ext cx="73152" cy="3566160"/>
           </a:xfrm>
           <a:prstGeom prst="rect">
             <a:avLst/>
@@ -7938,7 +7624,7 @@
         </p:nvSpPr>
         <p:spPr>
           <a:xfrm>
-            <a:off x="932688" y="3995928"/>
+            <a:off x="7481620" y="2139696"/>
             <a:ext cx="438912" cy="438912"/>
           </a:xfrm>
           <a:prstGeom prst="roundRect">
@@ -7983,7 +7669,7 @@
         </p:nvSpPr>
         <p:spPr>
           <a:xfrm>
-            <a:off x="932688" y="4005072"/>
+            <a:off x="7481620" y="2148840"/>
             <a:ext cx="438912" cy="420624"/>
           </a:xfrm>
           <a:prstGeom prst="rect">
@@ -8018,8 +7704,8 @@
         </p:nvSpPr>
         <p:spPr>
           <a:xfrm>
-            <a:off x="1536192" y="3959352"/>
-            <a:ext cx="2414016" cy="329184"/>
+            <a:off x="8085124" y="2103120"/>
+            <a:ext cx="1009497" cy="329184"/>
           </a:xfrm>
           <a:prstGeom prst="rect">
             <a:avLst/>
@@ -8040,7 +7726,7 @@
                 </a:solidFill>
                 <a:latin typeface="Arial"/>
               </a:rPr>
-              <a:t>Brand</a:t>
+              <a:t>Refine</a:t>
             </a:r>
           </a:p>
         </p:txBody>
@@ -8053,8 +7739,8 @@
         </p:nvSpPr>
         <p:spPr>
           <a:xfrm>
-            <a:off x="1536192" y="4343400"/>
-            <a:ext cx="2414016" cy="1005839"/>
+            <a:off x="8085124" y="2487168"/>
+            <a:ext cx="1009497" cy="2852928"/>
           </a:xfrm>
           <a:prstGeom prst="rect">
             <a:avLst/>
@@ -8075,7 +7761,7 @@
                 </a:solidFill>
                 <a:latin typeface="Arial"/>
               </a:rPr>
-              <a:t>Are palette, type, logo and tone approved?</a:t>
+              <a:t>Correct sequence, labels, spacing and accessibility in PowerPoint.</a:t>
             </a:r>
           </a:p>
         </p:txBody>
@@ -8088,8 +7774,8 @@
         </p:nvSpPr>
         <p:spPr>
           <a:xfrm>
-            <a:off x="4315968" y="3776472"/>
-            <a:ext cx="3401568" cy="1719072"/>
+            <a:off x="9478670" y="1920240"/>
+            <a:ext cx="1997049" cy="3566160"/>
           </a:xfrm>
           <a:prstGeom prst="roundRect">
             <a:avLst/>
@@ -8133,8 +7819,8 @@
         </p:nvSpPr>
         <p:spPr>
           <a:xfrm>
-            <a:off x="4315968" y="3776472"/>
-            <a:ext cx="73152" cy="1719072"/>
+            <a:off x="9478670" y="1920240"/>
+            <a:ext cx="73152" cy="3566160"/>
           </a:xfrm>
           <a:prstGeom prst="rect">
             <a:avLst/>
@@ -8178,7 +7864,7 @@
         </p:nvSpPr>
         <p:spPr>
           <a:xfrm>
-            <a:off x="4517136" y="3995928"/>
+            <a:off x="9679838" y="2139696"/>
             <a:ext cx="438912" cy="438912"/>
           </a:xfrm>
           <a:prstGeom prst="roundRect">
@@ -8223,7 +7909,7 @@
         </p:nvSpPr>
         <p:spPr>
           <a:xfrm>
-            <a:off x="4517136" y="4005072"/>
+            <a:off x="9679838" y="2148840"/>
             <a:ext cx="438912" cy="420624"/>
           </a:xfrm>
           <a:prstGeom prst="rect">
@@ -8258,8 +7944,8 @@
         </p:nvSpPr>
         <p:spPr>
           <a:xfrm>
-            <a:off x="5120640" y="3959352"/>
-            <a:ext cx="2414016" cy="329184"/>
+            <a:off x="10283342" y="2103120"/>
+            <a:ext cx="1009497" cy="329184"/>
           </a:xfrm>
           <a:prstGeom prst="rect">
             <a:avLst/>
@@ -8280,7 +7966,7 @@
                 </a:solidFill>
                 <a:latin typeface="Arial"/>
               </a:rPr>
-              <a:t>Access</a:t>
+              <a:t>Export</a:t>
             </a:r>
           </a:p>
         </p:txBody>
@@ -8293,8 +7979,8 @@
         </p:nvSpPr>
         <p:spPr>
           <a:xfrm>
-            <a:off x="5120640" y="4343400"/>
-            <a:ext cx="2414016" cy="1005839"/>
+            <a:off x="10283342" y="2487168"/>
+            <a:ext cx="1009497" cy="2852928"/>
           </a:xfrm>
           <a:prstGeom prst="rect">
             <a:avLst/>
@@ -8315,247 +8001,7 @@
                 </a:solidFill>
                 <a:latin typeface="Arial"/>
               </a:rPr>
-              <a:t>Are contrast, labels and alt text adequate?</a:t>
-            </a:r>
-          </a:p>
-        </p:txBody>
-      </p:sp>
-      <p:sp>
-        <p:nvSpPr>
-          <p:cNvPr id="38" name="Rounded Rectangle 37"/>
-          <p:cNvSpPr/>
-          <p:nvPr/>
-        </p:nvSpPr>
-        <p:spPr>
-          <a:xfrm>
-            <a:off x="7900416" y="3776472"/>
-            <a:ext cx="3401568" cy="1719072"/>
-          </a:xfrm>
-          <a:prstGeom prst="roundRect">
-            <a:avLst/>
-          </a:prstGeom>
-          <a:solidFill>
-            <a:srgbClr val="F5F8FC"/>
-          </a:solidFill>
-          <a:ln>
-            <a:solidFill>
-              <a:srgbClr val="E2E8F0"/>
-            </a:solidFill>
-          </a:ln>
-        </p:spPr>
-        <p:style>
-          <a:lnRef idx="1">
-            <a:schemeClr val="accent1"/>
-          </a:lnRef>
-          <a:fillRef idx="3">
-            <a:schemeClr val="accent1"/>
-          </a:fillRef>
-          <a:effectRef idx="2">
-            <a:schemeClr val="accent1"/>
-          </a:effectRef>
-          <a:fontRef idx="minor">
-            <a:schemeClr val="lt1"/>
-          </a:fontRef>
-        </p:style>
-        <p:txBody>
-          <a:bodyPr rtlCol="0" anchor="ctr"/>
-          <a:lstStyle/>
-          <a:p>
-            <a:pPr algn="ctr"/>
-          </a:p>
-        </p:txBody>
-      </p:sp>
-      <p:sp>
-        <p:nvSpPr>
-          <p:cNvPr id="39" name="Rectangle 38"/>
-          <p:cNvSpPr/>
-          <p:nvPr/>
-        </p:nvSpPr>
-        <p:spPr>
-          <a:xfrm>
-            <a:off x="7900416" y="3776472"/>
-            <a:ext cx="73152" cy="1719072"/>
-          </a:xfrm>
-          <a:prstGeom prst="rect">
-            <a:avLst/>
-          </a:prstGeom>
-          <a:solidFill>
-            <a:srgbClr val="10B981"/>
-          </a:solidFill>
-          <a:ln>
-            <a:solidFill>
-              <a:srgbClr val="10B981"/>
-            </a:solidFill>
-          </a:ln>
-        </p:spPr>
-        <p:style>
-          <a:lnRef idx="1">
-            <a:schemeClr val="accent1"/>
-          </a:lnRef>
-          <a:fillRef idx="3">
-            <a:schemeClr val="accent1"/>
-          </a:fillRef>
-          <a:effectRef idx="2">
-            <a:schemeClr val="accent1"/>
-          </a:effectRef>
-          <a:fontRef idx="minor">
-            <a:schemeClr val="lt1"/>
-          </a:fontRef>
-        </p:style>
-        <p:txBody>
-          <a:bodyPr rtlCol="0" anchor="ctr"/>
-          <a:lstStyle/>
-          <a:p>
-            <a:pPr algn="ctr"/>
-          </a:p>
-        </p:txBody>
-      </p:sp>
-      <p:sp>
-        <p:nvSpPr>
-          <p:cNvPr id="40" name="Rounded Rectangle 39"/>
-          <p:cNvSpPr/>
-          <p:nvPr/>
-        </p:nvSpPr>
-        <p:spPr>
-          <a:xfrm>
-            <a:off x="8101584" y="3995928"/>
-            <a:ext cx="438912" cy="438912"/>
-          </a:xfrm>
-          <a:prstGeom prst="roundRect">
-            <a:avLst/>
-          </a:prstGeom>
-          <a:solidFill>
-            <a:srgbClr val="10B981"/>
-          </a:solidFill>
-          <a:ln>
-            <a:solidFill>
-              <a:srgbClr val="10B981"/>
-            </a:solidFill>
-          </a:ln>
-        </p:spPr>
-        <p:style>
-          <a:lnRef idx="1">
-            <a:schemeClr val="accent1"/>
-          </a:lnRef>
-          <a:fillRef idx="3">
-            <a:schemeClr val="accent1"/>
-          </a:fillRef>
-          <a:effectRef idx="2">
-            <a:schemeClr val="accent1"/>
-          </a:effectRef>
-          <a:fontRef idx="minor">
-            <a:schemeClr val="lt1"/>
-          </a:fontRef>
-        </p:style>
-        <p:txBody>
-          <a:bodyPr rtlCol="0" anchor="ctr"/>
-          <a:lstStyle/>
-          <a:p>
-            <a:pPr algn="ctr"/>
-          </a:p>
-        </p:txBody>
-      </p:sp>
-      <p:sp>
-        <p:nvSpPr>
-          <p:cNvPr id="41" name="TextBox 40"/>
-          <p:cNvSpPr txBox="1"/>
-          <p:nvPr/>
-        </p:nvSpPr>
-        <p:spPr>
-          <a:xfrm>
-            <a:off x="8101584" y="4005072"/>
-            <a:ext cx="438912" cy="420624"/>
-          </a:xfrm>
-          <a:prstGeom prst="rect">
-            <a:avLst/>
-          </a:prstGeom>
-          <a:noFill/>
-        </p:spPr>
-        <p:txBody>
-          <a:bodyPr wrap="square" anchor="ctr">
-            <a:spAutoFit/>
-          </a:bodyPr>
-          <a:lstStyle/>
-          <a:p>
-            <a:pPr algn="ctr"/>
-            <a:r>
-              <a:rPr sz="1400" b="1">
-                <a:solidFill>
-                  <a:srgbClr val="FFFFFF"/>
-                </a:solidFill>
-                <a:latin typeface="Arial"/>
-              </a:rPr>
-              <a:t>6</a:t>
-            </a:r>
-          </a:p>
-        </p:txBody>
-      </p:sp>
-      <p:sp>
-        <p:nvSpPr>
-          <p:cNvPr id="42" name="TextBox 41"/>
-          <p:cNvSpPr txBox="1"/>
-          <p:nvPr/>
-        </p:nvSpPr>
-        <p:spPr>
-          <a:xfrm>
-            <a:off x="8705088" y="3959352"/>
-            <a:ext cx="2414016" cy="329184"/>
-          </a:xfrm>
-          <a:prstGeom prst="rect">
-            <a:avLst/>
-          </a:prstGeom>
-          <a:noFill/>
-        </p:spPr>
-        <p:txBody>
-          <a:bodyPr wrap="square" anchor="t">
-            <a:spAutoFit/>
-          </a:bodyPr>
-          <a:lstStyle/>
-          <a:p>
-            <a:pPr algn="l"/>
-            <a:r>
-              <a:rPr sz="1400" b="1">
-                <a:solidFill>
-                  <a:srgbClr val="10B981"/>
-                </a:solidFill>
-                <a:latin typeface="Arial"/>
-              </a:rPr>
-              <a:t>Output</a:t>
-            </a:r>
-          </a:p>
-        </p:txBody>
-      </p:sp>
-      <p:sp>
-        <p:nvSpPr>
-          <p:cNvPr id="43" name="TextBox 42"/>
-          <p:cNvSpPr txBox="1"/>
-          <p:nvPr/>
-        </p:nvSpPr>
-        <p:spPr>
-          <a:xfrm>
-            <a:off x="8705088" y="4343400"/>
-            <a:ext cx="2414016" cy="1005839"/>
-          </a:xfrm>
-          <a:prstGeom prst="rect">
-            <a:avLst/>
-          </a:prstGeom>
-          <a:noFill/>
-        </p:spPr>
-        <p:txBody>
-          <a:bodyPr wrap="square" anchor="t">
-            <a:spAutoFit/>
-          </a:bodyPr>
-          <a:lstStyle/>
-          <a:p>
-            <a:pPr algn="l"/>
-            <a:r>
-              <a:rPr sz="1150" b="0">
-                <a:solidFill>
-                  <a:srgbClr val="161B26"/>
-                </a:solidFill>
-                <a:latin typeface="Arial"/>
-              </a:rPr>
-              <a:t>Do PPTX, PDF and JPG render as intended?</a:t>
+              <a:t>Test PPTX, PDF and image output.</a:t>
             </a:r>
           </a:p>
         </p:txBody>
@@ -8638,11 +8084,11 @@
             <a:avLst/>
           </a:prstGeom>
           <a:solidFill>
-            <a:srgbClr val="1F6FEB"/>
+            <a:srgbClr val="7C3AED"/>
           </a:solidFill>
           <a:ln>
             <a:solidFill>
-              <a:srgbClr val="1F6FEB"/>
+              <a:srgbClr val="7C3AED"/>
             </a:solidFill>
           </a:ln>
         </p:spPr>
@@ -8694,11 +8140,11 @@
             <a:r>
               <a:rPr sz="1100" b="1">
                 <a:solidFill>
-                  <a:srgbClr val="1F6FEB"/>
+                  <a:srgbClr val="7C3AED"/>
                 </a:solidFill>
                 <a:latin typeface="Arial"/>
               </a:rPr>
-              <a:t>ACTIVITY 03 · ACCEPTANCE</a:t>
+              <a:t>ACTIVITY 03 · EXAMPLE</a:t>
             </a:r>
           </a:p>
         </p:txBody>
@@ -8733,7 +8179,7 @@
                 </a:solidFill>
                 <a:latin typeface="Arial"/>
               </a:rPr>
-              <a:t>What Good Looks Like</a:t>
+              <a:t>Worked Output</a:t>
             </a:r>
           </a:p>
         </p:txBody>
@@ -8826,10 +8272,55 @@
         </p:nvSpPr>
         <p:spPr>
           <a:xfrm>
-            <a:off x="749808" y="1810512"/>
-            <a:ext cx="10652760" cy="1005840"/>
+            <a:off x="731520" y="1783080"/>
+            <a:ext cx="3401568" cy="1719072"/>
           </a:xfrm>
           <a:prstGeom prst="roundRect">
+            <a:avLst/>
+          </a:prstGeom>
+          <a:solidFill>
+            <a:srgbClr val="F5F8FC"/>
+          </a:solidFill>
+          <a:ln>
+            <a:solidFill>
+              <a:srgbClr val="E2E8F0"/>
+            </a:solidFill>
+          </a:ln>
+        </p:spPr>
+        <p:style>
+          <a:lnRef idx="1">
+            <a:schemeClr val="accent1"/>
+          </a:lnRef>
+          <a:fillRef idx="3">
+            <a:schemeClr val="accent1"/>
+          </a:fillRef>
+          <a:effectRef idx="2">
+            <a:schemeClr val="accent1"/>
+          </a:effectRef>
+          <a:fontRef idx="minor">
+            <a:schemeClr val="lt1"/>
+          </a:fontRef>
+        </p:style>
+        <p:txBody>
+          <a:bodyPr rtlCol="0" anchor="ctr"/>
+          <a:lstStyle/>
+          <a:p>
+            <a:pPr algn="ctr"/>
+          </a:p>
+        </p:txBody>
+      </p:sp>
+      <p:sp>
+        <p:nvSpPr>
+          <p:cNvPr id="9" name="Rectangle 8"/>
+          <p:cNvSpPr/>
+          <p:nvPr/>
+        </p:nvSpPr>
+        <p:spPr>
+          <a:xfrm>
+            <a:off x="731520" y="1783080"/>
+            <a:ext cx="73152" cy="1719072"/>
+          </a:xfrm>
+          <a:prstGeom prst="rect">
             <a:avLst/>
           </a:prstGeom>
           <a:solidFill>
@@ -8865,14 +8356,59 @@
       </p:sp>
       <p:sp>
         <p:nvSpPr>
-          <p:cNvPr id="9" name="TextBox 8"/>
+          <p:cNvPr id="10" name="Rounded Rectangle 9"/>
+          <p:cNvSpPr/>
+          <p:nvPr/>
+        </p:nvSpPr>
+        <p:spPr>
+          <a:xfrm>
+            <a:off x="932688" y="2002536"/>
+            <a:ext cx="438912" cy="438912"/>
+          </a:xfrm>
+          <a:prstGeom prst="roundRect">
+            <a:avLst/>
+          </a:prstGeom>
+          <a:solidFill>
+            <a:srgbClr val="1F6FEB"/>
+          </a:solidFill>
+          <a:ln>
+            <a:solidFill>
+              <a:srgbClr val="1F6FEB"/>
+            </a:solidFill>
+          </a:ln>
+        </p:spPr>
+        <p:style>
+          <a:lnRef idx="1">
+            <a:schemeClr val="accent1"/>
+          </a:lnRef>
+          <a:fillRef idx="3">
+            <a:schemeClr val="accent1"/>
+          </a:fillRef>
+          <a:effectRef idx="2">
+            <a:schemeClr val="accent1"/>
+          </a:effectRef>
+          <a:fontRef idx="minor">
+            <a:schemeClr val="lt1"/>
+          </a:fontRef>
+        </p:style>
+        <p:txBody>
+          <a:bodyPr rtlCol="0" anchor="ctr"/>
+          <a:lstStyle/>
+          <a:p>
+            <a:pPr algn="ctr"/>
+          </a:p>
+        </p:txBody>
+      </p:sp>
+      <p:sp>
+        <p:nvSpPr>
+          <p:cNvPr id="11" name="TextBox 10"/>
           <p:cNvSpPr txBox="1"/>
           <p:nvPr/>
         </p:nvSpPr>
         <p:spPr>
           <a:xfrm>
-            <a:off x="1051560" y="2011680"/>
-            <a:ext cx="10058400" cy="566928"/>
+            <a:off x="932688" y="2011680"/>
+            <a:ext cx="438912" cy="420624"/>
           </a:xfrm>
           <a:prstGeom prst="rect">
             <a:avLst/>
@@ -8887,13 +8423,1621 @@
           <a:p>
             <a:pPr algn="ctr"/>
             <a:r>
-              <a:rPr sz="1900" b="1">
+              <a:rPr sz="1400" b="1">
                 <a:solidFill>
                   <a:srgbClr val="FFFFFF"/>
                 </a:solidFill>
                 <a:latin typeface="Arial"/>
               </a:rPr>
-              <a:t>An editable portrait template-based infographic in PPTX, PDF and JPG</a:t>
+              <a:t>1</a:t>
+            </a:r>
+          </a:p>
+        </p:txBody>
+      </p:sp>
+      <p:sp>
+        <p:nvSpPr>
+          <p:cNvPr id="12" name="TextBox 11"/>
+          <p:cNvSpPr txBox="1"/>
+          <p:nvPr/>
+        </p:nvSpPr>
+        <p:spPr>
+          <a:xfrm>
+            <a:off x="1536192" y="1965960"/>
+            <a:ext cx="2414016" cy="329184"/>
+          </a:xfrm>
+          <a:prstGeom prst="rect">
+            <a:avLst/>
+          </a:prstGeom>
+          <a:noFill/>
+        </p:spPr>
+        <p:txBody>
+          <a:bodyPr wrap="square" anchor="t">
+            <a:spAutoFit/>
+          </a:bodyPr>
+          <a:lstStyle/>
+          <a:p>
+            <a:pPr algn="l"/>
+            <a:r>
+              <a:rPr sz="1400" b="1">
+                <a:solidFill>
+                  <a:srgbClr val="1F6FEB"/>
+                </a:solidFill>
+                <a:latin typeface="Arial"/>
+              </a:rPr>
+              <a:t>Purpose</a:t>
+            </a:r>
+          </a:p>
+        </p:txBody>
+      </p:sp>
+      <p:sp>
+        <p:nvSpPr>
+          <p:cNvPr id="13" name="TextBox 12"/>
+          <p:cNvSpPr txBox="1"/>
+          <p:nvPr/>
+        </p:nvSpPr>
+        <p:spPr>
+          <a:xfrm>
+            <a:off x="1536192" y="2350008"/>
+            <a:ext cx="2414016" cy="1005839"/>
+          </a:xfrm>
+          <a:prstGeom prst="rect">
+            <a:avLst/>
+          </a:prstGeom>
+          <a:noFill/>
+        </p:spPr>
+        <p:txBody>
+          <a:bodyPr wrap="square" anchor="t">
+            <a:spAutoFit/>
+          </a:bodyPr>
+          <a:lstStyle/>
+          <a:p>
+            <a:pPr algn="l"/>
+            <a:r>
+              <a:rPr sz="1150" b="0">
+                <a:solidFill>
+                  <a:srgbClr val="161B26"/>
+                </a:solidFill>
+                <a:latin typeface="Arial"/>
+              </a:rPr>
+              <a:t>Does the layout answer the audience question?</a:t>
+            </a:r>
+          </a:p>
+        </p:txBody>
+      </p:sp>
+      <p:sp>
+        <p:nvSpPr>
+          <p:cNvPr id="14" name="Rounded Rectangle 13"/>
+          <p:cNvSpPr/>
+          <p:nvPr/>
+        </p:nvSpPr>
+        <p:spPr>
+          <a:xfrm>
+            <a:off x="4315968" y="1783080"/>
+            <a:ext cx="3401568" cy="1719072"/>
+          </a:xfrm>
+          <a:prstGeom prst="roundRect">
+            <a:avLst/>
+          </a:prstGeom>
+          <a:solidFill>
+            <a:srgbClr val="F5F8FC"/>
+          </a:solidFill>
+          <a:ln>
+            <a:solidFill>
+              <a:srgbClr val="E2E8F0"/>
+            </a:solidFill>
+          </a:ln>
+        </p:spPr>
+        <p:style>
+          <a:lnRef idx="1">
+            <a:schemeClr val="accent1"/>
+          </a:lnRef>
+          <a:fillRef idx="3">
+            <a:schemeClr val="accent1"/>
+          </a:fillRef>
+          <a:effectRef idx="2">
+            <a:schemeClr val="accent1"/>
+          </a:effectRef>
+          <a:fontRef idx="minor">
+            <a:schemeClr val="lt1"/>
+          </a:fontRef>
+        </p:style>
+        <p:txBody>
+          <a:bodyPr rtlCol="0" anchor="ctr"/>
+          <a:lstStyle/>
+          <a:p>
+            <a:pPr algn="ctr"/>
+          </a:p>
+        </p:txBody>
+      </p:sp>
+      <p:sp>
+        <p:nvSpPr>
+          <p:cNvPr id="15" name="Rectangle 14"/>
+          <p:cNvSpPr/>
+          <p:nvPr/>
+        </p:nvSpPr>
+        <p:spPr>
+          <a:xfrm>
+            <a:off x="4315968" y="1783080"/>
+            <a:ext cx="73152" cy="1719072"/>
+          </a:xfrm>
+          <a:prstGeom prst="rect">
+            <a:avLst/>
+          </a:prstGeom>
+          <a:solidFill>
+            <a:srgbClr val="10B981"/>
+          </a:solidFill>
+          <a:ln>
+            <a:solidFill>
+              <a:srgbClr val="10B981"/>
+            </a:solidFill>
+          </a:ln>
+        </p:spPr>
+        <p:style>
+          <a:lnRef idx="1">
+            <a:schemeClr val="accent1"/>
+          </a:lnRef>
+          <a:fillRef idx="3">
+            <a:schemeClr val="accent1"/>
+          </a:fillRef>
+          <a:effectRef idx="2">
+            <a:schemeClr val="accent1"/>
+          </a:effectRef>
+          <a:fontRef idx="minor">
+            <a:schemeClr val="lt1"/>
+          </a:fontRef>
+        </p:style>
+        <p:txBody>
+          <a:bodyPr rtlCol="0" anchor="ctr"/>
+          <a:lstStyle/>
+          <a:p>
+            <a:pPr algn="ctr"/>
+          </a:p>
+        </p:txBody>
+      </p:sp>
+      <p:sp>
+        <p:nvSpPr>
+          <p:cNvPr id="16" name="Rounded Rectangle 15"/>
+          <p:cNvSpPr/>
+          <p:nvPr/>
+        </p:nvSpPr>
+        <p:spPr>
+          <a:xfrm>
+            <a:off x="4517136" y="2002536"/>
+            <a:ext cx="438912" cy="438912"/>
+          </a:xfrm>
+          <a:prstGeom prst="roundRect">
+            <a:avLst/>
+          </a:prstGeom>
+          <a:solidFill>
+            <a:srgbClr val="10B981"/>
+          </a:solidFill>
+          <a:ln>
+            <a:solidFill>
+              <a:srgbClr val="10B981"/>
+            </a:solidFill>
+          </a:ln>
+        </p:spPr>
+        <p:style>
+          <a:lnRef idx="1">
+            <a:schemeClr val="accent1"/>
+          </a:lnRef>
+          <a:fillRef idx="3">
+            <a:schemeClr val="accent1"/>
+          </a:fillRef>
+          <a:effectRef idx="2">
+            <a:schemeClr val="accent1"/>
+          </a:effectRef>
+          <a:fontRef idx="minor">
+            <a:schemeClr val="lt1"/>
+          </a:fontRef>
+        </p:style>
+        <p:txBody>
+          <a:bodyPr rtlCol="0" anchor="ctr"/>
+          <a:lstStyle/>
+          <a:p>
+            <a:pPr algn="ctr"/>
+          </a:p>
+        </p:txBody>
+      </p:sp>
+      <p:sp>
+        <p:nvSpPr>
+          <p:cNvPr id="17" name="TextBox 16"/>
+          <p:cNvSpPr txBox="1"/>
+          <p:nvPr/>
+        </p:nvSpPr>
+        <p:spPr>
+          <a:xfrm>
+            <a:off x="4517136" y="2011680"/>
+            <a:ext cx="438912" cy="420624"/>
+          </a:xfrm>
+          <a:prstGeom prst="rect">
+            <a:avLst/>
+          </a:prstGeom>
+          <a:noFill/>
+        </p:spPr>
+        <p:txBody>
+          <a:bodyPr wrap="square" anchor="ctr">
+            <a:spAutoFit/>
+          </a:bodyPr>
+          <a:lstStyle/>
+          <a:p>
+            <a:pPr algn="ctr"/>
+            <a:r>
+              <a:rPr sz="1400" b="1">
+                <a:solidFill>
+                  <a:srgbClr val="FFFFFF"/>
+                </a:solidFill>
+                <a:latin typeface="Arial"/>
+              </a:rPr>
+              <a:t>2</a:t>
+            </a:r>
+          </a:p>
+        </p:txBody>
+      </p:sp>
+      <p:sp>
+        <p:nvSpPr>
+          <p:cNvPr id="18" name="TextBox 17"/>
+          <p:cNvSpPr txBox="1"/>
+          <p:nvPr/>
+        </p:nvSpPr>
+        <p:spPr>
+          <a:xfrm>
+            <a:off x="5120640" y="1965960"/>
+            <a:ext cx="2414016" cy="329184"/>
+          </a:xfrm>
+          <a:prstGeom prst="rect">
+            <a:avLst/>
+          </a:prstGeom>
+          <a:noFill/>
+        </p:spPr>
+        <p:txBody>
+          <a:bodyPr wrap="square" anchor="t">
+            <a:spAutoFit/>
+          </a:bodyPr>
+          <a:lstStyle/>
+          <a:p>
+            <a:pPr algn="l"/>
+            <a:r>
+              <a:rPr sz="1400" b="1">
+                <a:solidFill>
+                  <a:srgbClr val="10B981"/>
+                </a:solidFill>
+                <a:latin typeface="Arial"/>
+              </a:rPr>
+              <a:t>Content</a:t>
+            </a:r>
+          </a:p>
+        </p:txBody>
+      </p:sp>
+      <p:sp>
+        <p:nvSpPr>
+          <p:cNvPr id="19" name="TextBox 18"/>
+          <p:cNvSpPr txBox="1"/>
+          <p:nvPr/>
+        </p:nvSpPr>
+        <p:spPr>
+          <a:xfrm>
+            <a:off x="5120640" y="2350008"/>
+            <a:ext cx="2414016" cy="1005839"/>
+          </a:xfrm>
+          <a:prstGeom prst="rect">
+            <a:avLst/>
+          </a:prstGeom>
+          <a:noFill/>
+        </p:spPr>
+        <p:txBody>
+          <a:bodyPr wrap="square" anchor="t">
+            <a:spAutoFit/>
+          </a:bodyPr>
+          <a:lstStyle/>
+          <a:p>
+            <a:pPr algn="l"/>
+            <a:r>
+              <a:rPr sz="1150" b="0">
+                <a:solidFill>
+                  <a:srgbClr val="161B26"/>
+                </a:solidFill>
+                <a:latin typeface="Arial"/>
+              </a:rPr>
+              <a:t>Are all placeholders replaced and all claims verified?</a:t>
+            </a:r>
+          </a:p>
+        </p:txBody>
+      </p:sp>
+      <p:sp>
+        <p:nvSpPr>
+          <p:cNvPr id="20" name="Rounded Rectangle 19"/>
+          <p:cNvSpPr/>
+          <p:nvPr/>
+        </p:nvSpPr>
+        <p:spPr>
+          <a:xfrm>
+            <a:off x="7900416" y="1783080"/>
+            <a:ext cx="3401568" cy="1719072"/>
+          </a:xfrm>
+          <a:prstGeom prst="roundRect">
+            <a:avLst/>
+          </a:prstGeom>
+          <a:solidFill>
+            <a:srgbClr val="F5F8FC"/>
+          </a:solidFill>
+          <a:ln>
+            <a:solidFill>
+              <a:srgbClr val="E2E8F0"/>
+            </a:solidFill>
+          </a:ln>
+        </p:spPr>
+        <p:style>
+          <a:lnRef idx="1">
+            <a:schemeClr val="accent1"/>
+          </a:lnRef>
+          <a:fillRef idx="3">
+            <a:schemeClr val="accent1"/>
+          </a:fillRef>
+          <a:effectRef idx="2">
+            <a:schemeClr val="accent1"/>
+          </a:effectRef>
+          <a:fontRef idx="minor">
+            <a:schemeClr val="lt1"/>
+          </a:fontRef>
+        </p:style>
+        <p:txBody>
+          <a:bodyPr rtlCol="0" anchor="ctr"/>
+          <a:lstStyle/>
+          <a:p>
+            <a:pPr algn="ctr"/>
+          </a:p>
+        </p:txBody>
+      </p:sp>
+      <p:sp>
+        <p:nvSpPr>
+          <p:cNvPr id="21" name="Rectangle 20"/>
+          <p:cNvSpPr/>
+          <p:nvPr/>
+        </p:nvSpPr>
+        <p:spPr>
+          <a:xfrm>
+            <a:off x="7900416" y="1783080"/>
+            <a:ext cx="73152" cy="1719072"/>
+          </a:xfrm>
+          <a:prstGeom prst="rect">
+            <a:avLst/>
+          </a:prstGeom>
+          <a:solidFill>
+            <a:srgbClr val="7C3AED"/>
+          </a:solidFill>
+          <a:ln>
+            <a:solidFill>
+              <a:srgbClr val="7C3AED"/>
+            </a:solidFill>
+          </a:ln>
+        </p:spPr>
+        <p:style>
+          <a:lnRef idx="1">
+            <a:schemeClr val="accent1"/>
+          </a:lnRef>
+          <a:fillRef idx="3">
+            <a:schemeClr val="accent1"/>
+          </a:fillRef>
+          <a:effectRef idx="2">
+            <a:schemeClr val="accent1"/>
+          </a:effectRef>
+          <a:fontRef idx="minor">
+            <a:schemeClr val="lt1"/>
+          </a:fontRef>
+        </p:style>
+        <p:txBody>
+          <a:bodyPr rtlCol="0" anchor="ctr"/>
+          <a:lstStyle/>
+          <a:p>
+            <a:pPr algn="ctr"/>
+          </a:p>
+        </p:txBody>
+      </p:sp>
+      <p:sp>
+        <p:nvSpPr>
+          <p:cNvPr id="22" name="Rounded Rectangle 21"/>
+          <p:cNvSpPr/>
+          <p:nvPr/>
+        </p:nvSpPr>
+        <p:spPr>
+          <a:xfrm>
+            <a:off x="8101584" y="2002536"/>
+            <a:ext cx="438912" cy="438912"/>
+          </a:xfrm>
+          <a:prstGeom prst="roundRect">
+            <a:avLst/>
+          </a:prstGeom>
+          <a:solidFill>
+            <a:srgbClr val="7C3AED"/>
+          </a:solidFill>
+          <a:ln>
+            <a:solidFill>
+              <a:srgbClr val="7C3AED"/>
+            </a:solidFill>
+          </a:ln>
+        </p:spPr>
+        <p:style>
+          <a:lnRef idx="1">
+            <a:schemeClr val="accent1"/>
+          </a:lnRef>
+          <a:fillRef idx="3">
+            <a:schemeClr val="accent1"/>
+          </a:fillRef>
+          <a:effectRef idx="2">
+            <a:schemeClr val="accent1"/>
+          </a:effectRef>
+          <a:fontRef idx="minor">
+            <a:schemeClr val="lt1"/>
+          </a:fontRef>
+        </p:style>
+        <p:txBody>
+          <a:bodyPr rtlCol="0" anchor="ctr"/>
+          <a:lstStyle/>
+          <a:p>
+            <a:pPr algn="ctr"/>
+          </a:p>
+        </p:txBody>
+      </p:sp>
+      <p:sp>
+        <p:nvSpPr>
+          <p:cNvPr id="23" name="TextBox 22"/>
+          <p:cNvSpPr txBox="1"/>
+          <p:nvPr/>
+        </p:nvSpPr>
+        <p:spPr>
+          <a:xfrm>
+            <a:off x="8101584" y="2011680"/>
+            <a:ext cx="438912" cy="420624"/>
+          </a:xfrm>
+          <a:prstGeom prst="rect">
+            <a:avLst/>
+          </a:prstGeom>
+          <a:noFill/>
+        </p:spPr>
+        <p:txBody>
+          <a:bodyPr wrap="square" anchor="ctr">
+            <a:spAutoFit/>
+          </a:bodyPr>
+          <a:lstStyle/>
+          <a:p>
+            <a:pPr algn="ctr"/>
+            <a:r>
+              <a:rPr sz="1400" b="1">
+                <a:solidFill>
+                  <a:srgbClr val="FFFFFF"/>
+                </a:solidFill>
+                <a:latin typeface="Arial"/>
+              </a:rPr>
+              <a:t>3</a:t>
+            </a:r>
+          </a:p>
+        </p:txBody>
+      </p:sp>
+      <p:sp>
+        <p:nvSpPr>
+          <p:cNvPr id="24" name="TextBox 23"/>
+          <p:cNvSpPr txBox="1"/>
+          <p:nvPr/>
+        </p:nvSpPr>
+        <p:spPr>
+          <a:xfrm>
+            <a:off x="8705088" y="1965960"/>
+            <a:ext cx="2414016" cy="329184"/>
+          </a:xfrm>
+          <a:prstGeom prst="rect">
+            <a:avLst/>
+          </a:prstGeom>
+          <a:noFill/>
+        </p:spPr>
+        <p:txBody>
+          <a:bodyPr wrap="square" anchor="t">
+            <a:spAutoFit/>
+          </a:bodyPr>
+          <a:lstStyle/>
+          <a:p>
+            <a:pPr algn="l"/>
+            <a:r>
+              <a:rPr sz="1400" b="1">
+                <a:solidFill>
+                  <a:srgbClr val="7C3AED"/>
+                </a:solidFill>
+                <a:latin typeface="Arial"/>
+              </a:rPr>
+              <a:t>Hierarchy</a:t>
+            </a:r>
+          </a:p>
+        </p:txBody>
+      </p:sp>
+      <p:sp>
+        <p:nvSpPr>
+          <p:cNvPr id="25" name="TextBox 24"/>
+          <p:cNvSpPr txBox="1"/>
+          <p:nvPr/>
+        </p:nvSpPr>
+        <p:spPr>
+          <a:xfrm>
+            <a:off x="8705088" y="2350008"/>
+            <a:ext cx="2414016" cy="1005839"/>
+          </a:xfrm>
+          <a:prstGeom prst="rect">
+            <a:avLst/>
+          </a:prstGeom>
+          <a:noFill/>
+        </p:spPr>
+        <p:txBody>
+          <a:bodyPr wrap="square" anchor="t">
+            <a:spAutoFit/>
+          </a:bodyPr>
+          <a:lstStyle/>
+          <a:p>
+            <a:pPr algn="l"/>
+            <a:r>
+              <a:rPr sz="1150" b="0">
+                <a:solidFill>
+                  <a:srgbClr val="161B26"/>
+                </a:solidFill>
+                <a:latin typeface="Arial"/>
+              </a:rPr>
+              <a:t>Is the reading order obvious at thumbnail size?</a:t>
+            </a:r>
+          </a:p>
+        </p:txBody>
+      </p:sp>
+      <p:sp>
+        <p:nvSpPr>
+          <p:cNvPr id="26" name="Rounded Rectangle 25"/>
+          <p:cNvSpPr/>
+          <p:nvPr/>
+        </p:nvSpPr>
+        <p:spPr>
+          <a:xfrm>
+            <a:off x="731520" y="3776472"/>
+            <a:ext cx="3401568" cy="1719072"/>
+          </a:xfrm>
+          <a:prstGeom prst="roundRect">
+            <a:avLst/>
+          </a:prstGeom>
+          <a:solidFill>
+            <a:srgbClr val="F5F8FC"/>
+          </a:solidFill>
+          <a:ln>
+            <a:solidFill>
+              <a:srgbClr val="E2E8F0"/>
+            </a:solidFill>
+          </a:ln>
+        </p:spPr>
+        <p:style>
+          <a:lnRef idx="1">
+            <a:schemeClr val="accent1"/>
+          </a:lnRef>
+          <a:fillRef idx="3">
+            <a:schemeClr val="accent1"/>
+          </a:fillRef>
+          <a:effectRef idx="2">
+            <a:schemeClr val="accent1"/>
+          </a:effectRef>
+          <a:fontRef idx="minor">
+            <a:schemeClr val="lt1"/>
+          </a:fontRef>
+        </p:style>
+        <p:txBody>
+          <a:bodyPr rtlCol="0" anchor="ctr"/>
+          <a:lstStyle/>
+          <a:p>
+            <a:pPr algn="ctr"/>
+          </a:p>
+        </p:txBody>
+      </p:sp>
+      <p:sp>
+        <p:nvSpPr>
+          <p:cNvPr id="27" name="Rectangle 26"/>
+          <p:cNvSpPr/>
+          <p:nvPr/>
+        </p:nvSpPr>
+        <p:spPr>
+          <a:xfrm>
+            <a:off x="731520" y="3776472"/>
+            <a:ext cx="73152" cy="1719072"/>
+          </a:xfrm>
+          <a:prstGeom prst="rect">
+            <a:avLst/>
+          </a:prstGeom>
+          <a:solidFill>
+            <a:srgbClr val="F59E0B"/>
+          </a:solidFill>
+          <a:ln>
+            <a:solidFill>
+              <a:srgbClr val="F59E0B"/>
+            </a:solidFill>
+          </a:ln>
+        </p:spPr>
+        <p:style>
+          <a:lnRef idx="1">
+            <a:schemeClr val="accent1"/>
+          </a:lnRef>
+          <a:fillRef idx="3">
+            <a:schemeClr val="accent1"/>
+          </a:fillRef>
+          <a:effectRef idx="2">
+            <a:schemeClr val="accent1"/>
+          </a:effectRef>
+          <a:fontRef idx="minor">
+            <a:schemeClr val="lt1"/>
+          </a:fontRef>
+        </p:style>
+        <p:txBody>
+          <a:bodyPr rtlCol="0" anchor="ctr"/>
+          <a:lstStyle/>
+          <a:p>
+            <a:pPr algn="ctr"/>
+          </a:p>
+        </p:txBody>
+      </p:sp>
+      <p:sp>
+        <p:nvSpPr>
+          <p:cNvPr id="28" name="Rounded Rectangle 27"/>
+          <p:cNvSpPr/>
+          <p:nvPr/>
+        </p:nvSpPr>
+        <p:spPr>
+          <a:xfrm>
+            <a:off x="932688" y="3995928"/>
+            <a:ext cx="438912" cy="438912"/>
+          </a:xfrm>
+          <a:prstGeom prst="roundRect">
+            <a:avLst/>
+          </a:prstGeom>
+          <a:solidFill>
+            <a:srgbClr val="F59E0B"/>
+          </a:solidFill>
+          <a:ln>
+            <a:solidFill>
+              <a:srgbClr val="F59E0B"/>
+            </a:solidFill>
+          </a:ln>
+        </p:spPr>
+        <p:style>
+          <a:lnRef idx="1">
+            <a:schemeClr val="accent1"/>
+          </a:lnRef>
+          <a:fillRef idx="3">
+            <a:schemeClr val="accent1"/>
+          </a:fillRef>
+          <a:effectRef idx="2">
+            <a:schemeClr val="accent1"/>
+          </a:effectRef>
+          <a:fontRef idx="minor">
+            <a:schemeClr val="lt1"/>
+          </a:fontRef>
+        </p:style>
+        <p:txBody>
+          <a:bodyPr rtlCol="0" anchor="ctr"/>
+          <a:lstStyle/>
+          <a:p>
+            <a:pPr algn="ctr"/>
+          </a:p>
+        </p:txBody>
+      </p:sp>
+      <p:sp>
+        <p:nvSpPr>
+          <p:cNvPr id="29" name="TextBox 28"/>
+          <p:cNvSpPr txBox="1"/>
+          <p:nvPr/>
+        </p:nvSpPr>
+        <p:spPr>
+          <a:xfrm>
+            <a:off x="932688" y="4005072"/>
+            <a:ext cx="438912" cy="420624"/>
+          </a:xfrm>
+          <a:prstGeom prst="rect">
+            <a:avLst/>
+          </a:prstGeom>
+          <a:noFill/>
+        </p:spPr>
+        <p:txBody>
+          <a:bodyPr wrap="square" anchor="ctr">
+            <a:spAutoFit/>
+          </a:bodyPr>
+          <a:lstStyle/>
+          <a:p>
+            <a:pPr algn="ctr"/>
+            <a:r>
+              <a:rPr sz="1400" b="1">
+                <a:solidFill>
+                  <a:srgbClr val="FFFFFF"/>
+                </a:solidFill>
+                <a:latin typeface="Arial"/>
+              </a:rPr>
+              <a:t>4</a:t>
+            </a:r>
+          </a:p>
+        </p:txBody>
+      </p:sp>
+      <p:sp>
+        <p:nvSpPr>
+          <p:cNvPr id="30" name="TextBox 29"/>
+          <p:cNvSpPr txBox="1"/>
+          <p:nvPr/>
+        </p:nvSpPr>
+        <p:spPr>
+          <a:xfrm>
+            <a:off x="1536192" y="3959352"/>
+            <a:ext cx="2414016" cy="329184"/>
+          </a:xfrm>
+          <a:prstGeom prst="rect">
+            <a:avLst/>
+          </a:prstGeom>
+          <a:noFill/>
+        </p:spPr>
+        <p:txBody>
+          <a:bodyPr wrap="square" anchor="t">
+            <a:spAutoFit/>
+          </a:bodyPr>
+          <a:lstStyle/>
+          <a:p>
+            <a:pPr algn="l"/>
+            <a:r>
+              <a:rPr sz="1400" b="1">
+                <a:solidFill>
+                  <a:srgbClr val="F59E0B"/>
+                </a:solidFill>
+                <a:latin typeface="Arial"/>
+              </a:rPr>
+              <a:t>Brand</a:t>
+            </a:r>
+          </a:p>
+        </p:txBody>
+      </p:sp>
+      <p:sp>
+        <p:nvSpPr>
+          <p:cNvPr id="31" name="TextBox 30"/>
+          <p:cNvSpPr txBox="1"/>
+          <p:nvPr/>
+        </p:nvSpPr>
+        <p:spPr>
+          <a:xfrm>
+            <a:off x="1536192" y="4343400"/>
+            <a:ext cx="2414016" cy="1005839"/>
+          </a:xfrm>
+          <a:prstGeom prst="rect">
+            <a:avLst/>
+          </a:prstGeom>
+          <a:noFill/>
+        </p:spPr>
+        <p:txBody>
+          <a:bodyPr wrap="square" anchor="t">
+            <a:spAutoFit/>
+          </a:bodyPr>
+          <a:lstStyle/>
+          <a:p>
+            <a:pPr algn="l"/>
+            <a:r>
+              <a:rPr sz="1150" b="0">
+                <a:solidFill>
+                  <a:srgbClr val="161B26"/>
+                </a:solidFill>
+                <a:latin typeface="Arial"/>
+              </a:rPr>
+              <a:t>Are palette, type, logo and tone approved?</a:t>
+            </a:r>
+          </a:p>
+        </p:txBody>
+      </p:sp>
+      <p:sp>
+        <p:nvSpPr>
+          <p:cNvPr id="32" name="Rounded Rectangle 31"/>
+          <p:cNvSpPr/>
+          <p:nvPr/>
+        </p:nvSpPr>
+        <p:spPr>
+          <a:xfrm>
+            <a:off x="4315968" y="3776472"/>
+            <a:ext cx="3401568" cy="1719072"/>
+          </a:xfrm>
+          <a:prstGeom prst="roundRect">
+            <a:avLst/>
+          </a:prstGeom>
+          <a:solidFill>
+            <a:srgbClr val="F5F8FC"/>
+          </a:solidFill>
+          <a:ln>
+            <a:solidFill>
+              <a:srgbClr val="E2E8F0"/>
+            </a:solidFill>
+          </a:ln>
+        </p:spPr>
+        <p:style>
+          <a:lnRef idx="1">
+            <a:schemeClr val="accent1"/>
+          </a:lnRef>
+          <a:fillRef idx="3">
+            <a:schemeClr val="accent1"/>
+          </a:fillRef>
+          <a:effectRef idx="2">
+            <a:schemeClr val="accent1"/>
+          </a:effectRef>
+          <a:fontRef idx="minor">
+            <a:schemeClr val="lt1"/>
+          </a:fontRef>
+        </p:style>
+        <p:txBody>
+          <a:bodyPr rtlCol="0" anchor="ctr"/>
+          <a:lstStyle/>
+          <a:p>
+            <a:pPr algn="ctr"/>
+          </a:p>
+        </p:txBody>
+      </p:sp>
+      <p:sp>
+        <p:nvSpPr>
+          <p:cNvPr id="33" name="Rectangle 32"/>
+          <p:cNvSpPr/>
+          <p:nvPr/>
+        </p:nvSpPr>
+        <p:spPr>
+          <a:xfrm>
+            <a:off x="4315968" y="3776472"/>
+            <a:ext cx="73152" cy="1719072"/>
+          </a:xfrm>
+          <a:prstGeom prst="rect">
+            <a:avLst/>
+          </a:prstGeom>
+          <a:solidFill>
+            <a:srgbClr val="1F6FEB"/>
+          </a:solidFill>
+          <a:ln>
+            <a:solidFill>
+              <a:srgbClr val="1F6FEB"/>
+            </a:solidFill>
+          </a:ln>
+        </p:spPr>
+        <p:style>
+          <a:lnRef idx="1">
+            <a:schemeClr val="accent1"/>
+          </a:lnRef>
+          <a:fillRef idx="3">
+            <a:schemeClr val="accent1"/>
+          </a:fillRef>
+          <a:effectRef idx="2">
+            <a:schemeClr val="accent1"/>
+          </a:effectRef>
+          <a:fontRef idx="minor">
+            <a:schemeClr val="lt1"/>
+          </a:fontRef>
+        </p:style>
+        <p:txBody>
+          <a:bodyPr rtlCol="0" anchor="ctr"/>
+          <a:lstStyle/>
+          <a:p>
+            <a:pPr algn="ctr"/>
+          </a:p>
+        </p:txBody>
+      </p:sp>
+      <p:sp>
+        <p:nvSpPr>
+          <p:cNvPr id="34" name="Rounded Rectangle 33"/>
+          <p:cNvSpPr/>
+          <p:nvPr/>
+        </p:nvSpPr>
+        <p:spPr>
+          <a:xfrm>
+            <a:off x="4517136" y="3995928"/>
+            <a:ext cx="438912" cy="438912"/>
+          </a:xfrm>
+          <a:prstGeom prst="roundRect">
+            <a:avLst/>
+          </a:prstGeom>
+          <a:solidFill>
+            <a:srgbClr val="1F6FEB"/>
+          </a:solidFill>
+          <a:ln>
+            <a:solidFill>
+              <a:srgbClr val="1F6FEB"/>
+            </a:solidFill>
+          </a:ln>
+        </p:spPr>
+        <p:style>
+          <a:lnRef idx="1">
+            <a:schemeClr val="accent1"/>
+          </a:lnRef>
+          <a:fillRef idx="3">
+            <a:schemeClr val="accent1"/>
+          </a:fillRef>
+          <a:effectRef idx="2">
+            <a:schemeClr val="accent1"/>
+          </a:effectRef>
+          <a:fontRef idx="minor">
+            <a:schemeClr val="lt1"/>
+          </a:fontRef>
+        </p:style>
+        <p:txBody>
+          <a:bodyPr rtlCol="0" anchor="ctr"/>
+          <a:lstStyle/>
+          <a:p>
+            <a:pPr algn="ctr"/>
+          </a:p>
+        </p:txBody>
+      </p:sp>
+      <p:sp>
+        <p:nvSpPr>
+          <p:cNvPr id="35" name="TextBox 34"/>
+          <p:cNvSpPr txBox="1"/>
+          <p:nvPr/>
+        </p:nvSpPr>
+        <p:spPr>
+          <a:xfrm>
+            <a:off x="4517136" y="4005072"/>
+            <a:ext cx="438912" cy="420624"/>
+          </a:xfrm>
+          <a:prstGeom prst="rect">
+            <a:avLst/>
+          </a:prstGeom>
+          <a:noFill/>
+        </p:spPr>
+        <p:txBody>
+          <a:bodyPr wrap="square" anchor="ctr">
+            <a:spAutoFit/>
+          </a:bodyPr>
+          <a:lstStyle/>
+          <a:p>
+            <a:pPr algn="ctr"/>
+            <a:r>
+              <a:rPr sz="1400" b="1">
+                <a:solidFill>
+                  <a:srgbClr val="FFFFFF"/>
+                </a:solidFill>
+                <a:latin typeface="Arial"/>
+              </a:rPr>
+              <a:t>5</a:t>
+            </a:r>
+          </a:p>
+        </p:txBody>
+      </p:sp>
+      <p:sp>
+        <p:nvSpPr>
+          <p:cNvPr id="36" name="TextBox 35"/>
+          <p:cNvSpPr txBox="1"/>
+          <p:nvPr/>
+        </p:nvSpPr>
+        <p:spPr>
+          <a:xfrm>
+            <a:off x="5120640" y="3959352"/>
+            <a:ext cx="2414016" cy="329184"/>
+          </a:xfrm>
+          <a:prstGeom prst="rect">
+            <a:avLst/>
+          </a:prstGeom>
+          <a:noFill/>
+        </p:spPr>
+        <p:txBody>
+          <a:bodyPr wrap="square" anchor="t">
+            <a:spAutoFit/>
+          </a:bodyPr>
+          <a:lstStyle/>
+          <a:p>
+            <a:pPr algn="l"/>
+            <a:r>
+              <a:rPr sz="1400" b="1">
+                <a:solidFill>
+                  <a:srgbClr val="1F6FEB"/>
+                </a:solidFill>
+                <a:latin typeface="Arial"/>
+              </a:rPr>
+              <a:t>Access</a:t>
+            </a:r>
+          </a:p>
+        </p:txBody>
+      </p:sp>
+      <p:sp>
+        <p:nvSpPr>
+          <p:cNvPr id="37" name="TextBox 36"/>
+          <p:cNvSpPr txBox="1"/>
+          <p:nvPr/>
+        </p:nvSpPr>
+        <p:spPr>
+          <a:xfrm>
+            <a:off x="5120640" y="4343400"/>
+            <a:ext cx="2414016" cy="1005839"/>
+          </a:xfrm>
+          <a:prstGeom prst="rect">
+            <a:avLst/>
+          </a:prstGeom>
+          <a:noFill/>
+        </p:spPr>
+        <p:txBody>
+          <a:bodyPr wrap="square" anchor="t">
+            <a:spAutoFit/>
+          </a:bodyPr>
+          <a:lstStyle/>
+          <a:p>
+            <a:pPr algn="l"/>
+            <a:r>
+              <a:rPr sz="1150" b="0">
+                <a:solidFill>
+                  <a:srgbClr val="161B26"/>
+                </a:solidFill>
+                <a:latin typeface="Arial"/>
+              </a:rPr>
+              <a:t>Are contrast, labels and alt text adequate?</a:t>
+            </a:r>
+          </a:p>
+        </p:txBody>
+      </p:sp>
+      <p:sp>
+        <p:nvSpPr>
+          <p:cNvPr id="38" name="Rounded Rectangle 37"/>
+          <p:cNvSpPr/>
+          <p:nvPr/>
+        </p:nvSpPr>
+        <p:spPr>
+          <a:xfrm>
+            <a:off x="7900416" y="3776472"/>
+            <a:ext cx="3401568" cy="1719072"/>
+          </a:xfrm>
+          <a:prstGeom prst="roundRect">
+            <a:avLst/>
+          </a:prstGeom>
+          <a:solidFill>
+            <a:srgbClr val="F5F8FC"/>
+          </a:solidFill>
+          <a:ln>
+            <a:solidFill>
+              <a:srgbClr val="E2E8F0"/>
+            </a:solidFill>
+          </a:ln>
+        </p:spPr>
+        <p:style>
+          <a:lnRef idx="1">
+            <a:schemeClr val="accent1"/>
+          </a:lnRef>
+          <a:fillRef idx="3">
+            <a:schemeClr val="accent1"/>
+          </a:fillRef>
+          <a:effectRef idx="2">
+            <a:schemeClr val="accent1"/>
+          </a:effectRef>
+          <a:fontRef idx="minor">
+            <a:schemeClr val="lt1"/>
+          </a:fontRef>
+        </p:style>
+        <p:txBody>
+          <a:bodyPr rtlCol="0" anchor="ctr"/>
+          <a:lstStyle/>
+          <a:p>
+            <a:pPr algn="ctr"/>
+          </a:p>
+        </p:txBody>
+      </p:sp>
+      <p:sp>
+        <p:nvSpPr>
+          <p:cNvPr id="39" name="Rectangle 38"/>
+          <p:cNvSpPr/>
+          <p:nvPr/>
+        </p:nvSpPr>
+        <p:spPr>
+          <a:xfrm>
+            <a:off x="7900416" y="3776472"/>
+            <a:ext cx="73152" cy="1719072"/>
+          </a:xfrm>
+          <a:prstGeom prst="rect">
+            <a:avLst/>
+          </a:prstGeom>
+          <a:solidFill>
+            <a:srgbClr val="10B981"/>
+          </a:solidFill>
+          <a:ln>
+            <a:solidFill>
+              <a:srgbClr val="10B981"/>
+            </a:solidFill>
+          </a:ln>
+        </p:spPr>
+        <p:style>
+          <a:lnRef idx="1">
+            <a:schemeClr val="accent1"/>
+          </a:lnRef>
+          <a:fillRef idx="3">
+            <a:schemeClr val="accent1"/>
+          </a:fillRef>
+          <a:effectRef idx="2">
+            <a:schemeClr val="accent1"/>
+          </a:effectRef>
+          <a:fontRef idx="minor">
+            <a:schemeClr val="lt1"/>
+          </a:fontRef>
+        </p:style>
+        <p:txBody>
+          <a:bodyPr rtlCol="0" anchor="ctr"/>
+          <a:lstStyle/>
+          <a:p>
+            <a:pPr algn="ctr"/>
+          </a:p>
+        </p:txBody>
+      </p:sp>
+      <p:sp>
+        <p:nvSpPr>
+          <p:cNvPr id="40" name="Rounded Rectangle 39"/>
+          <p:cNvSpPr/>
+          <p:nvPr/>
+        </p:nvSpPr>
+        <p:spPr>
+          <a:xfrm>
+            <a:off x="8101584" y="3995928"/>
+            <a:ext cx="438912" cy="438912"/>
+          </a:xfrm>
+          <a:prstGeom prst="roundRect">
+            <a:avLst/>
+          </a:prstGeom>
+          <a:solidFill>
+            <a:srgbClr val="10B981"/>
+          </a:solidFill>
+          <a:ln>
+            <a:solidFill>
+              <a:srgbClr val="10B981"/>
+            </a:solidFill>
+          </a:ln>
+        </p:spPr>
+        <p:style>
+          <a:lnRef idx="1">
+            <a:schemeClr val="accent1"/>
+          </a:lnRef>
+          <a:fillRef idx="3">
+            <a:schemeClr val="accent1"/>
+          </a:fillRef>
+          <a:effectRef idx="2">
+            <a:schemeClr val="accent1"/>
+          </a:effectRef>
+          <a:fontRef idx="minor">
+            <a:schemeClr val="lt1"/>
+          </a:fontRef>
+        </p:style>
+        <p:txBody>
+          <a:bodyPr rtlCol="0" anchor="ctr"/>
+          <a:lstStyle/>
+          <a:p>
+            <a:pPr algn="ctr"/>
+          </a:p>
+        </p:txBody>
+      </p:sp>
+      <p:sp>
+        <p:nvSpPr>
+          <p:cNvPr id="41" name="TextBox 40"/>
+          <p:cNvSpPr txBox="1"/>
+          <p:nvPr/>
+        </p:nvSpPr>
+        <p:spPr>
+          <a:xfrm>
+            <a:off x="8101584" y="4005072"/>
+            <a:ext cx="438912" cy="420624"/>
+          </a:xfrm>
+          <a:prstGeom prst="rect">
+            <a:avLst/>
+          </a:prstGeom>
+          <a:noFill/>
+        </p:spPr>
+        <p:txBody>
+          <a:bodyPr wrap="square" anchor="ctr">
+            <a:spAutoFit/>
+          </a:bodyPr>
+          <a:lstStyle/>
+          <a:p>
+            <a:pPr algn="ctr"/>
+            <a:r>
+              <a:rPr sz="1400" b="1">
+                <a:solidFill>
+                  <a:srgbClr val="FFFFFF"/>
+                </a:solidFill>
+                <a:latin typeface="Arial"/>
+              </a:rPr>
+              <a:t>6</a:t>
+            </a:r>
+          </a:p>
+        </p:txBody>
+      </p:sp>
+      <p:sp>
+        <p:nvSpPr>
+          <p:cNvPr id="42" name="TextBox 41"/>
+          <p:cNvSpPr txBox="1"/>
+          <p:nvPr/>
+        </p:nvSpPr>
+        <p:spPr>
+          <a:xfrm>
+            <a:off x="8705088" y="3959352"/>
+            <a:ext cx="2414016" cy="329184"/>
+          </a:xfrm>
+          <a:prstGeom prst="rect">
+            <a:avLst/>
+          </a:prstGeom>
+          <a:noFill/>
+        </p:spPr>
+        <p:txBody>
+          <a:bodyPr wrap="square" anchor="t">
+            <a:spAutoFit/>
+          </a:bodyPr>
+          <a:lstStyle/>
+          <a:p>
+            <a:pPr algn="l"/>
+            <a:r>
+              <a:rPr sz="1400" b="1">
+                <a:solidFill>
+                  <a:srgbClr val="10B981"/>
+                </a:solidFill>
+                <a:latin typeface="Arial"/>
+              </a:rPr>
+              <a:t>Output</a:t>
+            </a:r>
+          </a:p>
+        </p:txBody>
+      </p:sp>
+      <p:sp>
+        <p:nvSpPr>
+          <p:cNvPr id="43" name="TextBox 42"/>
+          <p:cNvSpPr txBox="1"/>
+          <p:nvPr/>
+        </p:nvSpPr>
+        <p:spPr>
+          <a:xfrm>
+            <a:off x="8705088" y="4343400"/>
+            <a:ext cx="2414016" cy="1005839"/>
+          </a:xfrm>
+          <a:prstGeom prst="rect">
+            <a:avLst/>
+          </a:prstGeom>
+          <a:noFill/>
+        </p:spPr>
+        <p:txBody>
+          <a:bodyPr wrap="square" anchor="t">
+            <a:spAutoFit/>
+          </a:bodyPr>
+          <a:lstStyle/>
+          <a:p>
+            <a:pPr algn="l"/>
+            <a:r>
+              <a:rPr sz="1150" b="0">
+                <a:solidFill>
+                  <a:srgbClr val="161B26"/>
+                </a:solidFill>
+                <a:latin typeface="Arial"/>
+              </a:rPr>
+              <a:t>Do PPTX, PDF and JPG render as intended?</a:t>
+            </a:r>
+          </a:p>
+        </p:txBody>
+      </p:sp>
+    </p:spTree>
+  </p:cSld>
+  <p:clrMapOvr>
+    <a:masterClrMapping/>
+  </p:clrMapOvr>
+</p:sld>
+</file>
+
+<file path=ppt/slides/slide7.xml><?xml version="1.0" encoding="utf-8"?>
+<p:sld xmlns:a="http://schemas.openxmlformats.org/drawingml/2006/main" xmlns:p="http://schemas.openxmlformats.org/presentationml/2006/main" xmlns:r="http://schemas.openxmlformats.org/officeDocument/2006/relationships">
+  <p:cSld>
+    <p:spTree>
+      <p:nvGrpSpPr>
+        <p:cNvPr id="1" name=""/>
+        <p:cNvGrpSpPr/>
+        <p:nvPr/>
+      </p:nvGrpSpPr>
+      <p:grpSpPr/>
+      <p:sp>
+        <p:nvSpPr>
+          <p:cNvPr id="2" name="Rectangle 1"/>
+          <p:cNvSpPr/>
+          <p:nvPr/>
+        </p:nvSpPr>
+        <p:spPr>
+          <a:xfrm>
+            <a:off x="0" y="0"/>
+            <a:ext cx="12191695" cy="6858000"/>
+          </a:xfrm>
+          <a:prstGeom prst="rect">
+            <a:avLst/>
+          </a:prstGeom>
+          <a:solidFill>
+            <a:srgbClr val="FFFFFF"/>
+          </a:solidFill>
+          <a:ln>
+            <a:solidFill>
+              <a:srgbClr val="FFFFFF"/>
+            </a:solidFill>
+          </a:ln>
+        </p:spPr>
+        <p:style>
+          <a:lnRef idx="1">
+            <a:schemeClr val="accent1"/>
+          </a:lnRef>
+          <a:fillRef idx="3">
+            <a:schemeClr val="accent1"/>
+          </a:fillRef>
+          <a:effectRef idx="2">
+            <a:schemeClr val="accent1"/>
+          </a:effectRef>
+          <a:fontRef idx="minor">
+            <a:schemeClr val="lt1"/>
+          </a:fontRef>
+        </p:style>
+        <p:txBody>
+          <a:bodyPr rtlCol="0" anchor="ctr"/>
+          <a:lstStyle/>
+          <a:p>
+            <a:pPr algn="ctr"/>
+          </a:p>
+        </p:txBody>
+      </p:sp>
+      <p:sp>
+        <p:nvSpPr>
+          <p:cNvPr id="3" name="Rectangle 2"/>
+          <p:cNvSpPr/>
+          <p:nvPr/>
+        </p:nvSpPr>
+        <p:spPr>
+          <a:xfrm>
+            <a:off x="0" y="0"/>
+            <a:ext cx="164592" cy="6858000"/>
+          </a:xfrm>
+          <a:prstGeom prst="rect">
+            <a:avLst/>
+          </a:prstGeom>
+          <a:solidFill>
+            <a:srgbClr val="1F6FEB"/>
+          </a:solidFill>
+          <a:ln>
+            <a:solidFill>
+              <a:srgbClr val="1F6FEB"/>
+            </a:solidFill>
+          </a:ln>
+        </p:spPr>
+        <p:style>
+          <a:lnRef idx="1">
+            <a:schemeClr val="accent1"/>
+          </a:lnRef>
+          <a:fillRef idx="3">
+            <a:schemeClr val="accent1"/>
+          </a:fillRef>
+          <a:effectRef idx="2">
+            <a:schemeClr val="accent1"/>
+          </a:effectRef>
+          <a:fontRef idx="minor">
+            <a:schemeClr val="lt1"/>
+          </a:fontRef>
+        </p:style>
+        <p:txBody>
+          <a:bodyPr rtlCol="0" anchor="ctr"/>
+          <a:lstStyle/>
+          <a:p>
+            <a:pPr algn="ctr"/>
+          </a:p>
+        </p:txBody>
+      </p:sp>
+      <p:sp>
+        <p:nvSpPr>
+          <p:cNvPr id="4" name="TextBox 3"/>
+          <p:cNvSpPr txBox="1"/>
+          <p:nvPr/>
+        </p:nvSpPr>
+        <p:spPr>
+          <a:xfrm>
+            <a:off x="658368" y="384048"/>
+            <a:ext cx="10789920" cy="320040"/>
+          </a:xfrm>
+          <a:prstGeom prst="rect">
+            <a:avLst/>
+          </a:prstGeom>
+          <a:noFill/>
+        </p:spPr>
+        <p:txBody>
+          <a:bodyPr wrap="square" anchor="t">
+            <a:spAutoFit/>
+          </a:bodyPr>
+          <a:lstStyle/>
+          <a:p>
+            <a:pPr algn="l"/>
+            <a:r>
+              <a:rPr sz="1100" b="1">
+                <a:solidFill>
+                  <a:srgbClr val="1F6FEB"/>
+                </a:solidFill>
+                <a:latin typeface="Arial"/>
+              </a:rPr>
+              <a:t>ACTIVITY 03 · ACCEPTANCE</a:t>
+            </a:r>
+          </a:p>
+        </p:txBody>
+      </p:sp>
+      <p:sp>
+        <p:nvSpPr>
+          <p:cNvPr id="5" name="TextBox 4"/>
+          <p:cNvSpPr txBox="1"/>
+          <p:nvPr/>
+        </p:nvSpPr>
+        <p:spPr>
+          <a:xfrm>
+            <a:off x="658368" y="749808"/>
+            <a:ext cx="10789920" cy="658368"/>
+          </a:xfrm>
+          <a:prstGeom prst="rect">
+            <a:avLst/>
+          </a:prstGeom>
+          <a:noFill/>
+        </p:spPr>
+        <p:txBody>
+          <a:bodyPr wrap="square" anchor="t">
+            <a:spAutoFit/>
+          </a:bodyPr>
+          <a:lstStyle/>
+          <a:p>
+            <a:pPr algn="l"/>
+            <a:r>
+              <a:rPr sz="2700" b="1">
+                <a:solidFill>
+                  <a:srgbClr val="161B26"/>
+                </a:solidFill>
+                <a:latin typeface="Arial"/>
+              </a:rPr>
+              <a:t>What Good Looks Like</a:t>
+            </a:r>
+          </a:p>
+        </p:txBody>
+      </p:sp>
+      <p:sp>
+        <p:nvSpPr>
+          <p:cNvPr id="6" name="Rectangle 5"/>
+          <p:cNvSpPr/>
+          <p:nvPr/>
+        </p:nvSpPr>
+        <p:spPr>
+          <a:xfrm>
+            <a:off x="658368" y="1444752"/>
+            <a:ext cx="10881360" cy="18288"/>
+          </a:xfrm>
+          <a:prstGeom prst="rect">
+            <a:avLst/>
+          </a:prstGeom>
+          <a:solidFill>
+            <a:srgbClr val="E2E8F0"/>
+          </a:solidFill>
+          <a:ln>
+            <a:solidFill>
+              <a:srgbClr val="E2E8F0"/>
+            </a:solidFill>
+          </a:ln>
+        </p:spPr>
+        <p:style>
+          <a:lnRef idx="1">
+            <a:schemeClr val="accent1"/>
+          </a:lnRef>
+          <a:fillRef idx="3">
+            <a:schemeClr val="accent1"/>
+          </a:fillRef>
+          <a:effectRef idx="2">
+            <a:schemeClr val="accent1"/>
+          </a:effectRef>
+          <a:fontRef idx="minor">
+            <a:schemeClr val="lt1"/>
+          </a:fontRef>
+        </p:style>
+        <p:txBody>
+          <a:bodyPr rtlCol="0" anchor="ctr"/>
+          <a:lstStyle/>
+          <a:p>
+            <a:pPr algn="ctr"/>
+          </a:p>
+        </p:txBody>
+      </p:sp>
+      <p:sp>
+        <p:nvSpPr>
+          <p:cNvPr id="7" name="TextBox 6"/>
+          <p:cNvSpPr txBox="1"/>
+          <p:nvPr/>
+        </p:nvSpPr>
+        <p:spPr>
+          <a:xfrm>
+            <a:off x="658368" y="6473952"/>
+            <a:ext cx="9875520" cy="201168"/>
+          </a:xfrm>
+          <a:prstGeom prst="rect">
+            <a:avLst/>
+          </a:prstGeom>
+          <a:noFill/>
+        </p:spPr>
+        <p:txBody>
+          <a:bodyPr wrap="square" anchor="t">
+            <a:spAutoFit/>
+          </a:bodyPr>
+          <a:lstStyle/>
+          <a:p>
+            <a:pPr algn="l"/>
+            <a:r>
+              <a:rPr sz="800" b="0">
+                <a:solidFill>
+                  <a:srgbClr val="5B6372"/>
+                </a:solidFill>
+                <a:latin typeface="Arial"/>
+              </a:rPr>
+              <a:t>TGS-2026064178 · ACTIVITY PRACTICE · Tertiary Infotech Academy Pte Ltd</a:t>
+            </a:r>
+          </a:p>
+        </p:txBody>
+      </p:sp>
+      <p:sp>
+        <p:nvSpPr>
+          <p:cNvPr id="8" name="Rounded Rectangle 7"/>
+          <p:cNvSpPr/>
+          <p:nvPr/>
+        </p:nvSpPr>
+        <p:spPr>
+          <a:xfrm>
+            <a:off x="749808" y="1810512"/>
+            <a:ext cx="10652760" cy="1005840"/>
+          </a:xfrm>
+          <a:prstGeom prst="roundRect">
+            <a:avLst/>
+          </a:prstGeom>
+          <a:solidFill>
+            <a:srgbClr val="1F6FEB"/>
+          </a:solidFill>
+          <a:ln>
+            <a:solidFill>
+              <a:srgbClr val="1F6FEB"/>
+            </a:solidFill>
+          </a:ln>
+        </p:spPr>
+        <p:style>
+          <a:lnRef idx="1">
+            <a:schemeClr val="accent1"/>
+          </a:lnRef>
+          <a:fillRef idx="3">
+            <a:schemeClr val="accent1"/>
+          </a:fillRef>
+          <a:effectRef idx="2">
+            <a:schemeClr val="accent1"/>
+          </a:effectRef>
+          <a:fontRef idx="minor">
+            <a:schemeClr val="lt1"/>
+          </a:fontRef>
+        </p:style>
+        <p:txBody>
+          <a:bodyPr rtlCol="0" anchor="ctr"/>
+          <a:lstStyle/>
+          <a:p>
+            <a:pPr algn="ctr"/>
+          </a:p>
+        </p:txBody>
+      </p:sp>
+      <p:sp>
+        <p:nvSpPr>
+          <p:cNvPr id="9" name="TextBox 8"/>
+          <p:cNvSpPr txBox="1"/>
+          <p:nvPr/>
+        </p:nvSpPr>
+        <p:spPr>
+          <a:xfrm>
+            <a:off x="1051560" y="2011680"/>
+            <a:ext cx="10058400" cy="566928"/>
+          </a:xfrm>
+          <a:prstGeom prst="rect">
+            <a:avLst/>
+          </a:prstGeom>
+          <a:noFill/>
+        </p:spPr>
+        <p:txBody>
+          <a:bodyPr wrap="square" anchor="ctr">
+            <a:spAutoFit/>
+          </a:bodyPr>
+          <a:lstStyle/>
+          <a:p>
+            <a:pPr algn="ctr"/>
+            <a:r>
+              <a:rPr sz="1900" b="1">
+                <a:solidFill>
+                  <a:srgbClr val="FFFFFF"/>
+                </a:solidFill>
+                <a:latin typeface="Arial"/>
+              </a:rPr>
+              <a:t>An editable five-milestone timeline infographic in PPTX, PDF and JPG</a:t>
             </a:r>
           </a:p>
         </p:txBody>
